--- a/project_01/docs/Mariam_EDES301_project_01_proposal.pptx
+++ b/project_01/docs/Mariam_EDES301_project_01_proposal.pptx
@@ -5,10 +5,10 @@
     <p:sldMasterId id="2147483648" r:id="rId1"/>
   </p:sldMasterIdLst>
   <p:notesMasterIdLst>
-    <p:notesMasterId r:id="rId7"/>
+    <p:notesMasterId r:id="rId10"/>
   </p:notesMasterIdLst>
   <p:handoutMasterIdLst>
-    <p:handoutMasterId r:id="rId8"/>
+    <p:handoutMasterId r:id="rId11"/>
   </p:handoutMasterIdLst>
   <p:sldIdLst>
     <p:sldId id="261" r:id="rId2"/>
@@ -16,6 +16,9 @@
     <p:sldId id="368" r:id="rId4"/>
     <p:sldId id="370" r:id="rId5"/>
     <p:sldId id="369" r:id="rId6"/>
+    <p:sldId id="256" r:id="rId7"/>
+    <p:sldId id="257" r:id="rId8"/>
+    <p:sldId id="258" r:id="rId9"/>
   </p:sldIdLst>
   <p:sldSz cx="12192000" cy="6858000"/>
   <p:notesSz cx="6858000" cy="9144000"/>
@@ -139,7 +142,7 @@
 <file path=ppt/revisionInfo.xml><?xml version="1.0" encoding="utf-8"?>
 <p1510:revInfo xmlns:a="http://schemas.openxmlformats.org/drawingml/2006/main" xmlns:r="http://schemas.openxmlformats.org/officeDocument/2006/relationships" xmlns:p1510="http://schemas.microsoft.com/office/powerpoint/2015/10/main">
   <p1510:revLst>
-    <p1510:client id="{1D8B2EF3-7787-E243-9029-52C6ED9EB304}" v="4" dt="2026-10-01T05:35:02.532"/>
+    <p1510:client id="{33D5BC77-096E-654D-ACBB-475B1B9FAFDF}" v="3" dt="2026-10-20T17:41:49.904"/>
   </p1510:revLst>
 </p1510:revInfo>
 </file>
@@ -226,7 +229,7 @@
           <a:p>
             <a:fld id="{59041DB8-B66F-4DC8-A96E-33677E0F90FF}" type="datetimeFigureOut">
               <a:rPr lang="en-US" smtClean="0"/>
-              <a:t>9/30/26</a:t>
+              <a:t>10/20/26</a:t>
             </a:fld>
             <a:endParaRPr lang="en-US"/>
           </a:p>
@@ -391,7 +394,7 @@
           <a:p>
             <a:fld id="{DEB49C4A-65AC-492D-9701-81B46C3AD0E4}" type="datetimeFigureOut">
               <a:rPr lang="en-US" smtClean="0"/>
-              <a:t>9/30/26</a:t>
+              <a:t>10/20/26</a:t>
             </a:fld>
             <a:endParaRPr lang="en-US"/>
           </a:p>
@@ -702,123 +705,6 @@
           <a:bodyPr/>
           <a:lstStyle/>
           <a:p>
-            <a:r>
-              <a:rPr lang="en-US" dirty="0"/>
-              <a:t>Left side, inputs:</a:t>
-            </a:r>
-          </a:p>
-          <a:p>
-            <a:pPr marL="171450" indent="-171450">
-              <a:buFontTx/>
-              <a:buChar char="-"/>
-            </a:pPr>
-            <a:r>
-              <a:rPr lang="en-US" dirty="0"/>
-              <a:t>Two arcade buttons, one per player, plus a start button. Each is a GPIO connection.</a:t>
-            </a:r>
-          </a:p>
-          <a:p>
-            <a:pPr marL="171450" indent="-171450">
-              <a:buFontTx/>
-              <a:buChar char="-"/>
-            </a:pPr>
-            <a:r>
-              <a:rPr lang="en-US" dirty="0"/>
-              <a:t>Difficulty knob (potentiometer) uses AIN, an analog input. Reads how far the knob is turned. Likely will be used for single-player mode: sets how fast the computer “reacts.” </a:t>
-            </a:r>
-          </a:p>
-          <a:p>
-            <a:pPr marL="171450" indent="-171450">
-              <a:buFontTx/>
-              <a:buChar char="-"/>
-            </a:pPr>
-            <a:r>
-              <a:rPr lang="en-US" dirty="0"/>
-              <a:t>The micro-USB connector brings power in (the red line)</a:t>
-            </a:r>
-          </a:p>
-          <a:p>
-            <a:pPr marL="171450" indent="-171450">
-              <a:buFontTx/>
-              <a:buChar char="-"/>
-            </a:pPr>
-            <a:endParaRPr lang="en-US" dirty="0"/>
-          </a:p>
-          <a:p>
-            <a:pPr marL="0" indent="0">
-              <a:buFontTx/>
-              <a:buNone/>
-            </a:pPr>
-            <a:r>
-              <a:rPr lang="en-US" dirty="0"/>
-              <a:t>Right side, outputs:</a:t>
-            </a:r>
-          </a:p>
-          <a:p>
-            <a:pPr marL="171450" indent="-171450">
-              <a:buFontTx/>
-              <a:buChar char="-"/>
-            </a:pPr>
-            <a:r>
-              <a:rPr lang="en-US" dirty="0"/>
-              <a:t>7-segment display, over I2C. A two-wire conversation where the </a:t>
-            </a:r>
-            <a:r>
-              <a:rPr lang="en-US" dirty="0" err="1"/>
-              <a:t>PocketBeagle</a:t>
-            </a:r>
-            <a:r>
-              <a:rPr lang="en-US" dirty="0"/>
-              <a:t> sends numbers to show.</a:t>
-            </a:r>
-          </a:p>
-          <a:p>
-            <a:pPr marL="171450" indent="-171450">
-              <a:buFontTx/>
-              <a:buChar char="-"/>
-            </a:pPr>
-            <a:r>
-              <a:rPr lang="en-US" dirty="0"/>
-              <a:t>LED strip, over SPI: a fast data line that tells each LED what color to be. Goes through a level shifter first because </a:t>
-            </a:r>
-            <a:r>
-              <a:rPr lang="en-US" dirty="0" err="1"/>
-              <a:t>PocketBeagle</a:t>
-            </a:r>
-            <a:r>
-              <a:rPr lang="en-US" dirty="0"/>
-              <a:t> speaks at 3.3V and the strip expects 5V.</a:t>
-            </a:r>
-          </a:p>
-          <a:p>
-            <a:pPr marL="171450" indent="-171450">
-              <a:buFontTx/>
-              <a:buChar char="-"/>
-            </a:pPr>
-            <a:r>
-              <a:rPr lang="en-US" dirty="0"/>
-              <a:t>Buzzer, over PWM: the pin switches on and off very fast, and the speed sets the pitch of the sound.</a:t>
-            </a:r>
-          </a:p>
-          <a:p>
-            <a:pPr marL="171450" indent="-171450">
-              <a:buFontTx/>
-              <a:buChar char="-"/>
-            </a:pPr>
-            <a:r>
-              <a:rPr lang="en-US" b="0" dirty="0"/>
-              <a:t>µSD card: </a:t>
-            </a:r>
-            <a:r>
-              <a:rPr lang="en-US" dirty="0"/>
-              <a:t>where Linux, code and saved stats live.</a:t>
-            </a:r>
-          </a:p>
-          <a:p>
-            <a:pPr marL="171450" indent="-171450">
-              <a:buFontTx/>
-              <a:buChar char="-"/>
-            </a:pPr>
             <a:endParaRPr lang="en-US" dirty="0"/>
           </a:p>
         </p:txBody>
@@ -840,7 +726,7 @@
           <a:p>
             <a:fld id="{82869989-EB00-4EE7-BCB5-25BDC5BB29F8}" type="slidenum">
               <a:rPr lang="en-US" smtClean="0"/>
-              <a:t>3</a:t>
+              <a:t>1</a:t>
             </a:fld>
             <a:endParaRPr lang="en-US"/>
           </a:p>
@@ -849,7 +735,7 @@
     </p:spTree>
     <p:extLst>
       <p:ext uri="{BB962C8B-B14F-4D97-AF65-F5344CB8AC3E}">
-        <p14:creationId xmlns:p14="http://schemas.microsoft.com/office/powerpoint/2010/main" val="881386045"/>
+        <p14:creationId xmlns:p14="http://schemas.microsoft.com/office/powerpoint/2010/main" val="2130136694"/>
       </p:ext>
     </p:extLst>
   </p:cSld>
@@ -903,57 +789,77 @@
           <a:bodyPr/>
           <a:lstStyle/>
           <a:p>
-            <a:pPr marL="171450" indent="-171450">
+            <a:pPr marL="0" marR="0" lvl="0" indent="0" algn="l" defTabSz="914400" rtl="0" eaLnBrk="1" fontAlgn="auto" latinLnBrk="0" hangingPunct="1">
+              <a:lnSpc>
+                <a:spcPct val="100000"/>
+              </a:lnSpc>
+              <a:spcBef>
+                <a:spcPts val="0"/>
+              </a:spcBef>
+              <a:spcAft>
+                <a:spcPts val="0"/>
+              </a:spcAft>
+              <a:buClrTx/>
+              <a:buSzTx/>
               <a:buFontTx/>
-              <a:buChar char="-"/>
+              <a:buNone/>
+              <a:tabLst/>
+              <a:defRPr/>
             </a:pPr>
             <a:r>
               <a:rPr lang="en-US" dirty="0"/>
-              <a:t>Power comes in from a 5V wall adapter through the micro USB port</a:t>
-            </a:r>
-          </a:p>
-          <a:p>
-            <a:pPr marL="171450" indent="-171450">
+              <a:t>My project is a two-player reaction tug-of-war game. After a random GO cue, whoever hits their button first pulls a light on an LED strip one step toward their side, and the first to pull it all the way wins. The 7-segment display shows reaction times in milliseconds. It builds on your </a:t>
+            </a:r>
+            <a:r>
+              <a:rPr lang="en-US" dirty="0" err="1"/>
+              <a:t>Whac</a:t>
+            </a:r>
+            <a:r>
+              <a:rPr lang="en-US" dirty="0"/>
+              <a:t>-a-Mole project. I'm taking it from one player chasing a score to two players head-to-head, replacing the 4 LEDs with an addressable, LED strip and adding millisecond timing and a false-start penalty.</a:t>
+            </a:r>
+          </a:p>
+          <a:p>
+            <a:pPr marL="0" marR="0" lvl="0" indent="0" algn="l" defTabSz="914400" rtl="0" eaLnBrk="1" fontAlgn="auto" latinLnBrk="0" hangingPunct="1">
+              <a:lnSpc>
+                <a:spcPct val="100000"/>
+              </a:lnSpc>
+              <a:spcBef>
+                <a:spcPts val="0"/>
+              </a:spcBef>
+              <a:spcAft>
+                <a:spcPts val="0"/>
+              </a:spcAft>
+              <a:buClrTx/>
+              <a:buSzTx/>
               <a:buFontTx/>
-              <a:buChar char="-"/>
+              <a:buNone/>
+              <a:tabLst/>
+              <a:defRPr/>
             </a:pPr>
-            <a:r>
-              <a:rPr lang="en-US" dirty="0" err="1"/>
-              <a:t>Pocketbeagle</a:t>
-            </a:r>
+            <a:endParaRPr lang="en-US" dirty="0"/>
+          </a:p>
+          <a:p>
+            <a:pPr marL="0" marR="0" lvl="0" indent="0" algn="l" defTabSz="914400" rtl="0" eaLnBrk="1" fontAlgn="auto" latinLnBrk="0" hangingPunct="1">
+              <a:lnSpc>
+                <a:spcPct val="100000"/>
+              </a:lnSpc>
+              <a:spcBef>
+                <a:spcPts val="0"/>
+              </a:spcBef>
+              <a:spcAft>
+                <a:spcPts val="0"/>
+              </a:spcAft>
+              <a:buClrTx/>
+              <a:buSzTx/>
+              <a:buFontTx/>
+              <a:buNone/>
+              <a:tabLst/>
+              <a:defRPr/>
+            </a:pPr>
             <a:r>
               <a:rPr lang="en-US" dirty="0"/>
-              <a:t> hands it out on three rails</a:t>
-            </a:r>
-          </a:p>
-          <a:p>
-            <a:pPr marL="628650" lvl="1" indent="-171450">
-              <a:buFontTx/>
-              <a:buChar char="-"/>
-            </a:pPr>
-            <a:r>
-              <a:rPr lang="en-US" dirty="0"/>
-              <a:t>5V (red) for the LED strip</a:t>
-            </a:r>
-          </a:p>
-          <a:p>
-            <a:pPr marL="628650" lvl="1" indent="-171450">
-              <a:buFontTx/>
-              <a:buChar char="-"/>
-            </a:pPr>
-            <a:r>
-              <a:rPr lang="en-US" dirty="0"/>
-              <a:t>3.3V (blue) for the display, buzzer, and buttons</a:t>
-            </a:r>
-          </a:p>
-          <a:p>
-            <a:pPr marL="628650" lvl="1" indent="-171450">
-              <a:buFontTx/>
-              <a:buChar char="-"/>
-            </a:pPr>
-            <a:r>
-              <a:rPr lang="en-US" dirty="0"/>
-              <a:t>1.8V (green): only for difficulty knob. The analog input can’t handle more than 1.8V, so the knob must be wired here</a:t>
+              <a:t>If need to broaden scope: single-player mode against a computer</a:t>
             </a:r>
           </a:p>
         </p:txBody>
@@ -975,6 +881,402 @@
           <a:p>
             <a:fld id="{82869989-EB00-4EE7-BCB5-25BDC5BB29F8}" type="slidenum">
               <a:rPr lang="en-US" smtClean="0"/>
+              <a:t>2</a:t>
+            </a:fld>
+            <a:endParaRPr lang="en-US"/>
+          </a:p>
+        </p:txBody>
+      </p:sp>
+    </p:spTree>
+    <p:extLst>
+      <p:ext uri="{BB962C8B-B14F-4D97-AF65-F5344CB8AC3E}">
+        <p14:creationId xmlns:p14="http://schemas.microsoft.com/office/powerpoint/2010/main" val="4215577067"/>
+      </p:ext>
+    </p:extLst>
+  </p:cSld>
+  <p:clrMapOvr>
+    <a:masterClrMapping/>
+  </p:clrMapOvr>
+</p:notes>
+</file>
+
+<file path=ppt/notesSlides/notesSlide3.xml><?xml version="1.0" encoding="utf-8"?>
+<p:notes xmlns:a="http://schemas.openxmlformats.org/drawingml/2006/main" xmlns:r="http://schemas.openxmlformats.org/officeDocument/2006/relationships" xmlns:p="http://schemas.openxmlformats.org/presentationml/2006/main">
+  <p:cSld>
+    <p:spTree>
+      <p:nvGrpSpPr>
+        <p:cNvPr id="1" name=""/>
+        <p:cNvGrpSpPr/>
+        <p:nvPr/>
+      </p:nvGrpSpPr>
+      <p:grpSpPr>
+        <a:xfrm>
+          <a:off x="0" y="0"/>
+          <a:ext cx="0" cy="0"/>
+          <a:chOff x="0" y="0"/>
+          <a:chExt cx="0" cy="0"/>
+        </a:xfrm>
+      </p:grpSpPr>
+      <p:sp>
+        <p:nvSpPr>
+          <p:cNvPr id="2" name="Slide Image Placeholder 1"/>
+          <p:cNvSpPr>
+            <a:spLocks noGrp="1" noRot="1" noChangeAspect="1"/>
+          </p:cNvSpPr>
+          <p:nvPr>
+            <p:ph type="sldImg"/>
+          </p:nvPr>
+        </p:nvSpPr>
+        <p:spPr/>
+      </p:sp>
+      <p:sp>
+        <p:nvSpPr>
+          <p:cNvPr id="3" name="Notes Placeholder 2"/>
+          <p:cNvSpPr>
+            <a:spLocks noGrp="1"/>
+          </p:cNvSpPr>
+          <p:nvPr>
+            <p:ph type="body" idx="1"/>
+          </p:nvPr>
+        </p:nvSpPr>
+        <p:spPr/>
+        <p:txBody>
+          <a:bodyPr/>
+          <a:lstStyle/>
+          <a:p>
+            <a:r>
+              <a:rPr lang="en-US" dirty="0"/>
+              <a:t>Left side, inputs:</a:t>
+            </a:r>
+          </a:p>
+          <a:p>
+            <a:pPr marL="171450" indent="-171450">
+              <a:buFontTx/>
+              <a:buChar char="-"/>
+            </a:pPr>
+            <a:r>
+              <a:rPr lang="en-US" dirty="0"/>
+              <a:t>Two arcade buttons, one per player, plus a start button. Each is a GPIO connection.</a:t>
+            </a:r>
+          </a:p>
+          <a:p>
+            <a:pPr marL="171450" indent="-171450">
+              <a:buFontTx/>
+              <a:buChar char="-"/>
+            </a:pPr>
+            <a:r>
+              <a:rPr lang="en-US" dirty="0"/>
+              <a:t>Difficulty knob (potentiometer) uses AIN, an analog input. Reads how far the knob is turned. Likely will be used for single-player mode: sets how fast the computer “reacts.” </a:t>
+            </a:r>
+          </a:p>
+          <a:p>
+            <a:pPr marL="171450" indent="-171450">
+              <a:buFontTx/>
+              <a:buChar char="-"/>
+            </a:pPr>
+            <a:r>
+              <a:rPr lang="en-US" dirty="0"/>
+              <a:t>The micro-USB connector brings power in (the red line)</a:t>
+            </a:r>
+          </a:p>
+          <a:p>
+            <a:pPr marL="171450" indent="-171450">
+              <a:buFontTx/>
+              <a:buChar char="-"/>
+            </a:pPr>
+            <a:endParaRPr lang="en-US" dirty="0"/>
+          </a:p>
+          <a:p>
+            <a:pPr marL="0" indent="0">
+              <a:buFontTx/>
+              <a:buNone/>
+            </a:pPr>
+            <a:r>
+              <a:rPr lang="en-US" dirty="0"/>
+              <a:t>Right side, outputs:</a:t>
+            </a:r>
+          </a:p>
+          <a:p>
+            <a:pPr marL="171450" indent="-171450">
+              <a:buFontTx/>
+              <a:buChar char="-"/>
+            </a:pPr>
+            <a:r>
+              <a:rPr lang="en-US" dirty="0"/>
+              <a:t>7-segment display, over I2C. A two-wire conversation where the </a:t>
+            </a:r>
+            <a:r>
+              <a:rPr lang="en-US" dirty="0" err="1"/>
+              <a:t>PocketBeagle</a:t>
+            </a:r>
+            <a:r>
+              <a:rPr lang="en-US" dirty="0"/>
+              <a:t> sends numbers to show.</a:t>
+            </a:r>
+          </a:p>
+          <a:p>
+            <a:pPr marL="171450" indent="-171450">
+              <a:buFontTx/>
+              <a:buChar char="-"/>
+            </a:pPr>
+            <a:r>
+              <a:rPr lang="en-US" dirty="0"/>
+              <a:t>LED strip, over SPI: a fast data line that tells each LED what color to be. Goes through a level shifter first because </a:t>
+            </a:r>
+            <a:r>
+              <a:rPr lang="en-US" dirty="0" err="1"/>
+              <a:t>PocketBeagle</a:t>
+            </a:r>
+            <a:r>
+              <a:rPr lang="en-US" dirty="0"/>
+              <a:t> speaks at 3.3V and the strip expects 5V.</a:t>
+            </a:r>
+          </a:p>
+          <a:p>
+            <a:pPr marL="171450" indent="-171450">
+              <a:buFontTx/>
+              <a:buChar char="-"/>
+            </a:pPr>
+            <a:r>
+              <a:rPr lang="en-US" dirty="0"/>
+              <a:t>Buzzer, over PWM: the pin switches on and off very fast, and the speed sets the pitch of the sound.</a:t>
+            </a:r>
+          </a:p>
+          <a:p>
+            <a:pPr marL="171450" indent="-171450">
+              <a:buFontTx/>
+              <a:buChar char="-"/>
+            </a:pPr>
+            <a:r>
+              <a:rPr lang="en-US" b="0" dirty="0"/>
+              <a:t>µSD card: </a:t>
+            </a:r>
+            <a:r>
+              <a:rPr lang="en-US" dirty="0"/>
+              <a:t>where Linux, code and saved stats live.</a:t>
+            </a:r>
+          </a:p>
+          <a:p>
+            <a:pPr marL="171450" indent="-171450">
+              <a:buFontTx/>
+              <a:buChar char="-"/>
+            </a:pPr>
+            <a:endParaRPr lang="en-US" dirty="0"/>
+          </a:p>
+          <a:p>
+            <a:pPr marL="171450" indent="-171450">
+              <a:buFontTx/>
+              <a:buChar char="-"/>
+            </a:pPr>
+            <a:endParaRPr lang="en-US" dirty="0"/>
+          </a:p>
+          <a:p>
+            <a:pPr marL="171450" indent="-171450">
+              <a:buFontTx/>
+              <a:buChar char="-"/>
+            </a:pPr>
+            <a:r>
+              <a:rPr lang="en-US" dirty="0"/>
+              <a:t>timestamp each press when it happens, using edge detection, instead of checking the buttons one after another in a loop</a:t>
+            </a:r>
+          </a:p>
+          <a:p>
+            <a:pPr marL="171450" indent="-171450">
+              <a:buFontTx/>
+              <a:buChar char="-"/>
+            </a:pPr>
+            <a:endParaRPr lang="en-US" dirty="0"/>
+          </a:p>
+        </p:txBody>
+      </p:sp>
+      <p:sp>
+        <p:nvSpPr>
+          <p:cNvPr id="4" name="Slide Number Placeholder 3"/>
+          <p:cNvSpPr>
+            <a:spLocks noGrp="1"/>
+          </p:cNvSpPr>
+          <p:nvPr>
+            <p:ph type="sldNum" sz="quarter" idx="5"/>
+          </p:nvPr>
+        </p:nvSpPr>
+        <p:spPr/>
+        <p:txBody>
+          <a:bodyPr/>
+          <a:lstStyle/>
+          <a:p>
+            <a:fld id="{82869989-EB00-4EE7-BCB5-25BDC5BB29F8}" type="slidenum">
+              <a:rPr lang="en-US" smtClean="0"/>
+              <a:t>3</a:t>
+            </a:fld>
+            <a:endParaRPr lang="en-US"/>
+          </a:p>
+        </p:txBody>
+      </p:sp>
+    </p:spTree>
+    <p:extLst>
+      <p:ext uri="{BB962C8B-B14F-4D97-AF65-F5344CB8AC3E}">
+        <p14:creationId xmlns:p14="http://schemas.microsoft.com/office/powerpoint/2010/main" val="881386045"/>
+      </p:ext>
+    </p:extLst>
+  </p:cSld>
+  <p:clrMapOvr>
+    <a:masterClrMapping/>
+  </p:clrMapOvr>
+</p:notes>
+</file>
+
+<file path=ppt/notesSlides/notesSlide4.xml><?xml version="1.0" encoding="utf-8"?>
+<p:notes xmlns:a="http://schemas.openxmlformats.org/drawingml/2006/main" xmlns:r="http://schemas.openxmlformats.org/officeDocument/2006/relationships" xmlns:p="http://schemas.openxmlformats.org/presentationml/2006/main">
+  <p:cSld>
+    <p:spTree>
+      <p:nvGrpSpPr>
+        <p:cNvPr id="1" name=""/>
+        <p:cNvGrpSpPr/>
+        <p:nvPr/>
+      </p:nvGrpSpPr>
+      <p:grpSpPr>
+        <a:xfrm>
+          <a:off x="0" y="0"/>
+          <a:ext cx="0" cy="0"/>
+          <a:chOff x="0" y="0"/>
+          <a:chExt cx="0" cy="0"/>
+        </a:xfrm>
+      </p:grpSpPr>
+      <p:sp>
+        <p:nvSpPr>
+          <p:cNvPr id="2" name="Slide Image Placeholder 1"/>
+          <p:cNvSpPr>
+            <a:spLocks noGrp="1" noRot="1" noChangeAspect="1"/>
+          </p:cNvSpPr>
+          <p:nvPr>
+            <p:ph type="sldImg"/>
+          </p:nvPr>
+        </p:nvSpPr>
+        <p:spPr/>
+      </p:sp>
+      <p:sp>
+        <p:nvSpPr>
+          <p:cNvPr id="3" name="Notes Placeholder 2"/>
+          <p:cNvSpPr>
+            <a:spLocks noGrp="1"/>
+          </p:cNvSpPr>
+          <p:nvPr>
+            <p:ph type="body" idx="1"/>
+          </p:nvPr>
+        </p:nvSpPr>
+        <p:spPr/>
+        <p:txBody>
+          <a:bodyPr/>
+          <a:lstStyle/>
+          <a:p>
+            <a:pPr marL="171450" indent="-171450">
+              <a:buFontTx/>
+              <a:buChar char="-"/>
+            </a:pPr>
+            <a:r>
+              <a:rPr lang="en-US" dirty="0"/>
+              <a:t>Power comes in from a 5V wall adapter through the micro USB port</a:t>
+            </a:r>
+          </a:p>
+          <a:p>
+            <a:pPr marL="171450" indent="-171450">
+              <a:buFontTx/>
+              <a:buChar char="-"/>
+            </a:pPr>
+            <a:r>
+              <a:rPr lang="en-US" dirty="0" err="1"/>
+              <a:t>Pocketbeagle</a:t>
+            </a:r>
+            <a:r>
+              <a:rPr lang="en-US" dirty="0"/>
+              <a:t> hands it out on three rails</a:t>
+            </a:r>
+          </a:p>
+          <a:p>
+            <a:pPr marL="628650" lvl="1" indent="-171450">
+              <a:buFontTx/>
+              <a:buChar char="-"/>
+            </a:pPr>
+            <a:r>
+              <a:rPr lang="en-US" dirty="0"/>
+              <a:t>5V (red) for the LED strip</a:t>
+            </a:r>
+          </a:p>
+          <a:p>
+            <a:pPr marL="628650" lvl="1" indent="-171450">
+              <a:buFontTx/>
+              <a:buChar char="-"/>
+            </a:pPr>
+            <a:r>
+              <a:rPr lang="en-US" dirty="0"/>
+              <a:t>3.3V (blue) for the display, buzzer, and buttons</a:t>
+            </a:r>
+          </a:p>
+          <a:p>
+            <a:pPr marL="628650" lvl="1" indent="-171450">
+              <a:buFontTx/>
+              <a:buChar char="-"/>
+            </a:pPr>
+            <a:r>
+              <a:rPr lang="en-US" dirty="0"/>
+              <a:t>1.8V (green): only for difficulty knob. The analog input can’t handle more than 1.8V, so the knob must be wired here</a:t>
+            </a:r>
+          </a:p>
+          <a:p>
+            <a:pPr marL="0" lvl="0" indent="0">
+              <a:buFontTx/>
+              <a:buNone/>
+            </a:pPr>
+            <a:r>
+              <a:rPr lang="en-US" dirty="0"/>
+              <a:t>Led is the main power draw so I’ll cap brightness in the software and use a 2 A wall adapter</a:t>
+            </a:r>
+          </a:p>
+          <a:p>
+            <a:pPr marL="0" lvl="0" indent="0">
+              <a:buFontTx/>
+              <a:buNone/>
+            </a:pPr>
+            <a:r>
+              <a:rPr lang="en-US" dirty="0"/>
+              <a:t>How do you recommend controlling the LED strip from the </a:t>
+            </a:r>
+            <a:r>
+              <a:rPr lang="en-US" dirty="0" err="1"/>
+              <a:t>PocketBeagle</a:t>
+            </a:r>
+            <a:r>
+              <a:rPr lang="en-US"/>
+              <a:t>?</a:t>
+            </a:r>
+            <a:endParaRPr lang="en-US" dirty="0"/>
+          </a:p>
+          <a:p>
+            <a:pPr marL="628650" lvl="1" indent="-171450">
+              <a:buFontTx/>
+              <a:buChar char="-"/>
+            </a:pPr>
+            <a:endParaRPr lang="en-US" dirty="0"/>
+          </a:p>
+        </p:txBody>
+      </p:sp>
+      <p:sp>
+        <p:nvSpPr>
+          <p:cNvPr id="4" name="Slide Number Placeholder 3"/>
+          <p:cNvSpPr>
+            <a:spLocks noGrp="1"/>
+          </p:cNvSpPr>
+          <p:nvPr>
+            <p:ph type="sldNum" sz="quarter" idx="5"/>
+          </p:nvPr>
+        </p:nvSpPr>
+        <p:spPr/>
+        <p:txBody>
+          <a:bodyPr/>
+          <a:lstStyle/>
+          <a:p>
+            <a:fld id="{82869989-EB00-4EE7-BCB5-25BDC5BB29F8}" type="slidenum">
+              <a:rPr lang="en-US" smtClean="0"/>
               <a:t>4</a:t>
             </a:fld>
             <a:endParaRPr lang="en-US"/>
@@ -985,6 +1287,355 @@
     <p:extLst>
       <p:ext uri="{BB962C8B-B14F-4D97-AF65-F5344CB8AC3E}">
         <p14:creationId xmlns:p14="http://schemas.microsoft.com/office/powerpoint/2010/main" val="3402203299"/>
+      </p:ext>
+    </p:extLst>
+  </p:cSld>
+  <p:clrMapOvr>
+    <a:masterClrMapping/>
+  </p:clrMapOvr>
+</p:notes>
+</file>
+
+<file path=ppt/notesSlides/notesSlide5.xml><?xml version="1.0" encoding="utf-8"?>
+<p:notes xmlns:a="http://schemas.openxmlformats.org/drawingml/2006/main" xmlns:r="http://schemas.openxmlformats.org/officeDocument/2006/relationships" xmlns:p="http://schemas.openxmlformats.org/presentationml/2006/main">
+  <p:cSld>
+    <p:spTree>
+      <p:nvGrpSpPr>
+        <p:cNvPr id="1" name=""/>
+        <p:cNvGrpSpPr/>
+        <p:nvPr/>
+      </p:nvGrpSpPr>
+      <p:grpSpPr>
+        <a:xfrm>
+          <a:off x="0" y="0"/>
+          <a:ext cx="0" cy="0"/>
+          <a:chOff x="0" y="0"/>
+          <a:chExt cx="0" cy="0"/>
+        </a:xfrm>
+      </p:grpSpPr>
+      <p:sp>
+        <p:nvSpPr>
+          <p:cNvPr id="2" name="Slide Image Placeholder 1"/>
+          <p:cNvSpPr>
+            <a:spLocks noGrp="1" noRot="1" noChangeAspect="1"/>
+          </p:cNvSpPr>
+          <p:nvPr>
+            <p:ph type="sldImg"/>
+          </p:nvPr>
+        </p:nvSpPr>
+        <p:spPr/>
+      </p:sp>
+      <p:sp>
+        <p:nvSpPr>
+          <p:cNvPr id="3" name="Notes Placeholder 2"/>
+          <p:cNvSpPr>
+            <a:spLocks noGrp="1"/>
+          </p:cNvSpPr>
+          <p:nvPr>
+            <p:ph type="body" idx="1"/>
+          </p:nvPr>
+        </p:nvSpPr>
+        <p:spPr/>
+        <p:txBody>
+          <a:bodyPr/>
+          <a:lstStyle/>
+          <a:p>
+            <a:r>
+              <a:rPr lang="en-US" dirty="0"/>
+              <a:t>Will the parts-list level shifter (</a:t>
+            </a:r>
+            <a:r>
+              <a:rPr lang="en-US" dirty="0" err="1"/>
+              <a:t>pocketbeagle’s</a:t>
+            </a:r>
+            <a:r>
+              <a:rPr lang="en-US" dirty="0"/>
+              <a:t> pins put out 3.3 V, and the LED strip expects a 5 V data signal) be fast enough for the LED strip?</a:t>
+            </a:r>
+          </a:p>
+          <a:p>
+            <a:r>
+              <a:rPr lang="en-US" dirty="0"/>
+              <a:t>Are the arcade buttons OK or should I just use the kit buttons?</a:t>
+            </a:r>
+          </a:p>
+          <a:p>
+            <a:r>
+              <a:rPr lang="en-US" dirty="0"/>
+              <a:t>Instead do a row of the kit LEDs as a rope?</a:t>
+            </a:r>
+          </a:p>
+          <a:p>
+            <a:r>
+              <a:rPr lang="en-US" dirty="0"/>
+              <a:t>Potentiometer </a:t>
+            </a:r>
+            <a:r>
+              <a:rPr lang="en-US" dirty="0">
+                <a:sym typeface="Wingdings" pitchFamily="2" charset="2"/>
+              </a:rPr>
+              <a:t> difficulty</a:t>
+            </a:r>
+            <a:endParaRPr lang="en-US" dirty="0"/>
+          </a:p>
+        </p:txBody>
+      </p:sp>
+      <p:sp>
+        <p:nvSpPr>
+          <p:cNvPr id="4" name="Slide Number Placeholder 3"/>
+          <p:cNvSpPr>
+            <a:spLocks noGrp="1"/>
+          </p:cNvSpPr>
+          <p:nvPr>
+            <p:ph type="sldNum" sz="quarter" idx="5"/>
+          </p:nvPr>
+        </p:nvSpPr>
+        <p:spPr/>
+        <p:txBody>
+          <a:bodyPr/>
+          <a:lstStyle/>
+          <a:p>
+            <a:fld id="{82869989-EB00-4EE7-BCB5-25BDC5BB29F8}" type="slidenum">
+              <a:rPr lang="en-US" smtClean="0"/>
+              <a:t>5</a:t>
+            </a:fld>
+            <a:endParaRPr lang="en-US"/>
+          </a:p>
+        </p:txBody>
+      </p:sp>
+    </p:spTree>
+    <p:extLst>
+      <p:ext uri="{BB962C8B-B14F-4D97-AF65-F5344CB8AC3E}">
+        <p14:creationId xmlns:p14="http://schemas.microsoft.com/office/powerpoint/2010/main" val="3731038825"/>
+      </p:ext>
+    </p:extLst>
+  </p:cSld>
+  <p:clrMapOvr>
+    <a:masterClrMapping/>
+  </p:clrMapOvr>
+</p:notes>
+</file>
+
+<file path=ppt/notesSlides/notesSlide6.xml><?xml version="1.0" encoding="utf-8"?>
+<p:notes xmlns:a="http://schemas.openxmlformats.org/drawingml/2006/main" xmlns:r="http://schemas.openxmlformats.org/officeDocument/2006/relationships" xmlns:p="http://schemas.openxmlformats.org/presentationml/2006/main">
+  <p:cSld>
+    <p:spTree>
+      <p:nvGrpSpPr>
+        <p:cNvPr id="1" name=""/>
+        <p:cNvGrpSpPr/>
+        <p:nvPr/>
+      </p:nvGrpSpPr>
+      <p:grpSpPr>
+        <a:xfrm>
+          <a:off x="0" y="0"/>
+          <a:ext cx="0" cy="0"/>
+          <a:chOff x="0" y="0"/>
+          <a:chExt cx="0" cy="0"/>
+        </a:xfrm>
+      </p:grpSpPr>
+      <p:sp>
+        <p:nvSpPr>
+          <p:cNvPr id="2" name="Slide Image Placeholder 1"/>
+          <p:cNvSpPr>
+            <a:spLocks noGrp="1" noRot="1" noChangeAspect="1"/>
+          </p:cNvSpPr>
+          <p:nvPr>
+            <p:ph type="sldImg"/>
+          </p:nvPr>
+        </p:nvSpPr>
+        <p:spPr/>
+      </p:sp>
+      <p:sp>
+        <p:nvSpPr>
+          <p:cNvPr id="3" name="Notes Placeholder 2"/>
+          <p:cNvSpPr>
+            <a:spLocks noGrp="1"/>
+          </p:cNvSpPr>
+          <p:nvPr>
+            <p:ph type="body" idx="1"/>
+          </p:nvPr>
+        </p:nvSpPr>
+        <p:spPr/>
+        <p:txBody>
+          <a:bodyPr/>
+          <a:lstStyle/>
+          <a:p>
+            <a:pPr marL="0" marR="0" lvl="0" indent="0" algn="l" defTabSz="914400" rtl="0" eaLnBrk="1" fontAlgn="auto" latinLnBrk="0" hangingPunct="1">
+              <a:lnSpc>
+                <a:spcPct val="100000"/>
+              </a:lnSpc>
+              <a:spcBef>
+                <a:spcPts val="0"/>
+              </a:spcBef>
+              <a:spcAft>
+                <a:spcPts val="0"/>
+              </a:spcAft>
+              <a:buClrTx/>
+              <a:buSzTx/>
+              <a:buFontTx/>
+              <a:buNone/>
+              <a:tabLst/>
+              <a:defRPr/>
+            </a:pPr>
+            <a:r>
+              <a:rPr lang="en-US" sz="1200" b="0" i="1" dirty="0">
+                <a:solidFill>
+                  <a:srgbClr val="546E7A"/>
+                </a:solidFill>
+                <a:latin typeface="Calibri"/>
+              </a:rPr>
+              <a:t>Also: </a:t>
+            </a:r>
+            <a:r>
+              <a:rPr lang="en-US" sz="1200" b="0" i="1" dirty="0" err="1">
+                <a:solidFill>
+                  <a:srgbClr val="546E7A"/>
+                </a:solidFill>
+                <a:latin typeface="Calibri"/>
+              </a:rPr>
+              <a:t>configure_pins.sh</a:t>
+            </a:r>
+            <a:r>
+              <a:rPr lang="en-US" sz="1200" b="0" i="1" dirty="0">
+                <a:solidFill>
+                  <a:srgbClr val="546E7A"/>
+                </a:solidFill>
+                <a:latin typeface="Calibri"/>
+              </a:rPr>
+              <a:t> (I2C, SPI, PWM, GPIO pins) and run script → started at boot by </a:t>
+            </a:r>
+            <a:r>
+              <a:rPr lang="en-US" sz="1200" b="0" i="1" dirty="0" err="1">
+                <a:solidFill>
+                  <a:srgbClr val="546E7A"/>
+                </a:solidFill>
+                <a:latin typeface="Calibri"/>
+              </a:rPr>
+              <a:t>cron</a:t>
+            </a:r>
+            <a:endParaRPr lang="en-US" sz="1200" b="0" i="1" dirty="0">
+              <a:solidFill>
+                <a:srgbClr val="546E7A"/>
+              </a:solidFill>
+              <a:latin typeface="Calibri"/>
+            </a:endParaRPr>
+          </a:p>
+          <a:p>
+            <a:endParaRPr lang="en-US" dirty="0"/>
+          </a:p>
+        </p:txBody>
+      </p:sp>
+      <p:sp>
+        <p:nvSpPr>
+          <p:cNvPr id="4" name="Slide Number Placeholder 3"/>
+          <p:cNvSpPr>
+            <a:spLocks noGrp="1"/>
+          </p:cNvSpPr>
+          <p:nvPr>
+            <p:ph type="sldNum" sz="quarter" idx="5"/>
+          </p:nvPr>
+        </p:nvSpPr>
+        <p:spPr/>
+        <p:txBody>
+          <a:bodyPr/>
+          <a:lstStyle/>
+          <a:p>
+            <a:fld id="{82869989-EB00-4EE7-BCB5-25BDC5BB29F8}" type="slidenum">
+              <a:rPr lang="en-US" smtClean="0"/>
+              <a:t>7</a:t>
+            </a:fld>
+            <a:endParaRPr lang="en-US"/>
+          </a:p>
+        </p:txBody>
+      </p:sp>
+    </p:spTree>
+    <p:extLst>
+      <p:ext uri="{BB962C8B-B14F-4D97-AF65-F5344CB8AC3E}">
+        <p14:creationId xmlns:p14="http://schemas.microsoft.com/office/powerpoint/2010/main" val="1365388395"/>
+      </p:ext>
+    </p:extLst>
+  </p:cSld>
+  <p:clrMapOvr>
+    <a:masterClrMapping/>
+  </p:clrMapOvr>
+</p:notes>
+</file>
+
+<file path=ppt/notesSlides/notesSlide7.xml><?xml version="1.0" encoding="utf-8"?>
+<p:notes xmlns:a="http://schemas.openxmlformats.org/drawingml/2006/main" xmlns:r="http://schemas.openxmlformats.org/officeDocument/2006/relationships" xmlns:p="http://schemas.openxmlformats.org/presentationml/2006/main">
+  <p:cSld>
+    <p:spTree>
+      <p:nvGrpSpPr>
+        <p:cNvPr id="1" name=""/>
+        <p:cNvGrpSpPr/>
+        <p:nvPr/>
+      </p:nvGrpSpPr>
+      <p:grpSpPr>
+        <a:xfrm>
+          <a:off x="0" y="0"/>
+          <a:ext cx="0" cy="0"/>
+          <a:chOff x="0" y="0"/>
+          <a:chExt cx="0" cy="0"/>
+        </a:xfrm>
+      </p:grpSpPr>
+      <p:sp>
+        <p:nvSpPr>
+          <p:cNvPr id="2" name="Slide Image Placeholder 1"/>
+          <p:cNvSpPr>
+            <a:spLocks noGrp="1" noRot="1" noChangeAspect="1"/>
+          </p:cNvSpPr>
+          <p:nvPr>
+            <p:ph type="sldImg"/>
+          </p:nvPr>
+        </p:nvSpPr>
+        <p:spPr/>
+      </p:sp>
+      <p:sp>
+        <p:nvSpPr>
+          <p:cNvPr id="3" name="Notes Placeholder 2"/>
+          <p:cNvSpPr>
+            <a:spLocks noGrp="1"/>
+          </p:cNvSpPr>
+          <p:nvPr>
+            <p:ph type="body" idx="1"/>
+          </p:nvPr>
+        </p:nvSpPr>
+        <p:spPr/>
+        <p:txBody>
+          <a:bodyPr/>
+          <a:lstStyle/>
+          <a:p>
+            <a:endParaRPr lang="en-US"/>
+          </a:p>
+        </p:txBody>
+      </p:sp>
+      <p:sp>
+        <p:nvSpPr>
+          <p:cNvPr id="4" name="Slide Number Placeholder 3"/>
+          <p:cNvSpPr>
+            <a:spLocks noGrp="1"/>
+          </p:cNvSpPr>
+          <p:nvPr>
+            <p:ph type="sldNum" sz="quarter" idx="5"/>
+          </p:nvPr>
+        </p:nvSpPr>
+        <p:spPr/>
+        <p:txBody>
+          <a:bodyPr/>
+          <a:lstStyle/>
+          <a:p>
+            <a:fld id="{82869989-EB00-4EE7-BCB5-25BDC5BB29F8}" type="slidenum">
+              <a:rPr lang="en-US" smtClean="0"/>
+              <a:t>8</a:t>
+            </a:fld>
+            <a:endParaRPr lang="en-US"/>
+          </a:p>
+        </p:txBody>
+      </p:sp>
+    </p:spTree>
+    <p:extLst>
+      <p:ext uri="{BB962C8B-B14F-4D97-AF65-F5344CB8AC3E}">
+        <p14:creationId xmlns:p14="http://schemas.microsoft.com/office/powerpoint/2010/main" val="3204746725"/>
       </p:ext>
     </p:extLst>
   </p:cSld>
@@ -3135,7 +3786,7 @@
           <a:p>
             <a:fld id="{384A29A4-78C8-47AB-BA06-22CB45938951}" type="datetime1">
               <a:rPr lang="en-US" smtClean="0"/>
-              <a:t>9/30/26</a:t>
+              <a:t>10/20/26</a:t>
             </a:fld>
             <a:endParaRPr lang="en-US"/>
           </a:p>
@@ -3330,7 +3981,7 @@
           <a:p>
             <a:fld id="{E1ED4ACF-2D82-46F2-A8E9-23963AA34E86}" type="datetime1">
               <a:rPr lang="en-US" smtClean="0"/>
-              <a:t>9/30/26</a:t>
+              <a:t>10/20/26</a:t>
             </a:fld>
             <a:endParaRPr lang="en-US"/>
           </a:p>
@@ -3524,7 +4175,7 @@
           <a:p>
             <a:fld id="{AE374B5B-21A0-4192-BF4C-38187F1A68D8}" type="datetime1">
               <a:rPr lang="en-US" smtClean="0"/>
-              <a:t>9/30/26</a:t>
+              <a:t>10/20/26</a:t>
             </a:fld>
             <a:endParaRPr lang="en-US"/>
           </a:p>
@@ -5865,7 +6516,7 @@
           <a:p>
             <a:fld id="{33B5CF7C-B333-48E1-A4A6-83A3C8B73AC0}" type="datetime1">
               <a:rPr lang="en-US" smtClean="0"/>
-              <a:t>9/30/26</a:t>
+              <a:t>10/20/26</a:t>
             </a:fld>
             <a:endParaRPr lang="en-US"/>
           </a:p>
@@ -6318,7 +6969,7 @@
           <a:p>
             <a:fld id="{AE320762-5CBF-4210-AB54-376B091119F8}" type="datetime1">
               <a:rPr lang="en-US" smtClean="0"/>
-              <a:t>9/30/26</a:t>
+              <a:t>10/20/26</a:t>
             </a:fld>
             <a:endParaRPr lang="en-US"/>
           </a:p>
@@ -6450,7 +7101,7 @@
           <a:p>
             <a:fld id="{7F0DB371-BF5F-4058-A212-1A908E4D2674}" type="datetime1">
               <a:rPr lang="en-US" smtClean="0"/>
-              <a:t>9/30/26</a:t>
+              <a:t>10/20/26</a:t>
             </a:fld>
             <a:endParaRPr lang="en-US"/>
           </a:p>
@@ -8383,7 +9034,7 @@
           <a:p>
             <a:fld id="{60A4083B-90AA-48CF-BAD5-00AA24D7F288}" type="datetime1">
               <a:rPr lang="en-US" smtClean="0"/>
-              <a:t>9/30/26</a:t>
+              <a:t>10/20/26</a:t>
             </a:fld>
             <a:endParaRPr lang="en-US"/>
           </a:p>
@@ -10642,7 +11293,7 @@
             <a:fld id="{F5BAF629-ECA2-4CF3-B790-9D9BDED98269}" type="datetime1">
               <a:rPr lang="en-US" smtClean="0"/>
               <a:pPr/>
-              <a:t>9/30/26</a:t>
+              <a:t>10/20/26</a:t>
             </a:fld>
             <a:endParaRPr lang="en-US"/>
           </a:p>
@@ -14937,7 +15588,7 @@
             <a:fld id="{B51B2453-8663-4C69-AF73-9FD7B1DEC5D0}" type="datetime1">
               <a:rPr lang="en-US" smtClean="0"/>
               <a:pPr/>
-              <a:t>9/30/26</a:t>
+              <a:t>10/20/26</a:t>
             </a:fld>
             <a:endParaRPr lang="en-US" dirty="0"/>
           </a:p>
@@ -15755,7 +16406,7 @@
           <p:nvPr/>
         </p:nvPicPr>
         <p:blipFill>
-          <a:blip r:embed="rId2"/>
+          <a:blip r:embed="rId3"/>
           <a:stretch>
             <a:fillRect/>
           </a:stretch>
@@ -16362,7 +17013,7 @@
                       </a:r>
                       <a:r>
                         <a:rPr lang="en-US" dirty="0">
-                          <a:hlinkClick r:id="rId2"/>
+                          <a:hlinkClick r:id="rId3"/>
                         </a:rPr>
                         <a:t>[Amazon link]</a:t>
                       </a:r>
@@ -16415,7 +17066,7 @@
                       </a:r>
                       <a:r>
                         <a:rPr lang="en-US" dirty="0">
-                          <a:hlinkClick r:id="rId3"/>
+                          <a:hlinkClick r:id="rId4"/>
                         </a:rPr>
                         <a:t>[Amazon link]</a:t>
                       </a:r>
@@ -16468,7 +17119,7 @@
                       </a:r>
                       <a:r>
                         <a:rPr lang="en-US" dirty="0">
-                          <a:hlinkClick r:id="rId4"/>
+                          <a:hlinkClick r:id="rId5"/>
                         </a:rPr>
                         <a:t>Adafruit link</a:t>
                       </a:r>
@@ -16642,6 +17293,6005 @@
       </p:transition>
     </mc:Fallback>
   </mc:AlternateContent>
+</p:sld>
+</file>
+
+<file path=ppt/slides/slide6.xml><?xml version="1.0" encoding="utf-8"?>
+<p:sld xmlns:a="http://schemas.openxmlformats.org/drawingml/2006/main" xmlns:r="http://schemas.openxmlformats.org/officeDocument/2006/relationships" xmlns:p="http://schemas.openxmlformats.org/presentationml/2006/main">
+  <p:cSld>
+    <p:spTree>
+      <p:nvGrpSpPr>
+        <p:cNvPr id="1" name=""/>
+        <p:cNvGrpSpPr/>
+        <p:nvPr/>
+      </p:nvGrpSpPr>
+      <p:grpSpPr>
+        <a:xfrm>
+          <a:off x="0" y="0"/>
+          <a:ext cx="0" cy="0"/>
+          <a:chOff x="0" y="0"/>
+          <a:chExt cx="0" cy="0"/>
+        </a:xfrm>
+      </p:grpSpPr>
+      <p:sp>
+        <p:nvSpPr>
+          <p:cNvPr id="2" name="Title 1"/>
+          <p:cNvSpPr>
+            <a:spLocks noGrp="1"/>
+          </p:cNvSpPr>
+          <p:nvPr>
+            <p:ph type="title"/>
+          </p:nvPr>
+        </p:nvSpPr>
+        <p:spPr/>
+        <p:txBody>
+          <a:bodyPr/>
+          <a:lstStyle/>
+          <a:p>
+            <a:r>
+              <a:t>Software Block Diagram</a:t>
+            </a:r>
+          </a:p>
+        </p:txBody>
+      </p:sp>
+      <p:sp>
+        <p:nvSpPr>
+          <p:cNvPr id="3" name="Rounded Rectangle 2"/>
+          <p:cNvSpPr/>
+          <p:nvPr/>
+        </p:nvSpPr>
+        <p:spPr>
+          <a:xfrm>
+            <a:off x="4343400" y="1325880"/>
+            <a:ext cx="3520440" cy="4343400"/>
+          </a:xfrm>
+          <a:prstGeom prst="roundRect">
+            <a:avLst>
+              <a:gd name="adj" fmla="val 10000"/>
+            </a:avLst>
+          </a:prstGeom>
+          <a:solidFill>
+            <a:srgbClr val="8FB8DA"/>
+          </a:solidFill>
+          <a:ln>
+            <a:noFill/>
+          </a:ln>
+          <a:effectLst/>
+        </p:spPr>
+        <p:style>
+          <a:lnRef idx="1">
+            <a:schemeClr val="accent1"/>
+          </a:lnRef>
+          <a:fillRef idx="3">
+            <a:schemeClr val="accent1"/>
+          </a:fillRef>
+          <a:effectRef idx="2">
+            <a:schemeClr val="accent1"/>
+          </a:effectRef>
+          <a:fontRef idx="minor">
+            <a:schemeClr val="lt1"/>
+          </a:fontRef>
+        </p:style>
+        <p:txBody>
+          <a:bodyPr wrap="square" lIns="182880" tIns="27432" rIns="182880" bIns="27432" rtlCol="0" anchor="t"/>
+          <a:lstStyle/>
+          <a:p>
+            <a:pPr algn="ctr"/>
+            <a:r>
+              <a:rPr sz="1600" b="1" i="0" dirty="0" err="1">
+                <a:solidFill>
+                  <a:srgbClr val="263238"/>
+                </a:solidFill>
+                <a:latin typeface="Calibri"/>
+              </a:rPr>
+              <a:t>TugOfWarGame</a:t>
+            </a:r>
+            <a:endParaRPr sz="1600" b="1" i="0" dirty="0">
+              <a:solidFill>
+                <a:srgbClr val="263238"/>
+              </a:solidFill>
+              <a:latin typeface="Calibri"/>
+            </a:endParaRPr>
+          </a:p>
+          <a:p>
+            <a:pPr algn="ctr"/>
+            <a:r>
+              <a:rPr sz="900" b="0" i="1" dirty="0" err="1">
+                <a:solidFill>
+                  <a:srgbClr val="263238"/>
+                </a:solidFill>
+                <a:latin typeface="Calibri"/>
+              </a:rPr>
+              <a:t>tug_of_war.p</a:t>
+            </a:r>
+            <a:r>
+              <a:rPr lang="en-US" sz="900" b="0" i="1" dirty="0" err="1">
+                <a:solidFill>
+                  <a:srgbClr val="263238"/>
+                </a:solidFill>
+                <a:latin typeface="Calibri"/>
+              </a:rPr>
+              <a:t>y</a:t>
+            </a:r>
+            <a:endParaRPr sz="900" b="0" i="1" dirty="0">
+              <a:solidFill>
+                <a:srgbClr val="263238"/>
+              </a:solidFill>
+              <a:latin typeface="Calibri"/>
+            </a:endParaRPr>
+          </a:p>
+          <a:p>
+            <a:pPr algn="l"/>
+            <a:endParaRPr lang="en-US" sz="1100" b="0" i="0" dirty="0">
+              <a:solidFill>
+                <a:srgbClr val="263238"/>
+              </a:solidFill>
+              <a:latin typeface="Calibri"/>
+            </a:endParaRPr>
+          </a:p>
+          <a:p>
+            <a:pPr algn="l"/>
+            <a:r>
+              <a:rPr sz="1100" b="0" i="0" dirty="0">
+                <a:solidFill>
+                  <a:srgbClr val="263238"/>
+                </a:solidFill>
+                <a:latin typeface="Calibri"/>
+              </a:rPr>
+              <a:t>State: rope position, mode, difficulty,</a:t>
+            </a:r>
+            <a:r>
+              <a:rPr lang="en-US" sz="1100" b="0" i="0" dirty="0">
+                <a:solidFill>
+                  <a:srgbClr val="263238"/>
+                </a:solidFill>
+                <a:latin typeface="Calibri"/>
+              </a:rPr>
+              <a:t> </a:t>
+            </a:r>
+            <a:r>
+              <a:rPr sz="1100" b="0" i="0" dirty="0">
+                <a:solidFill>
+                  <a:srgbClr val="263238"/>
+                </a:solidFill>
+                <a:latin typeface="Calibri"/>
+              </a:rPr>
+              <a:t>round start time, best times</a:t>
+            </a:r>
+          </a:p>
+          <a:p>
+            <a:pPr algn="ctr"/>
+            <a:endParaRPr sz="1100" b="0" i="0" dirty="0">
+              <a:solidFill>
+                <a:srgbClr val="263238"/>
+              </a:solidFill>
+              <a:latin typeface="Calibri"/>
+            </a:endParaRPr>
+          </a:p>
+          <a:p>
+            <a:pPr algn="l"/>
+            <a:r>
+              <a:rPr sz="1100" b="0" i="0" dirty="0">
+                <a:solidFill>
+                  <a:srgbClr val="263238"/>
+                </a:solidFill>
+                <a:latin typeface="Calibri"/>
+              </a:rPr>
+              <a:t>_setup()  – create + initialize all drivers</a:t>
+            </a:r>
+          </a:p>
+          <a:p>
+            <a:pPr algn="l"/>
+            <a:r>
+              <a:rPr sz="1100" b="0" i="0" dirty="0">
+                <a:solidFill>
+                  <a:srgbClr val="263238"/>
+                </a:solidFill>
+                <a:latin typeface="Calibri"/>
+              </a:rPr>
+              <a:t>run()  – main loop (see flow diagram)</a:t>
+            </a:r>
+          </a:p>
+          <a:p>
+            <a:pPr algn="l"/>
+            <a:r>
+              <a:rPr sz="1100" b="0" i="0" dirty="0" err="1">
+                <a:solidFill>
+                  <a:srgbClr val="263238"/>
+                </a:solidFill>
+                <a:latin typeface="Calibri"/>
+              </a:rPr>
+              <a:t>select_mode</a:t>
+            </a:r>
+            <a:r>
+              <a:rPr sz="1100" b="0" i="0" dirty="0">
+                <a:solidFill>
+                  <a:srgbClr val="263238"/>
+                </a:solidFill>
+                <a:latin typeface="Calibri"/>
+              </a:rPr>
+              <a:t>()  – 1P vs CPU or 2P</a:t>
+            </a:r>
+          </a:p>
+          <a:p>
+            <a:pPr algn="l"/>
+            <a:r>
+              <a:rPr sz="1100" b="0" i="0" dirty="0" err="1">
+                <a:solidFill>
+                  <a:srgbClr val="263238"/>
+                </a:solidFill>
+                <a:latin typeface="Calibri"/>
+              </a:rPr>
+              <a:t>play_round</a:t>
+            </a:r>
+            <a:r>
+              <a:rPr sz="1100" b="0" i="0" dirty="0">
+                <a:solidFill>
+                  <a:srgbClr val="263238"/>
+                </a:solidFill>
+                <a:latin typeface="Calibri"/>
+              </a:rPr>
+              <a:t>()  – random wait, GO, judge</a:t>
+            </a:r>
+          </a:p>
+          <a:p>
+            <a:pPr algn="l"/>
+            <a:r>
+              <a:rPr sz="1100" b="0" i="0" dirty="0" err="1">
+                <a:solidFill>
+                  <a:srgbClr val="263238"/>
+                </a:solidFill>
+                <a:latin typeface="Calibri"/>
+              </a:rPr>
+              <a:t>false_start</a:t>
+            </a:r>
+            <a:r>
+              <a:rPr sz="1100" b="0" i="0" dirty="0">
+                <a:solidFill>
+                  <a:srgbClr val="263238"/>
+                </a:solidFill>
+                <a:latin typeface="Calibri"/>
+              </a:rPr>
+              <a:t>(player)</a:t>
+            </a:r>
+          </a:p>
+          <a:p>
+            <a:pPr algn="l"/>
+            <a:r>
+              <a:rPr sz="1100" b="0" i="0" dirty="0" err="1">
+                <a:solidFill>
+                  <a:srgbClr val="263238"/>
+                </a:solidFill>
+                <a:latin typeface="Calibri"/>
+              </a:rPr>
+              <a:t>cpu_reaction_ms</a:t>
+            </a:r>
+            <a:r>
+              <a:rPr sz="1100" b="0" i="0" dirty="0">
+                <a:solidFill>
+                  <a:srgbClr val="263238"/>
+                </a:solidFill>
+                <a:latin typeface="Calibri"/>
+              </a:rPr>
+              <a:t>()  – from difficulty</a:t>
+            </a:r>
+          </a:p>
+          <a:p>
+            <a:pPr algn="l"/>
+            <a:r>
+              <a:rPr sz="1100" b="0" i="0" dirty="0">
+                <a:solidFill>
+                  <a:srgbClr val="263238"/>
+                </a:solidFill>
+                <a:latin typeface="Calibri"/>
+              </a:rPr>
+              <a:t>victory(player)</a:t>
+            </a:r>
+          </a:p>
+          <a:p>
+            <a:pPr algn="l"/>
+            <a:r>
+              <a:rPr sz="1100" b="0" i="0" dirty="0">
+                <a:solidFill>
+                  <a:srgbClr val="263238"/>
+                </a:solidFill>
+                <a:latin typeface="Calibri"/>
+              </a:rPr>
+              <a:t>cleanup()  – on Ctrl-C</a:t>
+            </a:r>
+          </a:p>
+          <a:p>
+            <a:pPr algn="ctr"/>
+            <a:endParaRPr sz="1100" b="0" i="0" dirty="0">
+              <a:solidFill>
+                <a:srgbClr val="263238"/>
+              </a:solidFill>
+              <a:latin typeface="Calibri"/>
+            </a:endParaRPr>
+          </a:p>
+          <a:p>
+            <a:pPr algn="l"/>
+            <a:r>
+              <a:rPr sz="1000" b="1" i="0" dirty="0">
+                <a:solidFill>
+                  <a:srgbClr val="263238"/>
+                </a:solidFill>
+                <a:latin typeface="Calibri"/>
+              </a:rPr>
+              <a:t>Python libraries used:</a:t>
+            </a:r>
+          </a:p>
+          <a:p>
+            <a:pPr algn="l"/>
+            <a:r>
+              <a:rPr sz="1000" b="0" i="0" dirty="0" err="1">
+                <a:solidFill>
+                  <a:srgbClr val="263238"/>
+                </a:solidFill>
+                <a:latin typeface="Calibri"/>
+              </a:rPr>
+              <a:t>Adafruit_BBIO</a:t>
+            </a:r>
+            <a:r>
+              <a:rPr sz="1000" b="0" i="0" dirty="0">
+                <a:solidFill>
+                  <a:srgbClr val="263238"/>
+                </a:solidFill>
+                <a:latin typeface="Calibri"/>
+              </a:rPr>
+              <a:t> (GPIO, ADC, PWM), </a:t>
+            </a:r>
+            <a:r>
+              <a:rPr sz="1000" b="0" i="0" dirty="0" err="1">
+                <a:solidFill>
+                  <a:srgbClr val="263238"/>
+                </a:solidFill>
+                <a:latin typeface="Calibri"/>
+              </a:rPr>
+              <a:t>spidev</a:t>
+            </a:r>
+            <a:r>
+              <a:rPr sz="1000" b="0" i="0" dirty="0">
+                <a:solidFill>
+                  <a:srgbClr val="263238"/>
+                </a:solidFill>
+                <a:latin typeface="Calibri"/>
+              </a:rPr>
+              <a:t>,</a:t>
+            </a:r>
+          </a:p>
+          <a:p>
+            <a:pPr algn="l"/>
+            <a:r>
+              <a:rPr sz="1000" b="0" i="0" dirty="0" err="1">
+                <a:solidFill>
+                  <a:srgbClr val="263238"/>
+                </a:solidFill>
+                <a:latin typeface="Calibri"/>
+              </a:rPr>
+              <a:t>smbus</a:t>
+            </a:r>
+            <a:r>
+              <a:rPr sz="1000" b="0" i="0" dirty="0">
+                <a:solidFill>
+                  <a:srgbClr val="263238"/>
+                </a:solidFill>
+                <a:latin typeface="Calibri"/>
+              </a:rPr>
+              <a:t> (I2C), time, random, </a:t>
+            </a:r>
+            <a:r>
+              <a:rPr sz="1000" b="0" i="0" dirty="0" err="1">
+                <a:solidFill>
+                  <a:srgbClr val="263238"/>
+                </a:solidFill>
+                <a:latin typeface="Calibri"/>
+              </a:rPr>
+              <a:t>json</a:t>
+            </a:r>
+            <a:endParaRPr sz="1000" b="0" i="0" dirty="0">
+              <a:solidFill>
+                <a:srgbClr val="263238"/>
+              </a:solidFill>
+              <a:latin typeface="Calibri"/>
+            </a:endParaRPr>
+          </a:p>
+        </p:txBody>
+      </p:sp>
+      <p:sp>
+        <p:nvSpPr>
+          <p:cNvPr id="5" name="TextBox 4"/>
+          <p:cNvSpPr txBox="1"/>
+          <p:nvPr/>
+        </p:nvSpPr>
+        <p:spPr>
+          <a:xfrm>
+            <a:off x="9326880" y="1097280"/>
+            <a:ext cx="2286000" cy="228600"/>
+          </a:xfrm>
+          <a:prstGeom prst="rect">
+            <a:avLst/>
+          </a:prstGeom>
+          <a:noFill/>
+        </p:spPr>
+        <p:txBody>
+          <a:bodyPr wrap="square" lIns="0" tIns="0" rIns="0" bIns="0" anchor="t">
+            <a:spAutoFit/>
+          </a:bodyPr>
+          <a:lstStyle/>
+          <a:p>
+            <a:pPr algn="l"/>
+            <a:r>
+              <a:rPr sz="1000" b="1" i="0">
+                <a:solidFill>
+                  <a:srgbClr val="546E7A"/>
+                </a:solidFill>
+                <a:latin typeface="Calibri"/>
+              </a:rPr>
+              <a:t>USER OUTPUTS</a:t>
+            </a:r>
+          </a:p>
+        </p:txBody>
+      </p:sp>
+      <p:sp>
+        <p:nvSpPr>
+          <p:cNvPr id="6" name="Rounded Rectangle 5"/>
+          <p:cNvSpPr/>
+          <p:nvPr/>
+        </p:nvSpPr>
+        <p:spPr>
+          <a:xfrm>
+            <a:off x="612648" y="1371600"/>
+            <a:ext cx="2331720" cy="731520"/>
+          </a:xfrm>
+          <a:prstGeom prst="roundRect">
+            <a:avLst>
+              <a:gd name="adj" fmla="val 10000"/>
+            </a:avLst>
+          </a:prstGeom>
+          <a:solidFill>
+            <a:srgbClr val="E66A00"/>
+          </a:solidFill>
+          <a:ln>
+            <a:noFill/>
+          </a:ln>
+          <a:effectLst/>
+        </p:spPr>
+        <p:style>
+          <a:lnRef idx="1">
+            <a:schemeClr val="accent1"/>
+          </a:lnRef>
+          <a:fillRef idx="3">
+            <a:schemeClr val="accent1"/>
+          </a:fillRef>
+          <a:effectRef idx="2">
+            <a:schemeClr val="accent1"/>
+          </a:effectRef>
+          <a:fontRef idx="minor">
+            <a:schemeClr val="lt1"/>
+          </a:fontRef>
+        </p:style>
+        <p:txBody>
+          <a:bodyPr wrap="square" lIns="54864" tIns="27432" rIns="54864" bIns="27432" rtlCol="0" anchor="ctr"/>
+          <a:lstStyle/>
+          <a:p>
+            <a:pPr algn="ctr"/>
+            <a:r>
+              <a:rPr sz="1100" b="1" i="0">
+                <a:solidFill>
+                  <a:srgbClr val="FFFFFF"/>
+                </a:solidFill>
+                <a:latin typeface="Calibri"/>
+              </a:rPr>
+              <a:t>PlayerButton  (P1)</a:t>
+            </a:r>
+          </a:p>
+          <a:p>
+            <a:pPr algn="ctr"/>
+            <a:r>
+              <a:rPr sz="900" b="0" i="1">
+                <a:solidFill>
+                  <a:srgbClr val="FFFFFF"/>
+                </a:solidFill>
+                <a:latin typeface="Calibri"/>
+              </a:rPr>
+              <a:t>player_button.py → extends Button</a:t>
+            </a:r>
+          </a:p>
+          <a:p>
+            <a:pPr algn="ctr"/>
+            <a:r>
+              <a:rPr sz="900" b="0" i="0">
+                <a:solidFill>
+                  <a:srgbClr val="FFFFFF"/>
+                </a:solidFill>
+                <a:latin typeface="Calibri"/>
+              </a:rPr>
+              <a:t>GPIO P2_02</a:t>
+            </a:r>
+          </a:p>
+        </p:txBody>
+      </p:sp>
+      <p:cxnSp>
+        <p:nvCxnSpPr>
+          <p:cNvPr id="7" name="Connector 6"/>
+          <p:cNvCxnSpPr/>
+          <p:nvPr/>
+        </p:nvCxnSpPr>
+        <p:spPr>
+          <a:xfrm>
+            <a:off x="2944368" y="1737360"/>
+            <a:ext cx="1399032" cy="0"/>
+          </a:xfrm>
+          <a:prstGeom prst="line">
+            <a:avLst/>
+          </a:prstGeom>
+          <a:ln w="19050">
+            <a:solidFill>
+              <a:srgbClr val="263238"/>
+            </a:solidFill>
+            <a:tailEnd type="triangle"/>
+          </a:ln>
+        </p:spPr>
+        <p:style>
+          <a:lnRef idx="2">
+            <a:schemeClr val="accent1"/>
+          </a:lnRef>
+          <a:fillRef idx="0">
+            <a:schemeClr val="accent1"/>
+          </a:fillRef>
+          <a:effectRef idx="1">
+            <a:schemeClr val="accent1"/>
+          </a:effectRef>
+          <a:fontRef idx="minor">
+            <a:schemeClr val="tx1"/>
+          </a:fontRef>
+        </p:style>
+      </p:cxnSp>
+      <p:sp>
+        <p:nvSpPr>
+          <p:cNvPr id="8" name="TextBox 7"/>
+          <p:cNvSpPr txBox="1"/>
+          <p:nvPr/>
+        </p:nvSpPr>
+        <p:spPr>
+          <a:xfrm>
+            <a:off x="2990088" y="1536192"/>
+            <a:ext cx="1325880" cy="365760"/>
+          </a:xfrm>
+          <a:prstGeom prst="rect">
+            <a:avLst/>
+          </a:prstGeom>
+          <a:noFill/>
+        </p:spPr>
+        <p:txBody>
+          <a:bodyPr wrap="square" lIns="0" tIns="0" rIns="0" bIns="0" anchor="t">
+            <a:spAutoFit/>
+          </a:bodyPr>
+          <a:lstStyle/>
+          <a:p>
+            <a:pPr algn="l"/>
+            <a:r>
+              <a:rPr sz="900" b="0" i="0">
+                <a:solidFill>
+                  <a:srgbClr val="1B5EA8"/>
+                </a:solidFill>
+                <a:latin typeface="Calibri"/>
+              </a:rPr>
+              <a:t>get_press_time()</a:t>
+            </a:r>
+          </a:p>
+        </p:txBody>
+      </p:sp>
+      <p:sp>
+        <p:nvSpPr>
+          <p:cNvPr id="9" name="Rounded Rectangle 8"/>
+          <p:cNvSpPr/>
+          <p:nvPr/>
+        </p:nvSpPr>
+        <p:spPr>
+          <a:xfrm>
+            <a:off x="612648" y="2286000"/>
+            <a:ext cx="2331720" cy="731520"/>
+          </a:xfrm>
+          <a:prstGeom prst="roundRect">
+            <a:avLst>
+              <a:gd name="adj" fmla="val 10000"/>
+            </a:avLst>
+          </a:prstGeom>
+          <a:solidFill>
+            <a:srgbClr val="E66A00"/>
+          </a:solidFill>
+          <a:ln>
+            <a:noFill/>
+          </a:ln>
+          <a:effectLst/>
+        </p:spPr>
+        <p:style>
+          <a:lnRef idx="1">
+            <a:schemeClr val="accent1"/>
+          </a:lnRef>
+          <a:fillRef idx="3">
+            <a:schemeClr val="accent1"/>
+          </a:fillRef>
+          <a:effectRef idx="2">
+            <a:schemeClr val="accent1"/>
+          </a:effectRef>
+          <a:fontRef idx="minor">
+            <a:schemeClr val="lt1"/>
+          </a:fontRef>
+        </p:style>
+        <p:txBody>
+          <a:bodyPr wrap="square" lIns="54864" tIns="27432" rIns="54864" bIns="27432" rtlCol="0" anchor="ctr"/>
+          <a:lstStyle/>
+          <a:p>
+            <a:pPr algn="ctr"/>
+            <a:r>
+              <a:rPr sz="1100" b="1" i="0">
+                <a:solidFill>
+                  <a:srgbClr val="FFFFFF"/>
+                </a:solidFill>
+                <a:latin typeface="Calibri"/>
+              </a:rPr>
+              <a:t>PlayerButton  (P2)</a:t>
+            </a:r>
+          </a:p>
+          <a:p>
+            <a:pPr algn="ctr"/>
+            <a:r>
+              <a:rPr sz="900" b="0" i="1">
+                <a:solidFill>
+                  <a:srgbClr val="FFFFFF"/>
+                </a:solidFill>
+                <a:latin typeface="Calibri"/>
+              </a:rPr>
+              <a:t>player_button.py → extends Button</a:t>
+            </a:r>
+          </a:p>
+          <a:p>
+            <a:pPr algn="ctr"/>
+            <a:r>
+              <a:rPr sz="900" b="0" i="0">
+                <a:solidFill>
+                  <a:srgbClr val="FFFFFF"/>
+                </a:solidFill>
+                <a:latin typeface="Calibri"/>
+              </a:rPr>
+              <a:t>GPIO P2_04</a:t>
+            </a:r>
+          </a:p>
+        </p:txBody>
+      </p:sp>
+      <p:cxnSp>
+        <p:nvCxnSpPr>
+          <p:cNvPr id="10" name="Connector 9"/>
+          <p:cNvCxnSpPr/>
+          <p:nvPr/>
+        </p:nvCxnSpPr>
+        <p:spPr>
+          <a:xfrm>
+            <a:off x="2944368" y="2651760"/>
+            <a:ext cx="1399032" cy="0"/>
+          </a:xfrm>
+          <a:prstGeom prst="line">
+            <a:avLst/>
+          </a:prstGeom>
+          <a:ln w="19050">
+            <a:solidFill>
+              <a:srgbClr val="263238"/>
+            </a:solidFill>
+            <a:tailEnd type="triangle"/>
+          </a:ln>
+        </p:spPr>
+        <p:style>
+          <a:lnRef idx="2">
+            <a:schemeClr val="accent1"/>
+          </a:lnRef>
+          <a:fillRef idx="0">
+            <a:schemeClr val="accent1"/>
+          </a:fillRef>
+          <a:effectRef idx="1">
+            <a:schemeClr val="accent1"/>
+          </a:effectRef>
+          <a:fontRef idx="minor">
+            <a:schemeClr val="tx1"/>
+          </a:fontRef>
+        </p:style>
+      </p:cxnSp>
+      <p:sp>
+        <p:nvSpPr>
+          <p:cNvPr id="11" name="TextBox 10"/>
+          <p:cNvSpPr txBox="1"/>
+          <p:nvPr/>
+        </p:nvSpPr>
+        <p:spPr>
+          <a:xfrm>
+            <a:off x="2990088" y="2450591"/>
+            <a:ext cx="1325880" cy="365760"/>
+          </a:xfrm>
+          <a:prstGeom prst="rect">
+            <a:avLst/>
+          </a:prstGeom>
+          <a:noFill/>
+        </p:spPr>
+        <p:txBody>
+          <a:bodyPr wrap="square" lIns="0" tIns="0" rIns="0" bIns="0" anchor="t">
+            <a:spAutoFit/>
+          </a:bodyPr>
+          <a:lstStyle/>
+          <a:p>
+            <a:pPr algn="l"/>
+            <a:r>
+              <a:rPr sz="900" b="0" i="0">
+                <a:solidFill>
+                  <a:srgbClr val="1B5EA8"/>
+                </a:solidFill>
+                <a:latin typeface="Calibri"/>
+              </a:rPr>
+              <a:t>get_press_time()</a:t>
+            </a:r>
+          </a:p>
+        </p:txBody>
+      </p:sp>
+      <p:sp>
+        <p:nvSpPr>
+          <p:cNvPr id="12" name="Rounded Rectangle 11"/>
+          <p:cNvSpPr/>
+          <p:nvPr/>
+        </p:nvSpPr>
+        <p:spPr>
+          <a:xfrm>
+            <a:off x="612648" y="3200400"/>
+            <a:ext cx="2331720" cy="731520"/>
+          </a:xfrm>
+          <a:prstGeom prst="roundRect">
+            <a:avLst>
+              <a:gd name="adj" fmla="val 10000"/>
+            </a:avLst>
+          </a:prstGeom>
+          <a:solidFill>
+            <a:srgbClr val="2E7D32"/>
+          </a:solidFill>
+          <a:ln>
+            <a:noFill/>
+          </a:ln>
+          <a:effectLst/>
+        </p:spPr>
+        <p:style>
+          <a:lnRef idx="1">
+            <a:schemeClr val="accent1"/>
+          </a:lnRef>
+          <a:fillRef idx="3">
+            <a:schemeClr val="accent1"/>
+          </a:fillRef>
+          <a:effectRef idx="2">
+            <a:schemeClr val="accent1"/>
+          </a:effectRef>
+          <a:fontRef idx="minor">
+            <a:schemeClr val="lt1"/>
+          </a:fontRef>
+        </p:style>
+        <p:txBody>
+          <a:bodyPr wrap="square" lIns="54864" tIns="27432" rIns="54864" bIns="27432" rtlCol="0" anchor="ctr"/>
+          <a:lstStyle/>
+          <a:p>
+            <a:pPr algn="ctr"/>
+            <a:r>
+              <a:rPr sz="1100" b="1" i="0">
+                <a:solidFill>
+                  <a:srgbClr val="FFFFFF"/>
+                </a:solidFill>
+                <a:latin typeface="Calibri"/>
+              </a:rPr>
+              <a:t>Button  (start / mode)</a:t>
+            </a:r>
+          </a:p>
+          <a:p>
+            <a:pPr algn="ctr"/>
+            <a:r>
+              <a:rPr sz="900" b="0" i="1">
+                <a:solidFill>
+                  <a:srgbClr val="FFFFFF"/>
+                </a:solidFill>
+                <a:latin typeface="Calibri"/>
+              </a:rPr>
+              <a:t>button.py  (HW #4)</a:t>
+            </a:r>
+          </a:p>
+          <a:p>
+            <a:pPr algn="ctr"/>
+            <a:r>
+              <a:rPr sz="900" b="0" i="0">
+                <a:solidFill>
+                  <a:srgbClr val="FFFFFF"/>
+                </a:solidFill>
+                <a:latin typeface="Calibri"/>
+              </a:rPr>
+              <a:t>GPIO P2_06</a:t>
+            </a:r>
+          </a:p>
+        </p:txBody>
+      </p:sp>
+      <p:cxnSp>
+        <p:nvCxnSpPr>
+          <p:cNvPr id="13" name="Connector 12"/>
+          <p:cNvCxnSpPr/>
+          <p:nvPr/>
+        </p:nvCxnSpPr>
+        <p:spPr>
+          <a:xfrm>
+            <a:off x="2944368" y="3566160"/>
+            <a:ext cx="1399032" cy="0"/>
+          </a:xfrm>
+          <a:prstGeom prst="line">
+            <a:avLst/>
+          </a:prstGeom>
+          <a:ln w="19050">
+            <a:solidFill>
+              <a:srgbClr val="263238"/>
+            </a:solidFill>
+            <a:tailEnd type="triangle"/>
+          </a:ln>
+        </p:spPr>
+        <p:style>
+          <a:lnRef idx="2">
+            <a:schemeClr val="accent1"/>
+          </a:lnRef>
+          <a:fillRef idx="0">
+            <a:schemeClr val="accent1"/>
+          </a:fillRef>
+          <a:effectRef idx="1">
+            <a:schemeClr val="accent1"/>
+          </a:effectRef>
+          <a:fontRef idx="minor">
+            <a:schemeClr val="tx1"/>
+          </a:fontRef>
+        </p:style>
+      </p:cxnSp>
+      <p:sp>
+        <p:nvSpPr>
+          <p:cNvPr id="14" name="TextBox 13"/>
+          <p:cNvSpPr txBox="1"/>
+          <p:nvPr/>
+        </p:nvSpPr>
+        <p:spPr>
+          <a:xfrm>
+            <a:off x="2990088" y="3218688"/>
+            <a:ext cx="1325880" cy="365760"/>
+          </a:xfrm>
+          <a:prstGeom prst="rect">
+            <a:avLst/>
+          </a:prstGeom>
+          <a:noFill/>
+        </p:spPr>
+        <p:txBody>
+          <a:bodyPr wrap="square" lIns="0" tIns="0" rIns="0" bIns="0" anchor="t">
+            <a:spAutoFit/>
+          </a:bodyPr>
+          <a:lstStyle/>
+          <a:p>
+            <a:pPr algn="l"/>
+            <a:r>
+              <a:rPr sz="900" b="0" i="0">
+                <a:solidFill>
+                  <a:srgbClr val="1B5EA8"/>
+                </a:solidFill>
+                <a:latin typeface="Calibri"/>
+              </a:rPr>
+              <a:t>wait_for_press()</a:t>
+            </a:r>
+          </a:p>
+          <a:p>
+            <a:pPr algn="l"/>
+            <a:r>
+              <a:rPr sz="900" b="0" i="0">
+                <a:solidFill>
+                  <a:srgbClr val="1B5EA8"/>
+                </a:solidFill>
+                <a:latin typeface="Calibri"/>
+              </a:rPr>
+              <a:t>get_last_press_duration()</a:t>
+            </a:r>
+          </a:p>
+        </p:txBody>
+      </p:sp>
+      <p:sp>
+        <p:nvSpPr>
+          <p:cNvPr id="15" name="Rounded Rectangle 14"/>
+          <p:cNvSpPr/>
+          <p:nvPr/>
+        </p:nvSpPr>
+        <p:spPr>
+          <a:xfrm>
+            <a:off x="612648" y="4114800"/>
+            <a:ext cx="2331720" cy="731520"/>
+          </a:xfrm>
+          <a:prstGeom prst="roundRect">
+            <a:avLst>
+              <a:gd name="adj" fmla="val 10000"/>
+            </a:avLst>
+          </a:prstGeom>
+          <a:solidFill>
+            <a:srgbClr val="2E7D32"/>
+          </a:solidFill>
+          <a:ln>
+            <a:noFill/>
+          </a:ln>
+          <a:effectLst/>
+        </p:spPr>
+        <p:style>
+          <a:lnRef idx="1">
+            <a:schemeClr val="accent1"/>
+          </a:lnRef>
+          <a:fillRef idx="3">
+            <a:schemeClr val="accent1"/>
+          </a:fillRef>
+          <a:effectRef idx="2">
+            <a:schemeClr val="accent1"/>
+          </a:effectRef>
+          <a:fontRef idx="minor">
+            <a:schemeClr val="lt1"/>
+          </a:fontRef>
+        </p:style>
+        <p:txBody>
+          <a:bodyPr wrap="square" lIns="54864" tIns="27432" rIns="54864" bIns="27432" rtlCol="0" anchor="ctr"/>
+          <a:lstStyle/>
+          <a:p>
+            <a:pPr algn="ctr"/>
+            <a:r>
+              <a:rPr sz="1100" b="1" i="0">
+                <a:solidFill>
+                  <a:srgbClr val="FFFFFF"/>
+                </a:solidFill>
+                <a:latin typeface="Calibri"/>
+              </a:rPr>
+              <a:t>Potentiometer</a:t>
+            </a:r>
+          </a:p>
+          <a:p>
+            <a:pPr algn="ctr"/>
+            <a:r>
+              <a:rPr sz="900" b="0" i="1">
+                <a:solidFill>
+                  <a:srgbClr val="FFFFFF"/>
+                </a:solidFill>
+                <a:latin typeface="Calibri"/>
+              </a:rPr>
+              <a:t>potentiometer.py  (class)</a:t>
+            </a:r>
+          </a:p>
+          <a:p>
+            <a:pPr algn="ctr"/>
+            <a:r>
+              <a:rPr sz="900" b="0" i="0">
+                <a:solidFill>
+                  <a:srgbClr val="FFFFFF"/>
+                </a:solidFill>
+                <a:latin typeface="Calibri"/>
+              </a:rPr>
+              <a:t>AIN0 P1_19</a:t>
+            </a:r>
+          </a:p>
+        </p:txBody>
+      </p:sp>
+      <p:cxnSp>
+        <p:nvCxnSpPr>
+          <p:cNvPr id="16" name="Connector 15"/>
+          <p:cNvCxnSpPr/>
+          <p:nvPr/>
+        </p:nvCxnSpPr>
+        <p:spPr>
+          <a:xfrm>
+            <a:off x="2944368" y="4480560"/>
+            <a:ext cx="1399032" cy="0"/>
+          </a:xfrm>
+          <a:prstGeom prst="line">
+            <a:avLst/>
+          </a:prstGeom>
+          <a:ln w="19050">
+            <a:solidFill>
+              <a:srgbClr val="263238"/>
+            </a:solidFill>
+            <a:tailEnd type="triangle"/>
+          </a:ln>
+        </p:spPr>
+        <p:style>
+          <a:lnRef idx="2">
+            <a:schemeClr val="accent1"/>
+          </a:lnRef>
+          <a:fillRef idx="0">
+            <a:schemeClr val="accent1"/>
+          </a:fillRef>
+          <a:effectRef idx="1">
+            <a:schemeClr val="accent1"/>
+          </a:effectRef>
+          <a:fontRef idx="minor">
+            <a:schemeClr val="tx1"/>
+          </a:fontRef>
+        </p:style>
+      </p:cxnSp>
+      <p:sp>
+        <p:nvSpPr>
+          <p:cNvPr id="17" name="TextBox 16"/>
+          <p:cNvSpPr txBox="1"/>
+          <p:nvPr/>
+        </p:nvSpPr>
+        <p:spPr>
+          <a:xfrm>
+            <a:off x="2990088" y="4279392"/>
+            <a:ext cx="1325880" cy="365760"/>
+          </a:xfrm>
+          <a:prstGeom prst="rect">
+            <a:avLst/>
+          </a:prstGeom>
+          <a:noFill/>
+        </p:spPr>
+        <p:txBody>
+          <a:bodyPr wrap="square" lIns="0" tIns="0" rIns="0" bIns="0" anchor="t">
+            <a:spAutoFit/>
+          </a:bodyPr>
+          <a:lstStyle/>
+          <a:p>
+            <a:pPr algn="l"/>
+            <a:r>
+              <a:rPr sz="900" b="0" i="0">
+                <a:solidFill>
+                  <a:srgbClr val="1B5EA8"/>
+                </a:solidFill>
+                <a:latin typeface="Calibri"/>
+              </a:rPr>
+              <a:t>get_value()  → 0–4095</a:t>
+            </a:r>
+          </a:p>
+        </p:txBody>
+      </p:sp>
+      <p:sp>
+        <p:nvSpPr>
+          <p:cNvPr id="18" name="Rounded Rectangle 17"/>
+          <p:cNvSpPr/>
+          <p:nvPr/>
+        </p:nvSpPr>
+        <p:spPr>
+          <a:xfrm>
+            <a:off x="9281160" y="1371600"/>
+            <a:ext cx="2304288" cy="731520"/>
+          </a:xfrm>
+          <a:prstGeom prst="roundRect">
+            <a:avLst>
+              <a:gd name="adj" fmla="val 10000"/>
+            </a:avLst>
+          </a:prstGeom>
+          <a:solidFill>
+            <a:srgbClr val="2E7D32"/>
+          </a:solidFill>
+          <a:ln>
+            <a:noFill/>
+          </a:ln>
+          <a:effectLst/>
+        </p:spPr>
+        <p:style>
+          <a:lnRef idx="1">
+            <a:schemeClr val="accent1"/>
+          </a:lnRef>
+          <a:fillRef idx="3">
+            <a:schemeClr val="accent1"/>
+          </a:fillRef>
+          <a:effectRef idx="2">
+            <a:schemeClr val="accent1"/>
+          </a:effectRef>
+          <a:fontRef idx="minor">
+            <a:schemeClr val="lt1"/>
+          </a:fontRef>
+        </p:style>
+        <p:txBody>
+          <a:bodyPr wrap="square" lIns="54864" tIns="27432" rIns="54864" bIns="27432" rtlCol="0" anchor="ctr"/>
+          <a:lstStyle/>
+          <a:p>
+            <a:pPr algn="ctr"/>
+            <a:r>
+              <a:rPr sz="1100" b="1" i="0">
+                <a:solidFill>
+                  <a:srgbClr val="FFFFFF"/>
+                </a:solidFill>
+                <a:latin typeface="Calibri"/>
+              </a:rPr>
+              <a:t>HT16K33</a:t>
+            </a:r>
+          </a:p>
+          <a:p>
+            <a:pPr algn="ctr"/>
+            <a:r>
+              <a:rPr sz="900" b="0" i="1">
+                <a:solidFill>
+                  <a:srgbClr val="FFFFFF"/>
+                </a:solidFill>
+                <a:latin typeface="Calibri"/>
+              </a:rPr>
+              <a:t>ht16k33.py  (class)</a:t>
+            </a:r>
+          </a:p>
+          <a:p>
+            <a:pPr algn="ctr"/>
+            <a:r>
+              <a:rPr sz="900" b="0" i="0">
+                <a:solidFill>
+                  <a:srgbClr val="FFFFFF"/>
+                </a:solidFill>
+                <a:latin typeface="Calibri"/>
+              </a:rPr>
+              <a:t>I2C1 – 7-seg display</a:t>
+            </a:r>
+          </a:p>
+        </p:txBody>
+      </p:sp>
+      <p:cxnSp>
+        <p:nvCxnSpPr>
+          <p:cNvPr id="19" name="Connector 18"/>
+          <p:cNvCxnSpPr/>
+          <p:nvPr/>
+        </p:nvCxnSpPr>
+        <p:spPr>
+          <a:xfrm>
+            <a:off x="7863840" y="1737360"/>
+            <a:ext cx="1417320" cy="0"/>
+          </a:xfrm>
+          <a:prstGeom prst="line">
+            <a:avLst/>
+          </a:prstGeom>
+          <a:ln w="19050">
+            <a:solidFill>
+              <a:srgbClr val="263238"/>
+            </a:solidFill>
+            <a:tailEnd type="triangle"/>
+          </a:ln>
+        </p:spPr>
+        <p:style>
+          <a:lnRef idx="2">
+            <a:schemeClr val="accent1"/>
+          </a:lnRef>
+          <a:fillRef idx="0">
+            <a:schemeClr val="accent1"/>
+          </a:fillRef>
+          <a:effectRef idx="1">
+            <a:schemeClr val="accent1"/>
+          </a:effectRef>
+          <a:fontRef idx="minor">
+            <a:schemeClr val="tx1"/>
+          </a:fontRef>
+        </p:style>
+      </p:cxnSp>
+      <p:sp>
+        <p:nvSpPr>
+          <p:cNvPr id="20" name="TextBox 19"/>
+          <p:cNvSpPr txBox="1"/>
+          <p:nvPr/>
+        </p:nvSpPr>
+        <p:spPr>
+          <a:xfrm>
+            <a:off x="7927848" y="1389888"/>
+            <a:ext cx="1325880" cy="365760"/>
+          </a:xfrm>
+          <a:prstGeom prst="rect">
+            <a:avLst/>
+          </a:prstGeom>
+          <a:noFill/>
+        </p:spPr>
+        <p:txBody>
+          <a:bodyPr wrap="square" lIns="0" tIns="0" rIns="0" bIns="0" anchor="t">
+            <a:spAutoFit/>
+          </a:bodyPr>
+          <a:lstStyle/>
+          <a:p>
+            <a:pPr algn="l"/>
+            <a:r>
+              <a:rPr sz="900" b="0" i="0">
+                <a:solidFill>
+                  <a:srgbClr val="1B5EA8"/>
+                </a:solidFill>
+                <a:latin typeface="Calibri"/>
+              </a:rPr>
+              <a:t>update(ms)</a:t>
+            </a:r>
+          </a:p>
+          <a:p>
+            <a:pPr algn="l"/>
+            <a:r>
+              <a:rPr sz="900" b="0" i="0">
+                <a:solidFill>
+                  <a:srgbClr val="1B5EA8"/>
+                </a:solidFill>
+                <a:latin typeface="Calibri"/>
+              </a:rPr>
+              <a:t>text('rdy')</a:t>
+            </a:r>
+          </a:p>
+        </p:txBody>
+      </p:sp>
+      <p:sp>
+        <p:nvSpPr>
+          <p:cNvPr id="21" name="Rounded Rectangle 20"/>
+          <p:cNvSpPr/>
+          <p:nvPr/>
+        </p:nvSpPr>
+        <p:spPr>
+          <a:xfrm>
+            <a:off x="9281160" y="2286000"/>
+            <a:ext cx="2304288" cy="731520"/>
+          </a:xfrm>
+          <a:prstGeom prst="roundRect">
+            <a:avLst>
+              <a:gd name="adj" fmla="val 10000"/>
+            </a:avLst>
+          </a:prstGeom>
+          <a:solidFill>
+            <a:srgbClr val="E66A00"/>
+          </a:solidFill>
+          <a:ln>
+            <a:noFill/>
+          </a:ln>
+          <a:effectLst/>
+        </p:spPr>
+        <p:style>
+          <a:lnRef idx="1">
+            <a:schemeClr val="accent1"/>
+          </a:lnRef>
+          <a:fillRef idx="3">
+            <a:schemeClr val="accent1"/>
+          </a:fillRef>
+          <a:effectRef idx="2">
+            <a:schemeClr val="accent1"/>
+          </a:effectRef>
+          <a:fontRef idx="minor">
+            <a:schemeClr val="lt1"/>
+          </a:fontRef>
+        </p:style>
+        <p:txBody>
+          <a:bodyPr wrap="square" lIns="54864" tIns="27432" rIns="54864" bIns="27432" rtlCol="0" anchor="ctr"/>
+          <a:lstStyle/>
+          <a:p>
+            <a:pPr algn="ctr"/>
+            <a:r>
+              <a:rPr sz="1100" b="1" i="0">
+                <a:solidFill>
+                  <a:srgbClr val="FFFFFF"/>
+                </a:solidFill>
+                <a:latin typeface="Calibri"/>
+              </a:rPr>
+              <a:t>Rope</a:t>
+            </a:r>
+          </a:p>
+          <a:p>
+            <a:pPr algn="ctr"/>
+            <a:r>
+              <a:rPr sz="900" b="0" i="1">
+                <a:solidFill>
+                  <a:srgbClr val="FFFFFF"/>
+                </a:solidFill>
+                <a:latin typeface="Calibri"/>
+              </a:rPr>
+              <a:t>rope.py</a:t>
+            </a:r>
+          </a:p>
+          <a:p>
+            <a:pPr algn="ctr"/>
+            <a:r>
+              <a:rPr sz="900" b="0" i="0">
+                <a:solidFill>
+                  <a:srgbClr val="FFFFFF"/>
+                </a:solidFill>
+                <a:latin typeface="Calibri"/>
+              </a:rPr>
+              <a:t>game view of LED strip</a:t>
+            </a:r>
+          </a:p>
+        </p:txBody>
+      </p:sp>
+      <p:cxnSp>
+        <p:nvCxnSpPr>
+          <p:cNvPr id="22" name="Connector 21"/>
+          <p:cNvCxnSpPr/>
+          <p:nvPr/>
+        </p:nvCxnSpPr>
+        <p:spPr>
+          <a:xfrm>
+            <a:off x="7863840" y="2651760"/>
+            <a:ext cx="1417320" cy="0"/>
+          </a:xfrm>
+          <a:prstGeom prst="line">
+            <a:avLst/>
+          </a:prstGeom>
+          <a:ln w="19050">
+            <a:solidFill>
+              <a:srgbClr val="263238"/>
+            </a:solidFill>
+            <a:tailEnd type="triangle"/>
+          </a:ln>
+        </p:spPr>
+        <p:style>
+          <a:lnRef idx="2">
+            <a:schemeClr val="accent1"/>
+          </a:lnRef>
+          <a:fillRef idx="0">
+            <a:schemeClr val="accent1"/>
+          </a:fillRef>
+          <a:effectRef idx="1">
+            <a:schemeClr val="accent1"/>
+          </a:effectRef>
+          <a:fontRef idx="minor">
+            <a:schemeClr val="tx1"/>
+          </a:fontRef>
+        </p:style>
+      </p:cxnSp>
+      <p:sp>
+        <p:nvSpPr>
+          <p:cNvPr id="23" name="TextBox 22"/>
+          <p:cNvSpPr txBox="1"/>
+          <p:nvPr/>
+        </p:nvSpPr>
+        <p:spPr>
+          <a:xfrm>
+            <a:off x="7927848" y="2304288"/>
+            <a:ext cx="1325880" cy="365760"/>
+          </a:xfrm>
+          <a:prstGeom prst="rect">
+            <a:avLst/>
+          </a:prstGeom>
+          <a:noFill/>
+        </p:spPr>
+        <p:txBody>
+          <a:bodyPr wrap="square" lIns="0" tIns="0" rIns="0" bIns="0" anchor="t">
+            <a:spAutoFit/>
+          </a:bodyPr>
+          <a:lstStyle/>
+          <a:p>
+            <a:pPr algn="l"/>
+            <a:r>
+              <a:rPr sz="900" b="0" i="0">
+                <a:solidFill>
+                  <a:srgbClr val="1B5EA8"/>
+                </a:solidFill>
+                <a:latin typeface="Calibri"/>
+              </a:rPr>
+              <a:t>draw(position)</a:t>
+            </a:r>
+          </a:p>
+          <a:p>
+            <a:pPr algn="l"/>
+            <a:r>
+              <a:rPr sz="900" b="0" i="0">
+                <a:solidFill>
+                  <a:srgbClr val="1B5EA8"/>
+                </a:solidFill>
+                <a:latin typeface="Calibri"/>
+              </a:rPr>
+              <a:t>flash()  win_anim()</a:t>
+            </a:r>
+          </a:p>
+        </p:txBody>
+      </p:sp>
+      <p:sp>
+        <p:nvSpPr>
+          <p:cNvPr id="24" name="Rounded Rectangle 23"/>
+          <p:cNvSpPr/>
+          <p:nvPr/>
+        </p:nvSpPr>
+        <p:spPr>
+          <a:xfrm>
+            <a:off x="9281160" y="4114800"/>
+            <a:ext cx="2304288" cy="731520"/>
+          </a:xfrm>
+          <a:prstGeom prst="roundRect">
+            <a:avLst>
+              <a:gd name="adj" fmla="val 10000"/>
+            </a:avLst>
+          </a:prstGeom>
+          <a:solidFill>
+            <a:srgbClr val="E66A00"/>
+          </a:solidFill>
+          <a:ln>
+            <a:noFill/>
+          </a:ln>
+          <a:effectLst/>
+        </p:spPr>
+        <p:style>
+          <a:lnRef idx="1">
+            <a:schemeClr val="accent1"/>
+          </a:lnRef>
+          <a:fillRef idx="3">
+            <a:schemeClr val="accent1"/>
+          </a:fillRef>
+          <a:effectRef idx="2">
+            <a:schemeClr val="accent1"/>
+          </a:effectRef>
+          <a:fontRef idx="minor">
+            <a:schemeClr val="lt1"/>
+          </a:fontRef>
+        </p:style>
+        <p:txBody>
+          <a:bodyPr wrap="square" lIns="54864" tIns="27432" rIns="54864" bIns="27432" rtlCol="0" anchor="ctr"/>
+          <a:lstStyle/>
+          <a:p>
+            <a:pPr algn="ctr"/>
+            <a:r>
+              <a:rPr sz="1100" b="1" i="0">
+                <a:solidFill>
+                  <a:srgbClr val="FFFFFF"/>
+                </a:solidFill>
+                <a:latin typeface="Calibri"/>
+              </a:rPr>
+              <a:t>Buzzer</a:t>
+            </a:r>
+          </a:p>
+          <a:p>
+            <a:pPr algn="ctr"/>
+            <a:r>
+              <a:rPr sz="900" b="0" i="1">
+                <a:solidFill>
+                  <a:srgbClr val="FFFFFF"/>
+                </a:solidFill>
+                <a:latin typeface="Calibri"/>
+              </a:rPr>
+              <a:t>buzzer.py  (PWM)</a:t>
+            </a:r>
+          </a:p>
+          <a:p>
+            <a:pPr algn="ctr"/>
+            <a:r>
+              <a:rPr sz="900" b="0" i="0">
+                <a:solidFill>
+                  <a:srgbClr val="FFFFFF"/>
+                </a:solidFill>
+                <a:latin typeface="Calibri"/>
+              </a:rPr>
+              <a:t>PWM1A P2_01</a:t>
+            </a:r>
+          </a:p>
+        </p:txBody>
+      </p:sp>
+      <p:cxnSp>
+        <p:nvCxnSpPr>
+          <p:cNvPr id="25" name="Connector 24"/>
+          <p:cNvCxnSpPr/>
+          <p:nvPr/>
+        </p:nvCxnSpPr>
+        <p:spPr>
+          <a:xfrm>
+            <a:off x="7863840" y="4480560"/>
+            <a:ext cx="1417320" cy="0"/>
+          </a:xfrm>
+          <a:prstGeom prst="line">
+            <a:avLst/>
+          </a:prstGeom>
+          <a:ln w="19050">
+            <a:solidFill>
+              <a:srgbClr val="263238"/>
+            </a:solidFill>
+            <a:tailEnd type="triangle"/>
+          </a:ln>
+        </p:spPr>
+        <p:style>
+          <a:lnRef idx="2">
+            <a:schemeClr val="accent1"/>
+          </a:lnRef>
+          <a:fillRef idx="0">
+            <a:schemeClr val="accent1"/>
+          </a:fillRef>
+          <a:effectRef idx="1">
+            <a:schemeClr val="accent1"/>
+          </a:effectRef>
+          <a:fontRef idx="minor">
+            <a:schemeClr val="tx1"/>
+          </a:fontRef>
+        </p:style>
+      </p:cxnSp>
+      <p:sp>
+        <p:nvSpPr>
+          <p:cNvPr id="26" name="TextBox 25"/>
+          <p:cNvSpPr txBox="1"/>
+          <p:nvPr/>
+        </p:nvSpPr>
+        <p:spPr>
+          <a:xfrm>
+            <a:off x="7927848" y="4279392"/>
+            <a:ext cx="1325880" cy="365760"/>
+          </a:xfrm>
+          <a:prstGeom prst="rect">
+            <a:avLst/>
+          </a:prstGeom>
+          <a:noFill/>
+        </p:spPr>
+        <p:txBody>
+          <a:bodyPr wrap="square" lIns="0" tIns="0" rIns="0" bIns="0" anchor="t">
+            <a:spAutoFit/>
+          </a:bodyPr>
+          <a:lstStyle/>
+          <a:p>
+            <a:pPr algn="l"/>
+            <a:r>
+              <a:rPr sz="900" b="0" i="0">
+                <a:solidFill>
+                  <a:srgbClr val="1B5EA8"/>
+                </a:solidFill>
+                <a:latin typeface="Calibri"/>
+              </a:rPr>
+              <a:t>play(freq, length)</a:t>
+            </a:r>
+          </a:p>
+        </p:txBody>
+      </p:sp>
+      <p:sp>
+        <p:nvSpPr>
+          <p:cNvPr id="27" name="Rounded Rectangle 26"/>
+          <p:cNvSpPr/>
+          <p:nvPr/>
+        </p:nvSpPr>
+        <p:spPr>
+          <a:xfrm>
+            <a:off x="9281160" y="5029200"/>
+            <a:ext cx="2304288" cy="731520"/>
+          </a:xfrm>
+          <a:prstGeom prst="roundRect">
+            <a:avLst>
+              <a:gd name="adj" fmla="val 10000"/>
+            </a:avLst>
+          </a:prstGeom>
+          <a:solidFill>
+            <a:srgbClr val="E66A00"/>
+          </a:solidFill>
+          <a:ln>
+            <a:noFill/>
+          </a:ln>
+          <a:effectLst/>
+        </p:spPr>
+        <p:style>
+          <a:lnRef idx="1">
+            <a:schemeClr val="accent1"/>
+          </a:lnRef>
+          <a:fillRef idx="3">
+            <a:schemeClr val="accent1"/>
+          </a:fillRef>
+          <a:effectRef idx="2">
+            <a:schemeClr val="accent1"/>
+          </a:effectRef>
+          <a:fontRef idx="minor">
+            <a:schemeClr val="lt1"/>
+          </a:fontRef>
+        </p:style>
+        <p:txBody>
+          <a:bodyPr wrap="square" lIns="54864" tIns="27432" rIns="54864" bIns="27432" rtlCol="0" anchor="ctr"/>
+          <a:lstStyle/>
+          <a:p>
+            <a:pPr algn="ctr"/>
+            <a:r>
+              <a:rPr sz="1100" b="1" i="0">
+                <a:solidFill>
+                  <a:srgbClr val="FFFFFF"/>
+                </a:solidFill>
+                <a:latin typeface="Calibri"/>
+              </a:rPr>
+              <a:t>StatsStore</a:t>
+            </a:r>
+          </a:p>
+          <a:p>
+            <a:pPr algn="ctr"/>
+            <a:r>
+              <a:rPr sz="900" b="0" i="1">
+                <a:solidFill>
+                  <a:srgbClr val="FFFFFF"/>
+                </a:solidFill>
+                <a:latin typeface="Calibri"/>
+              </a:rPr>
+              <a:t>stats.py</a:t>
+            </a:r>
+          </a:p>
+          <a:p>
+            <a:pPr algn="ctr"/>
+            <a:r>
+              <a:rPr sz="900" b="0" i="0">
+                <a:solidFill>
+                  <a:srgbClr val="FFFFFF"/>
+                </a:solidFill>
+                <a:latin typeface="Calibri"/>
+              </a:rPr>
+              <a:t>JSON file on µSD</a:t>
+            </a:r>
+          </a:p>
+        </p:txBody>
+      </p:sp>
+      <p:cxnSp>
+        <p:nvCxnSpPr>
+          <p:cNvPr id="28" name="Connector 27"/>
+          <p:cNvCxnSpPr/>
+          <p:nvPr/>
+        </p:nvCxnSpPr>
+        <p:spPr>
+          <a:xfrm>
+            <a:off x="7863840" y="5394960"/>
+            <a:ext cx="1417320" cy="0"/>
+          </a:xfrm>
+          <a:prstGeom prst="line">
+            <a:avLst/>
+          </a:prstGeom>
+          <a:ln w="19050">
+            <a:solidFill>
+              <a:srgbClr val="263238"/>
+            </a:solidFill>
+            <a:tailEnd type="triangle"/>
+          </a:ln>
+        </p:spPr>
+        <p:style>
+          <a:lnRef idx="2">
+            <a:schemeClr val="accent1"/>
+          </a:lnRef>
+          <a:fillRef idx="0">
+            <a:schemeClr val="accent1"/>
+          </a:fillRef>
+          <a:effectRef idx="1">
+            <a:schemeClr val="accent1"/>
+          </a:effectRef>
+          <a:fontRef idx="minor">
+            <a:schemeClr val="tx1"/>
+          </a:fontRef>
+        </p:style>
+      </p:cxnSp>
+      <p:sp>
+        <p:nvSpPr>
+          <p:cNvPr id="29" name="TextBox 28"/>
+          <p:cNvSpPr txBox="1"/>
+          <p:nvPr/>
+        </p:nvSpPr>
+        <p:spPr>
+          <a:xfrm>
+            <a:off x="7927848" y="5047488"/>
+            <a:ext cx="1325880" cy="365760"/>
+          </a:xfrm>
+          <a:prstGeom prst="rect">
+            <a:avLst/>
+          </a:prstGeom>
+          <a:noFill/>
+        </p:spPr>
+        <p:txBody>
+          <a:bodyPr wrap="square" lIns="0" tIns="0" rIns="0" bIns="0" anchor="t">
+            <a:spAutoFit/>
+          </a:bodyPr>
+          <a:lstStyle/>
+          <a:p>
+            <a:pPr algn="l"/>
+            <a:r>
+              <a:rPr sz="900" b="0" i="0">
+                <a:solidFill>
+                  <a:srgbClr val="1B5EA8"/>
+                </a:solidFill>
+                <a:latin typeface="Calibri"/>
+              </a:rPr>
+              <a:t>record(p, ms)</a:t>
+            </a:r>
+          </a:p>
+          <a:p>
+            <a:pPr algn="l"/>
+            <a:r>
+              <a:rPr sz="900" b="0" i="0">
+                <a:solidFill>
+                  <a:srgbClr val="1B5EA8"/>
+                </a:solidFill>
+                <a:latin typeface="Calibri"/>
+              </a:rPr>
+              <a:t>get_best()  save()</a:t>
+            </a:r>
+          </a:p>
+        </p:txBody>
+      </p:sp>
+      <p:sp>
+        <p:nvSpPr>
+          <p:cNvPr id="30" name="Rounded Rectangle 29"/>
+          <p:cNvSpPr/>
+          <p:nvPr/>
+        </p:nvSpPr>
+        <p:spPr>
+          <a:xfrm>
+            <a:off x="9281160" y="3200400"/>
+            <a:ext cx="2304288" cy="731520"/>
+          </a:xfrm>
+          <a:prstGeom prst="roundRect">
+            <a:avLst>
+              <a:gd name="adj" fmla="val 10000"/>
+            </a:avLst>
+          </a:prstGeom>
+          <a:solidFill>
+            <a:srgbClr val="E66A00"/>
+          </a:solidFill>
+          <a:ln>
+            <a:noFill/>
+          </a:ln>
+          <a:effectLst/>
+        </p:spPr>
+        <p:style>
+          <a:lnRef idx="1">
+            <a:schemeClr val="accent1"/>
+          </a:lnRef>
+          <a:fillRef idx="3">
+            <a:schemeClr val="accent1"/>
+          </a:fillRef>
+          <a:effectRef idx="2">
+            <a:schemeClr val="accent1"/>
+          </a:effectRef>
+          <a:fontRef idx="minor">
+            <a:schemeClr val="lt1"/>
+          </a:fontRef>
+        </p:style>
+        <p:txBody>
+          <a:bodyPr wrap="square" lIns="54864" tIns="27432" rIns="54864" bIns="27432" rtlCol="0" anchor="ctr"/>
+          <a:lstStyle/>
+          <a:p>
+            <a:pPr algn="ctr"/>
+            <a:r>
+              <a:rPr sz="1100" b="1" i="0">
+                <a:solidFill>
+                  <a:srgbClr val="FFFFFF"/>
+                </a:solidFill>
+                <a:latin typeface="Calibri"/>
+              </a:rPr>
+              <a:t>LEDStrip</a:t>
+            </a:r>
+          </a:p>
+          <a:p>
+            <a:pPr algn="ctr"/>
+            <a:r>
+              <a:rPr sz="900" b="0" i="1">
+                <a:solidFill>
+                  <a:srgbClr val="FFFFFF"/>
+                </a:solidFill>
+                <a:latin typeface="Calibri"/>
+              </a:rPr>
+              <a:t>led_strip.py  (WS2812 via spidev)</a:t>
+            </a:r>
+          </a:p>
+          <a:p>
+            <a:pPr algn="ctr"/>
+            <a:r>
+              <a:rPr sz="900" b="0" i="0">
+                <a:solidFill>
+                  <a:srgbClr val="FFFFFF"/>
+                </a:solidFill>
+                <a:latin typeface="Calibri"/>
+              </a:rPr>
+              <a:t>SPI0 MOSI P1_12</a:t>
+            </a:r>
+          </a:p>
+        </p:txBody>
+      </p:sp>
+      <p:cxnSp>
+        <p:nvCxnSpPr>
+          <p:cNvPr id="31" name="Connector 30"/>
+          <p:cNvCxnSpPr/>
+          <p:nvPr/>
+        </p:nvCxnSpPr>
+        <p:spPr>
+          <a:xfrm>
+            <a:off x="10433304" y="3017520"/>
+            <a:ext cx="0" cy="182880"/>
+          </a:xfrm>
+          <a:prstGeom prst="line">
+            <a:avLst/>
+          </a:prstGeom>
+          <a:ln w="19050">
+            <a:solidFill>
+              <a:srgbClr val="263238"/>
+            </a:solidFill>
+            <a:tailEnd type="triangle"/>
+          </a:ln>
+        </p:spPr>
+        <p:style>
+          <a:lnRef idx="2">
+            <a:schemeClr val="accent1"/>
+          </a:lnRef>
+          <a:fillRef idx="0">
+            <a:schemeClr val="accent1"/>
+          </a:fillRef>
+          <a:effectRef idx="1">
+            <a:schemeClr val="accent1"/>
+          </a:effectRef>
+          <a:fontRef idx="minor">
+            <a:schemeClr val="tx1"/>
+          </a:fontRef>
+        </p:style>
+      </p:cxnSp>
+      <p:sp>
+        <p:nvSpPr>
+          <p:cNvPr id="32" name="TextBox 31"/>
+          <p:cNvSpPr txBox="1"/>
+          <p:nvPr/>
+        </p:nvSpPr>
+        <p:spPr>
+          <a:xfrm>
+            <a:off x="7909560" y="2926080"/>
+            <a:ext cx="1325880" cy="365760"/>
+          </a:xfrm>
+          <a:prstGeom prst="rect">
+            <a:avLst/>
+          </a:prstGeom>
+          <a:noFill/>
+        </p:spPr>
+        <p:txBody>
+          <a:bodyPr wrap="square" lIns="0" tIns="0" rIns="0" bIns="0" anchor="t">
+            <a:spAutoFit/>
+          </a:bodyPr>
+          <a:lstStyle/>
+          <a:p>
+            <a:pPr algn="r"/>
+            <a:r>
+              <a:rPr sz="900" b="0" i="0">
+                <a:solidFill>
+                  <a:srgbClr val="1B5EA8"/>
+                </a:solidFill>
+                <a:latin typeface="Calibri"/>
+              </a:rPr>
+              <a:t>set_pixel()  show()</a:t>
+            </a:r>
+          </a:p>
+        </p:txBody>
+      </p:sp>
+      <p:sp>
+        <p:nvSpPr>
+          <p:cNvPr id="33" name="Rectangle 32"/>
+          <p:cNvSpPr/>
+          <p:nvPr/>
+        </p:nvSpPr>
+        <p:spPr>
+          <a:xfrm>
+            <a:off x="612648" y="5815584"/>
+            <a:ext cx="256032" cy="164592"/>
+          </a:xfrm>
+          <a:prstGeom prst="rect">
+            <a:avLst/>
+          </a:prstGeom>
+          <a:solidFill>
+            <a:srgbClr val="2E7D32"/>
+          </a:solidFill>
+          <a:ln>
+            <a:noFill/>
+          </a:ln>
+          <a:effectLst/>
+        </p:spPr>
+        <p:style>
+          <a:lnRef idx="1">
+            <a:schemeClr val="accent1"/>
+          </a:lnRef>
+          <a:fillRef idx="3">
+            <a:schemeClr val="accent1"/>
+          </a:fillRef>
+          <a:effectRef idx="2">
+            <a:schemeClr val="accent1"/>
+          </a:effectRef>
+          <a:fontRef idx="minor">
+            <a:schemeClr val="lt1"/>
+          </a:fontRef>
+        </p:style>
+        <p:txBody>
+          <a:bodyPr rtlCol="0" anchor="ctr"/>
+          <a:lstStyle/>
+          <a:p>
+            <a:pPr algn="ctr"/>
+            <a:endParaRPr/>
+          </a:p>
+        </p:txBody>
+      </p:sp>
+      <p:sp>
+        <p:nvSpPr>
+          <p:cNvPr id="34" name="TextBox 33"/>
+          <p:cNvSpPr txBox="1"/>
+          <p:nvPr/>
+        </p:nvSpPr>
+        <p:spPr>
+          <a:xfrm>
+            <a:off x="960120" y="5788152"/>
+            <a:ext cx="2834640" cy="228600"/>
+          </a:xfrm>
+          <a:prstGeom prst="rect">
+            <a:avLst/>
+          </a:prstGeom>
+          <a:noFill/>
+        </p:spPr>
+        <p:txBody>
+          <a:bodyPr wrap="square" lIns="0" tIns="0" rIns="0" bIns="0" anchor="t">
+            <a:spAutoFit/>
+          </a:bodyPr>
+          <a:lstStyle/>
+          <a:p>
+            <a:pPr algn="l"/>
+            <a:r>
+              <a:rPr sz="1000" b="0" i="0">
+                <a:solidFill>
+                  <a:srgbClr val="546E7A"/>
+                </a:solidFill>
+                <a:latin typeface="Calibri"/>
+              </a:rPr>
+              <a:t>Already written (class / homework)</a:t>
+            </a:r>
+          </a:p>
+        </p:txBody>
+      </p:sp>
+      <p:sp>
+        <p:nvSpPr>
+          <p:cNvPr id="35" name="Rectangle 34"/>
+          <p:cNvSpPr/>
+          <p:nvPr/>
+        </p:nvSpPr>
+        <p:spPr>
+          <a:xfrm>
+            <a:off x="3904488" y="5815584"/>
+            <a:ext cx="256032" cy="164592"/>
+          </a:xfrm>
+          <a:prstGeom prst="rect">
+            <a:avLst/>
+          </a:prstGeom>
+          <a:solidFill>
+            <a:srgbClr val="E66A00"/>
+          </a:solidFill>
+          <a:ln>
+            <a:noFill/>
+          </a:ln>
+          <a:effectLst/>
+        </p:spPr>
+        <p:style>
+          <a:lnRef idx="1">
+            <a:schemeClr val="accent1"/>
+          </a:lnRef>
+          <a:fillRef idx="3">
+            <a:schemeClr val="accent1"/>
+          </a:fillRef>
+          <a:effectRef idx="2">
+            <a:schemeClr val="accent1"/>
+          </a:effectRef>
+          <a:fontRef idx="minor">
+            <a:schemeClr val="lt1"/>
+          </a:fontRef>
+        </p:style>
+        <p:txBody>
+          <a:bodyPr rtlCol="0" anchor="ctr"/>
+          <a:lstStyle/>
+          <a:p>
+            <a:pPr algn="ctr"/>
+            <a:endParaRPr/>
+          </a:p>
+        </p:txBody>
+      </p:sp>
+      <p:sp>
+        <p:nvSpPr>
+          <p:cNvPr id="36" name="TextBox 35"/>
+          <p:cNvSpPr txBox="1"/>
+          <p:nvPr/>
+        </p:nvSpPr>
+        <p:spPr>
+          <a:xfrm>
+            <a:off x="4251960" y="5788152"/>
+            <a:ext cx="2834640" cy="228600"/>
+          </a:xfrm>
+          <a:prstGeom prst="rect">
+            <a:avLst/>
+          </a:prstGeom>
+          <a:noFill/>
+        </p:spPr>
+        <p:txBody>
+          <a:bodyPr wrap="square" lIns="0" tIns="0" rIns="0" bIns="0" anchor="t">
+            <a:spAutoFit/>
+          </a:bodyPr>
+          <a:lstStyle/>
+          <a:p>
+            <a:pPr algn="l"/>
+            <a:r>
+              <a:rPr sz="1000" b="0" i="0">
+                <a:solidFill>
+                  <a:srgbClr val="546E7A"/>
+                </a:solidFill>
+                <a:latin typeface="Calibri"/>
+              </a:rPr>
+              <a:t>To be written for this project</a:t>
+            </a:r>
+          </a:p>
+        </p:txBody>
+      </p:sp>
+      <p:sp>
+        <p:nvSpPr>
+          <p:cNvPr id="37" name="TextBox 36"/>
+          <p:cNvSpPr txBox="1"/>
+          <p:nvPr/>
+        </p:nvSpPr>
+        <p:spPr>
+          <a:xfrm>
+            <a:off x="6675120" y="5760720"/>
+            <a:ext cx="4937760" cy="274320"/>
+          </a:xfrm>
+          <a:prstGeom prst="rect">
+            <a:avLst/>
+          </a:prstGeom>
+          <a:noFill/>
+        </p:spPr>
+        <p:txBody>
+          <a:bodyPr wrap="square" lIns="0" tIns="0" rIns="0" bIns="0" anchor="t">
+            <a:spAutoFit/>
+          </a:bodyPr>
+          <a:lstStyle/>
+          <a:p>
+            <a:pPr algn="r"/>
+            <a:r>
+              <a:rPr sz="1000" b="0" i="1">
+                <a:solidFill>
+                  <a:srgbClr val="1B5EA8"/>
+                </a:solidFill>
+                <a:latin typeface="Calibri"/>
+              </a:rPr>
+              <a:t>Blue text = API calls between classes</a:t>
+            </a:r>
+          </a:p>
+        </p:txBody>
+      </p:sp>
+    </p:spTree>
+  </p:cSld>
+  <p:clrMapOvr>
+    <a:masterClrMapping/>
+  </p:clrMapOvr>
+</p:sld>
+</file>
+
+<file path=ppt/slides/slide7.xml><?xml version="1.0" encoding="utf-8"?>
+<p:sld xmlns:a="http://schemas.openxmlformats.org/drawingml/2006/main" xmlns:r="http://schemas.openxmlformats.org/officeDocument/2006/relationships" xmlns:p="http://schemas.openxmlformats.org/presentationml/2006/main">
+  <p:cSld>
+    <p:spTree>
+      <p:nvGrpSpPr>
+        <p:cNvPr id="1" name=""/>
+        <p:cNvGrpSpPr/>
+        <p:nvPr/>
+      </p:nvGrpSpPr>
+      <p:grpSpPr>
+        <a:xfrm>
+          <a:off x="0" y="0"/>
+          <a:ext cx="0" cy="0"/>
+          <a:chOff x="0" y="0"/>
+          <a:chExt cx="0" cy="0"/>
+        </a:xfrm>
+      </p:grpSpPr>
+      <p:sp>
+        <p:nvSpPr>
+          <p:cNvPr id="2" name="Title 1"/>
+          <p:cNvSpPr>
+            <a:spLocks noGrp="1"/>
+          </p:cNvSpPr>
+          <p:nvPr>
+            <p:ph type="title"/>
+          </p:nvPr>
+        </p:nvSpPr>
+        <p:spPr/>
+        <p:txBody>
+          <a:bodyPr/>
+          <a:lstStyle/>
+          <a:p>
+            <a:r>
+              <a:t>Classes and HW API</a:t>
+            </a:r>
+          </a:p>
+        </p:txBody>
+      </p:sp>
+      <p:graphicFrame>
+        <p:nvGraphicFramePr>
+          <p:cNvPr id="3" name="Table 2"/>
+          <p:cNvGraphicFramePr>
+            <a:graphicFrameLocks noGrp="1"/>
+          </p:cNvGraphicFramePr>
+          <p:nvPr/>
+        </p:nvGraphicFramePr>
+        <p:xfrm>
+          <a:off x="612648" y="1234440"/>
+          <a:ext cx="10972800" cy="4023360"/>
+        </p:xfrm>
+        <a:graphic>
+          <a:graphicData uri="http://schemas.openxmlformats.org/drawingml/2006/table">
+            <a:tbl>
+              <a:tblPr firstRow="1" bandRow="1">
+                <a:tableStyleId>{5C22544A-7EE6-4342-B048-85BDC9FD1C3A}</a:tableStyleId>
+              </a:tblPr>
+              <a:tblGrid>
+                <a:gridCol w="1463040">
+                  <a:extLst>
+                    <a:ext uri="{9D8B030D-6E8A-4147-A177-3AD203B41FA5}">
+                      <a16:colId xmlns:a16="http://schemas.microsoft.com/office/drawing/2014/main" val="20000"/>
+                    </a:ext>
+                  </a:extLst>
+                </a:gridCol>
+                <a:gridCol w="1417320">
+                  <a:extLst>
+                    <a:ext uri="{9D8B030D-6E8A-4147-A177-3AD203B41FA5}">
+                      <a16:colId xmlns:a16="http://schemas.microsoft.com/office/drawing/2014/main" val="20001"/>
+                    </a:ext>
+                  </a:extLst>
+                </a:gridCol>
+                <a:gridCol w="1234440">
+                  <a:extLst>
+                    <a:ext uri="{9D8B030D-6E8A-4147-A177-3AD203B41FA5}">
+                      <a16:colId xmlns:a16="http://schemas.microsoft.com/office/drawing/2014/main" val="20002"/>
+                    </a:ext>
+                  </a:extLst>
+                </a:gridCol>
+                <a:gridCol w="4206240">
+                  <a:extLst>
+                    <a:ext uri="{9D8B030D-6E8A-4147-A177-3AD203B41FA5}">
+                      <a16:colId xmlns:a16="http://schemas.microsoft.com/office/drawing/2014/main" val="20003"/>
+                    </a:ext>
+                  </a:extLst>
+                </a:gridCol>
+                <a:gridCol w="2651760">
+                  <a:extLst>
+                    <a:ext uri="{9D8B030D-6E8A-4147-A177-3AD203B41FA5}">
+                      <a16:colId xmlns:a16="http://schemas.microsoft.com/office/drawing/2014/main" val="20004"/>
+                    </a:ext>
+                  </a:extLst>
+                </a:gridCol>
+              </a:tblGrid>
+              <a:tr h="402336">
+                <a:tc>
+                  <a:txBody>
+                    <a:bodyPr/>
+                    <a:lstStyle/>
+                    <a:p>
+                      <a:r>
+                        <a:rPr sz="1100" b="1">
+                          <a:solidFill>
+                            <a:srgbClr val="FFFFFF"/>
+                          </a:solidFill>
+                          <a:latin typeface="Calibri"/>
+                        </a:rPr>
+                        <a:t>Class</a:t>
+                      </a:r>
+                    </a:p>
+                  </a:txBody>
+                  <a:tcPr marL="54864" marR="54864" marT="27432" marB="27432" anchor="ctr">
+                    <a:solidFill>
+                      <a:srgbClr val="263238"/>
+                    </a:solidFill>
+                  </a:tcPr>
+                </a:tc>
+                <a:tc>
+                  <a:txBody>
+                    <a:bodyPr/>
+                    <a:lstStyle/>
+                    <a:p>
+                      <a:r>
+                        <a:rPr sz="1100" b="1">
+                          <a:solidFill>
+                            <a:srgbClr val="FFFFFF"/>
+                          </a:solidFill>
+                          <a:latin typeface="Calibri"/>
+                        </a:rPr>
+                        <a:t>File</a:t>
+                      </a:r>
+                    </a:p>
+                  </a:txBody>
+                  <a:tcPr marL="54864" marR="54864" marT="27432" marB="27432" anchor="ctr">
+                    <a:solidFill>
+                      <a:srgbClr val="263238"/>
+                    </a:solidFill>
+                  </a:tcPr>
+                </a:tc>
+                <a:tc>
+                  <a:txBody>
+                    <a:bodyPr/>
+                    <a:lstStyle/>
+                    <a:p>
+                      <a:r>
+                        <a:rPr sz="1100" b="1">
+                          <a:solidFill>
+                            <a:srgbClr val="FFFFFF"/>
+                          </a:solidFill>
+                          <a:latin typeface="Calibri"/>
+                        </a:rPr>
+                        <a:t>Status</a:t>
+                      </a:r>
+                    </a:p>
+                  </a:txBody>
+                  <a:tcPr marL="54864" marR="54864" marT="27432" marB="27432" anchor="ctr">
+                    <a:solidFill>
+                      <a:srgbClr val="263238"/>
+                    </a:solidFill>
+                  </a:tcPr>
+                </a:tc>
+                <a:tc>
+                  <a:txBody>
+                    <a:bodyPr/>
+                    <a:lstStyle/>
+                    <a:p>
+                      <a:r>
+                        <a:rPr sz="1100" b="1">
+                          <a:solidFill>
+                            <a:srgbClr val="FFFFFF"/>
+                          </a:solidFill>
+                          <a:latin typeface="Calibri"/>
+                        </a:rPr>
+                        <a:t>Functions (preliminary API)</a:t>
+                      </a:r>
+                    </a:p>
+                  </a:txBody>
+                  <a:tcPr marL="54864" marR="54864" marT="27432" marB="27432" anchor="ctr">
+                    <a:solidFill>
+                      <a:srgbClr val="263238"/>
+                    </a:solidFill>
+                  </a:tcPr>
+                </a:tc>
+                <a:tc>
+                  <a:txBody>
+                    <a:bodyPr/>
+                    <a:lstStyle/>
+                    <a:p>
+                      <a:r>
+                        <a:rPr sz="1100" b="1">
+                          <a:solidFill>
+                            <a:srgbClr val="FFFFFF"/>
+                          </a:solidFill>
+                          <a:latin typeface="Calibri"/>
+                        </a:rPr>
+                        <a:t>Purpose</a:t>
+                      </a:r>
+                    </a:p>
+                  </a:txBody>
+                  <a:tcPr marL="54864" marR="54864" marT="27432" marB="27432" anchor="ctr">
+                    <a:solidFill>
+                      <a:srgbClr val="263238"/>
+                    </a:solidFill>
+                  </a:tcPr>
+                </a:tc>
+                <a:extLst>
+                  <a:ext uri="{0D108BD9-81ED-4DB2-BD59-A6C34878D82A}">
+                    <a16:rowId xmlns:a16="http://schemas.microsoft.com/office/drawing/2014/main" val="10000"/>
+                  </a:ext>
+                </a:extLst>
+              </a:tr>
+              <a:tr h="402336">
+                <a:tc>
+                  <a:txBody>
+                    <a:bodyPr/>
+                    <a:lstStyle/>
+                    <a:p>
+                      <a:r>
+                        <a:rPr sz="1000" b="1">
+                          <a:solidFill>
+                            <a:srgbClr val="263238"/>
+                          </a:solidFill>
+                          <a:latin typeface="Calibri"/>
+                        </a:rPr>
+                        <a:t>TugOfWarGame</a:t>
+                      </a:r>
+                    </a:p>
+                  </a:txBody>
+                  <a:tcPr marL="54864" marR="54864" marT="27432" marB="27432" anchor="ctr">
+                    <a:solidFill>
+                      <a:srgbClr val="F4F6F7"/>
+                    </a:solidFill>
+                  </a:tcPr>
+                </a:tc>
+                <a:tc>
+                  <a:txBody>
+                    <a:bodyPr/>
+                    <a:lstStyle/>
+                    <a:p>
+                      <a:r>
+                        <a:rPr sz="1000" b="0">
+                          <a:solidFill>
+                            <a:srgbClr val="263238"/>
+                          </a:solidFill>
+                          <a:latin typeface="Calibri"/>
+                        </a:rPr>
+                        <a:t>tug_of_war.py</a:t>
+                      </a:r>
+                    </a:p>
+                  </a:txBody>
+                  <a:tcPr marL="54864" marR="54864" marT="27432" marB="27432" anchor="ctr">
+                    <a:solidFill>
+                      <a:srgbClr val="F4F6F7"/>
+                    </a:solidFill>
+                  </a:tcPr>
+                </a:tc>
+                <a:tc>
+                  <a:txBody>
+                    <a:bodyPr/>
+                    <a:lstStyle/>
+                    <a:p>
+                      <a:r>
+                        <a:rPr sz="1000" b="1">
+                          <a:solidFill>
+                            <a:srgbClr val="E66A00"/>
+                          </a:solidFill>
+                          <a:latin typeface="Calibri"/>
+                        </a:rPr>
+                        <a:t>To write</a:t>
+                      </a:r>
+                    </a:p>
+                  </a:txBody>
+                  <a:tcPr marL="54864" marR="54864" marT="27432" marB="27432" anchor="ctr">
+                    <a:solidFill>
+                      <a:srgbClr val="F4F6F7"/>
+                    </a:solidFill>
+                  </a:tcPr>
+                </a:tc>
+                <a:tc>
+                  <a:txBody>
+                    <a:bodyPr/>
+                    <a:lstStyle/>
+                    <a:p>
+                      <a:r>
+                        <a:rPr sz="1000" b="0">
+                          <a:solidFill>
+                            <a:srgbClr val="1B5EA8"/>
+                          </a:solidFill>
+                          <a:latin typeface="Calibri"/>
+                        </a:rPr>
+                        <a:t>_setup(), run(), cleanup(), select_mode(), play_round(), false_start(p), cpu_reaction_ms(), victory(p)</a:t>
+                      </a:r>
+                    </a:p>
+                  </a:txBody>
+                  <a:tcPr marL="54864" marR="54864" marT="27432" marB="27432" anchor="ctr">
+                    <a:solidFill>
+                      <a:srgbClr val="F4F6F7"/>
+                    </a:solidFill>
+                  </a:tcPr>
+                </a:tc>
+                <a:tc>
+                  <a:txBody>
+                    <a:bodyPr/>
+                    <a:lstStyle/>
+                    <a:p>
+                      <a:r>
+                        <a:rPr sz="1000" b="0">
+                          <a:solidFill>
+                            <a:srgbClr val="263238"/>
+                          </a:solidFill>
+                          <a:latin typeface="Calibri"/>
+                        </a:rPr>
+                        <a:t>Main program and game logic</a:t>
+                      </a:r>
+                    </a:p>
+                  </a:txBody>
+                  <a:tcPr marL="54864" marR="54864" marT="27432" marB="27432" anchor="ctr">
+                    <a:solidFill>
+                      <a:srgbClr val="F4F6F7"/>
+                    </a:solidFill>
+                  </a:tcPr>
+                </a:tc>
+                <a:extLst>
+                  <a:ext uri="{0D108BD9-81ED-4DB2-BD59-A6C34878D82A}">
+                    <a16:rowId xmlns:a16="http://schemas.microsoft.com/office/drawing/2014/main" val="10001"/>
+                  </a:ext>
+                </a:extLst>
+              </a:tr>
+              <a:tr h="402336">
+                <a:tc>
+                  <a:txBody>
+                    <a:bodyPr/>
+                    <a:lstStyle/>
+                    <a:p>
+                      <a:r>
+                        <a:rPr sz="1000" b="1" dirty="0" err="1">
+                          <a:solidFill>
+                            <a:srgbClr val="263238"/>
+                          </a:solidFill>
+                          <a:latin typeface="Calibri"/>
+                        </a:rPr>
+                        <a:t>PlayerButton</a:t>
+                      </a:r>
+                      <a:endParaRPr sz="1000" b="1" dirty="0">
+                        <a:solidFill>
+                          <a:srgbClr val="263238"/>
+                        </a:solidFill>
+                        <a:latin typeface="Calibri"/>
+                      </a:endParaRPr>
+                    </a:p>
+                  </a:txBody>
+                  <a:tcPr marL="54864" marR="54864" marT="27432" marB="27432" anchor="ctr">
+                    <a:solidFill>
+                      <a:srgbClr val="FFFFFF"/>
+                    </a:solidFill>
+                  </a:tcPr>
+                </a:tc>
+                <a:tc>
+                  <a:txBody>
+                    <a:bodyPr/>
+                    <a:lstStyle/>
+                    <a:p>
+                      <a:r>
+                        <a:rPr sz="1000" b="0">
+                          <a:solidFill>
+                            <a:srgbClr val="263238"/>
+                          </a:solidFill>
+                          <a:latin typeface="Calibri"/>
+                        </a:rPr>
+                        <a:t>player_button.py</a:t>
+                      </a:r>
+                    </a:p>
+                  </a:txBody>
+                  <a:tcPr marL="54864" marR="54864" marT="27432" marB="27432" anchor="ctr">
+                    <a:solidFill>
+                      <a:srgbClr val="FFFFFF"/>
+                    </a:solidFill>
+                  </a:tcPr>
+                </a:tc>
+                <a:tc>
+                  <a:txBody>
+                    <a:bodyPr/>
+                    <a:lstStyle/>
+                    <a:p>
+                      <a:r>
+                        <a:rPr sz="1000" b="1">
+                          <a:solidFill>
+                            <a:srgbClr val="E66A00"/>
+                          </a:solidFill>
+                          <a:latin typeface="Calibri"/>
+                        </a:rPr>
+                        <a:t>To write</a:t>
+                      </a:r>
+                    </a:p>
+                    <a:p>
+                      <a:r>
+                        <a:rPr sz="900" b="1">
+                          <a:solidFill>
+                            <a:srgbClr val="E66A00"/>
+                          </a:solidFill>
+                          <a:latin typeface="Calibri"/>
+                        </a:rPr>
+                        <a:t>(extends Button)</a:t>
+                      </a:r>
+                    </a:p>
+                  </a:txBody>
+                  <a:tcPr marL="54864" marR="54864" marT="27432" marB="27432" anchor="ctr">
+                    <a:solidFill>
+                      <a:srgbClr val="FFFFFF"/>
+                    </a:solidFill>
+                  </a:tcPr>
+                </a:tc>
+                <a:tc>
+                  <a:txBody>
+                    <a:bodyPr/>
+                    <a:lstStyle/>
+                    <a:p>
+                      <a:r>
+                        <a:rPr sz="1000" b="0">
+                          <a:solidFill>
+                            <a:srgbClr val="1B5EA8"/>
+                          </a:solidFill>
+                          <a:latin typeface="Calibri"/>
+                        </a:rPr>
+                        <a:t>arm(), disarm(), was_pressed(), get_press_time()</a:t>
+                      </a:r>
+                    </a:p>
+                  </a:txBody>
+                  <a:tcPr marL="54864" marR="54864" marT="27432" marB="27432" anchor="ctr">
+                    <a:solidFill>
+                      <a:srgbClr val="FFFFFF"/>
+                    </a:solidFill>
+                  </a:tcPr>
+                </a:tc>
+                <a:tc>
+                  <a:txBody>
+                    <a:bodyPr/>
+                    <a:lstStyle/>
+                    <a:p>
+                      <a:r>
+                        <a:rPr sz="1000" b="0">
+                          <a:solidFill>
+                            <a:srgbClr val="263238"/>
+                          </a:solidFill>
+                          <a:latin typeface="Calibri"/>
+                        </a:rPr>
+                        <a:t>Timestamps each arcade-button press with GPIO edge detection so the first press wins fairly</a:t>
+                      </a:r>
+                    </a:p>
+                  </a:txBody>
+                  <a:tcPr marL="54864" marR="54864" marT="27432" marB="27432" anchor="ctr">
+                    <a:solidFill>
+                      <a:srgbClr val="FFFFFF"/>
+                    </a:solidFill>
+                  </a:tcPr>
+                </a:tc>
+                <a:extLst>
+                  <a:ext uri="{0D108BD9-81ED-4DB2-BD59-A6C34878D82A}">
+                    <a16:rowId xmlns:a16="http://schemas.microsoft.com/office/drawing/2014/main" val="10002"/>
+                  </a:ext>
+                </a:extLst>
+              </a:tr>
+              <a:tr h="402336">
+                <a:tc>
+                  <a:txBody>
+                    <a:bodyPr/>
+                    <a:lstStyle/>
+                    <a:p>
+                      <a:r>
+                        <a:rPr sz="1000" b="1">
+                          <a:solidFill>
+                            <a:srgbClr val="263238"/>
+                          </a:solidFill>
+                          <a:latin typeface="Calibri"/>
+                        </a:rPr>
+                        <a:t>Button</a:t>
+                      </a:r>
+                    </a:p>
+                  </a:txBody>
+                  <a:tcPr marL="54864" marR="54864" marT="27432" marB="27432" anchor="ctr">
+                    <a:solidFill>
+                      <a:srgbClr val="F4F6F7"/>
+                    </a:solidFill>
+                  </a:tcPr>
+                </a:tc>
+                <a:tc>
+                  <a:txBody>
+                    <a:bodyPr/>
+                    <a:lstStyle/>
+                    <a:p>
+                      <a:r>
+                        <a:rPr sz="1000" b="0">
+                          <a:solidFill>
+                            <a:srgbClr val="263238"/>
+                          </a:solidFill>
+                          <a:latin typeface="Calibri"/>
+                        </a:rPr>
+                        <a:t>button.py</a:t>
+                      </a:r>
+                    </a:p>
+                  </a:txBody>
+                  <a:tcPr marL="54864" marR="54864" marT="27432" marB="27432" anchor="ctr">
+                    <a:solidFill>
+                      <a:srgbClr val="F4F6F7"/>
+                    </a:solidFill>
+                  </a:tcPr>
+                </a:tc>
+                <a:tc>
+                  <a:txBody>
+                    <a:bodyPr/>
+                    <a:lstStyle/>
+                    <a:p>
+                      <a:r>
+                        <a:rPr sz="1000" b="1">
+                          <a:solidFill>
+                            <a:srgbClr val="2E7D32"/>
+                          </a:solidFill>
+                          <a:latin typeface="Calibri"/>
+                        </a:rPr>
+                        <a:t>Done (HW #4)</a:t>
+                      </a:r>
+                    </a:p>
+                  </a:txBody>
+                  <a:tcPr marL="54864" marR="54864" marT="27432" marB="27432" anchor="ctr">
+                    <a:solidFill>
+                      <a:srgbClr val="F4F6F7"/>
+                    </a:solidFill>
+                  </a:tcPr>
+                </a:tc>
+                <a:tc>
+                  <a:txBody>
+                    <a:bodyPr/>
+                    <a:lstStyle/>
+                    <a:p>
+                      <a:r>
+                        <a:rPr sz="1000" b="0">
+                          <a:solidFill>
+                            <a:srgbClr val="1B5EA8"/>
+                          </a:solidFill>
+                          <a:latin typeface="Calibri"/>
+                        </a:rPr>
+                        <a:t>is_pressed(), wait_for_press(), get_last_press_duration()</a:t>
+                      </a:r>
+                    </a:p>
+                  </a:txBody>
+                  <a:tcPr marL="54864" marR="54864" marT="27432" marB="27432" anchor="ctr">
+                    <a:solidFill>
+                      <a:srgbClr val="F4F6F7"/>
+                    </a:solidFill>
+                  </a:tcPr>
+                </a:tc>
+                <a:tc>
+                  <a:txBody>
+                    <a:bodyPr/>
+                    <a:lstStyle/>
+                    <a:p>
+                      <a:r>
+                        <a:rPr sz="1000" b="0">
+                          <a:solidFill>
+                            <a:srgbClr val="263238"/>
+                          </a:solidFill>
+                          <a:latin typeface="Calibri"/>
+                        </a:rPr>
+                        <a:t>Start / mode button (short press = 2P, hold &gt; 2 s = 1P)</a:t>
+                      </a:r>
+                    </a:p>
+                  </a:txBody>
+                  <a:tcPr marL="54864" marR="54864" marT="27432" marB="27432" anchor="ctr">
+                    <a:solidFill>
+                      <a:srgbClr val="F4F6F7"/>
+                    </a:solidFill>
+                  </a:tcPr>
+                </a:tc>
+                <a:extLst>
+                  <a:ext uri="{0D108BD9-81ED-4DB2-BD59-A6C34878D82A}">
+                    <a16:rowId xmlns:a16="http://schemas.microsoft.com/office/drawing/2014/main" val="10003"/>
+                  </a:ext>
+                </a:extLst>
+              </a:tr>
+              <a:tr h="402336">
+                <a:tc>
+                  <a:txBody>
+                    <a:bodyPr/>
+                    <a:lstStyle/>
+                    <a:p>
+                      <a:r>
+                        <a:rPr sz="1000" b="1">
+                          <a:solidFill>
+                            <a:srgbClr val="263238"/>
+                          </a:solidFill>
+                          <a:latin typeface="Calibri"/>
+                        </a:rPr>
+                        <a:t>Potentiometer</a:t>
+                      </a:r>
+                    </a:p>
+                  </a:txBody>
+                  <a:tcPr marL="54864" marR="54864" marT="27432" marB="27432" anchor="ctr">
+                    <a:solidFill>
+                      <a:srgbClr val="FFFFFF"/>
+                    </a:solidFill>
+                  </a:tcPr>
+                </a:tc>
+                <a:tc>
+                  <a:txBody>
+                    <a:bodyPr/>
+                    <a:lstStyle/>
+                    <a:p>
+                      <a:r>
+                        <a:rPr sz="1000" b="0">
+                          <a:solidFill>
+                            <a:srgbClr val="263238"/>
+                          </a:solidFill>
+                          <a:latin typeface="Calibri"/>
+                        </a:rPr>
+                        <a:t>potentiometer.py</a:t>
+                      </a:r>
+                    </a:p>
+                  </a:txBody>
+                  <a:tcPr marL="54864" marR="54864" marT="27432" marB="27432" anchor="ctr">
+                    <a:solidFill>
+                      <a:srgbClr val="FFFFFF"/>
+                    </a:solidFill>
+                  </a:tcPr>
+                </a:tc>
+                <a:tc>
+                  <a:txBody>
+                    <a:bodyPr/>
+                    <a:lstStyle/>
+                    <a:p>
+                      <a:r>
+                        <a:rPr sz="1000" b="1">
+                          <a:solidFill>
+                            <a:srgbClr val="2E7D32"/>
+                          </a:solidFill>
+                          <a:latin typeface="Calibri"/>
+                        </a:rPr>
+                        <a:t>Done (class)</a:t>
+                      </a:r>
+                    </a:p>
+                  </a:txBody>
+                  <a:tcPr marL="54864" marR="54864" marT="27432" marB="27432" anchor="ctr">
+                    <a:solidFill>
+                      <a:srgbClr val="FFFFFF"/>
+                    </a:solidFill>
+                  </a:tcPr>
+                </a:tc>
+                <a:tc>
+                  <a:txBody>
+                    <a:bodyPr/>
+                    <a:lstStyle/>
+                    <a:p>
+                      <a:r>
+                        <a:rPr sz="1000" b="0">
+                          <a:solidFill>
+                            <a:srgbClr val="1B5EA8"/>
+                          </a:solidFill>
+                          <a:latin typeface="Calibri"/>
+                        </a:rPr>
+                        <a:t>get_value()</a:t>
+                      </a:r>
+                    </a:p>
+                  </a:txBody>
+                  <a:tcPr marL="54864" marR="54864" marT="27432" marB="27432" anchor="ctr">
+                    <a:solidFill>
+                      <a:srgbClr val="FFFFFF"/>
+                    </a:solidFill>
+                  </a:tcPr>
+                </a:tc>
+                <a:tc>
+                  <a:txBody>
+                    <a:bodyPr/>
+                    <a:lstStyle/>
+                    <a:p>
+                      <a:r>
+                        <a:rPr sz="1000" b="0">
+                          <a:solidFill>
+                            <a:srgbClr val="263238"/>
+                          </a:solidFill>
+                          <a:latin typeface="Calibri"/>
+                        </a:rPr>
+                        <a:t>Difficulty knob (CPU speed)</a:t>
+                      </a:r>
+                    </a:p>
+                  </a:txBody>
+                  <a:tcPr marL="54864" marR="54864" marT="27432" marB="27432" anchor="ctr">
+                    <a:solidFill>
+                      <a:srgbClr val="FFFFFF"/>
+                    </a:solidFill>
+                  </a:tcPr>
+                </a:tc>
+                <a:extLst>
+                  <a:ext uri="{0D108BD9-81ED-4DB2-BD59-A6C34878D82A}">
+                    <a16:rowId xmlns:a16="http://schemas.microsoft.com/office/drawing/2014/main" val="10004"/>
+                  </a:ext>
+                </a:extLst>
+              </a:tr>
+              <a:tr h="402336">
+                <a:tc>
+                  <a:txBody>
+                    <a:bodyPr/>
+                    <a:lstStyle/>
+                    <a:p>
+                      <a:r>
+                        <a:rPr sz="1000" b="1">
+                          <a:solidFill>
+                            <a:srgbClr val="263238"/>
+                          </a:solidFill>
+                          <a:latin typeface="Calibri"/>
+                        </a:rPr>
+                        <a:t>HT16K33</a:t>
+                      </a:r>
+                    </a:p>
+                  </a:txBody>
+                  <a:tcPr marL="54864" marR="54864" marT="27432" marB="27432" anchor="ctr">
+                    <a:solidFill>
+                      <a:srgbClr val="F4F6F7"/>
+                    </a:solidFill>
+                  </a:tcPr>
+                </a:tc>
+                <a:tc>
+                  <a:txBody>
+                    <a:bodyPr/>
+                    <a:lstStyle/>
+                    <a:p>
+                      <a:r>
+                        <a:rPr sz="1000" b="0">
+                          <a:solidFill>
+                            <a:srgbClr val="263238"/>
+                          </a:solidFill>
+                          <a:latin typeface="Calibri"/>
+                        </a:rPr>
+                        <a:t>ht16k33.py</a:t>
+                      </a:r>
+                    </a:p>
+                  </a:txBody>
+                  <a:tcPr marL="54864" marR="54864" marT="27432" marB="27432" anchor="ctr">
+                    <a:solidFill>
+                      <a:srgbClr val="F4F6F7"/>
+                    </a:solidFill>
+                  </a:tcPr>
+                </a:tc>
+                <a:tc>
+                  <a:txBody>
+                    <a:bodyPr/>
+                    <a:lstStyle/>
+                    <a:p>
+                      <a:r>
+                        <a:rPr sz="1000" b="1">
+                          <a:solidFill>
+                            <a:srgbClr val="2E7D32"/>
+                          </a:solidFill>
+                          <a:latin typeface="Calibri"/>
+                        </a:rPr>
+                        <a:t>Done (class)</a:t>
+                      </a:r>
+                    </a:p>
+                  </a:txBody>
+                  <a:tcPr marL="54864" marR="54864" marT="27432" marB="27432" anchor="ctr">
+                    <a:solidFill>
+                      <a:srgbClr val="F4F6F7"/>
+                    </a:solidFill>
+                  </a:tcPr>
+                </a:tc>
+                <a:tc>
+                  <a:txBody>
+                    <a:bodyPr/>
+                    <a:lstStyle/>
+                    <a:p>
+                      <a:r>
+                        <a:rPr sz="1000" b="0">
+                          <a:solidFill>
+                            <a:srgbClr val="1B5EA8"/>
+                          </a:solidFill>
+                          <a:latin typeface="Calibri"/>
+                        </a:rPr>
+                        <a:t>clear(), blank(), update(value), text(str)</a:t>
+                      </a:r>
+                    </a:p>
+                  </a:txBody>
+                  <a:tcPr marL="54864" marR="54864" marT="27432" marB="27432" anchor="ctr">
+                    <a:solidFill>
+                      <a:srgbClr val="F4F6F7"/>
+                    </a:solidFill>
+                  </a:tcPr>
+                </a:tc>
+                <a:tc>
+                  <a:txBody>
+                    <a:bodyPr/>
+                    <a:lstStyle/>
+                    <a:p>
+                      <a:r>
+                        <a:rPr sz="1000" b="0">
+                          <a:solidFill>
+                            <a:srgbClr val="263238"/>
+                          </a:solidFill>
+                          <a:latin typeface="Calibri"/>
+                        </a:rPr>
+                        <a:t>Reaction time, “rdy”, winner (P1 / P2)</a:t>
+                      </a:r>
+                    </a:p>
+                  </a:txBody>
+                  <a:tcPr marL="54864" marR="54864" marT="27432" marB="27432" anchor="ctr">
+                    <a:solidFill>
+                      <a:srgbClr val="F4F6F7"/>
+                    </a:solidFill>
+                  </a:tcPr>
+                </a:tc>
+                <a:extLst>
+                  <a:ext uri="{0D108BD9-81ED-4DB2-BD59-A6C34878D82A}">
+                    <a16:rowId xmlns:a16="http://schemas.microsoft.com/office/drawing/2014/main" val="10005"/>
+                  </a:ext>
+                </a:extLst>
+              </a:tr>
+              <a:tr h="402336">
+                <a:tc>
+                  <a:txBody>
+                    <a:bodyPr/>
+                    <a:lstStyle/>
+                    <a:p>
+                      <a:r>
+                        <a:rPr sz="1000" b="1">
+                          <a:solidFill>
+                            <a:srgbClr val="263238"/>
+                          </a:solidFill>
+                          <a:latin typeface="Calibri"/>
+                        </a:rPr>
+                        <a:t>LEDStrip</a:t>
+                      </a:r>
+                    </a:p>
+                  </a:txBody>
+                  <a:tcPr marL="54864" marR="54864" marT="27432" marB="27432" anchor="ctr">
+                    <a:solidFill>
+                      <a:srgbClr val="FFFFFF"/>
+                    </a:solidFill>
+                  </a:tcPr>
+                </a:tc>
+                <a:tc>
+                  <a:txBody>
+                    <a:bodyPr/>
+                    <a:lstStyle/>
+                    <a:p>
+                      <a:r>
+                        <a:rPr sz="1000" b="0">
+                          <a:solidFill>
+                            <a:srgbClr val="263238"/>
+                          </a:solidFill>
+                          <a:latin typeface="Calibri"/>
+                        </a:rPr>
+                        <a:t>led_strip.py</a:t>
+                      </a:r>
+                    </a:p>
+                  </a:txBody>
+                  <a:tcPr marL="54864" marR="54864" marT="27432" marB="27432" anchor="ctr">
+                    <a:solidFill>
+                      <a:srgbClr val="FFFFFF"/>
+                    </a:solidFill>
+                  </a:tcPr>
+                </a:tc>
+                <a:tc>
+                  <a:txBody>
+                    <a:bodyPr/>
+                    <a:lstStyle/>
+                    <a:p>
+                      <a:r>
+                        <a:rPr sz="1000" b="1">
+                          <a:solidFill>
+                            <a:srgbClr val="E66A00"/>
+                          </a:solidFill>
+                          <a:latin typeface="Calibri"/>
+                        </a:rPr>
+                        <a:t>To write</a:t>
+                      </a:r>
+                    </a:p>
+                  </a:txBody>
+                  <a:tcPr marL="54864" marR="54864" marT="27432" marB="27432" anchor="ctr">
+                    <a:solidFill>
+                      <a:srgbClr val="FFFFFF"/>
+                    </a:solidFill>
+                  </a:tcPr>
+                </a:tc>
+                <a:tc>
+                  <a:txBody>
+                    <a:bodyPr/>
+                    <a:lstStyle/>
+                    <a:p>
+                      <a:r>
+                        <a:rPr sz="1000" b="0">
+                          <a:solidFill>
+                            <a:srgbClr val="1B5EA8"/>
+                          </a:solidFill>
+                          <a:latin typeface="Calibri"/>
+                        </a:rPr>
+                        <a:t>set_pixel(i, color), fill(color), show(), clear(), set_brightness(b)</a:t>
+                      </a:r>
+                    </a:p>
+                  </a:txBody>
+                  <a:tcPr marL="54864" marR="54864" marT="27432" marB="27432" anchor="ctr">
+                    <a:solidFill>
+                      <a:srgbClr val="FFFFFF"/>
+                    </a:solidFill>
+                  </a:tcPr>
+                </a:tc>
+                <a:tc>
+                  <a:txBody>
+                    <a:bodyPr/>
+                    <a:lstStyle/>
+                    <a:p>
+                      <a:r>
+                        <a:rPr sz="1000" b="0">
+                          <a:solidFill>
+                            <a:srgbClr val="263238"/>
+                          </a:solidFill>
+                          <a:latin typeface="Calibri"/>
+                        </a:rPr>
+                        <a:t>WS2812 driver over SPI (spidev); brightness capped</a:t>
+                      </a:r>
+                    </a:p>
+                  </a:txBody>
+                  <a:tcPr marL="54864" marR="54864" marT="27432" marB="27432" anchor="ctr">
+                    <a:solidFill>
+                      <a:srgbClr val="FFFFFF"/>
+                    </a:solidFill>
+                  </a:tcPr>
+                </a:tc>
+                <a:extLst>
+                  <a:ext uri="{0D108BD9-81ED-4DB2-BD59-A6C34878D82A}">
+                    <a16:rowId xmlns:a16="http://schemas.microsoft.com/office/drawing/2014/main" val="10006"/>
+                  </a:ext>
+                </a:extLst>
+              </a:tr>
+              <a:tr h="402336">
+                <a:tc>
+                  <a:txBody>
+                    <a:bodyPr/>
+                    <a:lstStyle/>
+                    <a:p>
+                      <a:r>
+                        <a:rPr sz="1000" b="1">
+                          <a:solidFill>
+                            <a:srgbClr val="263238"/>
+                          </a:solidFill>
+                          <a:latin typeface="Calibri"/>
+                        </a:rPr>
+                        <a:t>Rope</a:t>
+                      </a:r>
+                    </a:p>
+                  </a:txBody>
+                  <a:tcPr marL="54864" marR="54864" marT="27432" marB="27432" anchor="ctr">
+                    <a:solidFill>
+                      <a:srgbClr val="F4F6F7"/>
+                    </a:solidFill>
+                  </a:tcPr>
+                </a:tc>
+                <a:tc>
+                  <a:txBody>
+                    <a:bodyPr/>
+                    <a:lstStyle/>
+                    <a:p>
+                      <a:r>
+                        <a:rPr sz="1000" b="0">
+                          <a:solidFill>
+                            <a:srgbClr val="263238"/>
+                          </a:solidFill>
+                          <a:latin typeface="Calibri"/>
+                        </a:rPr>
+                        <a:t>rope.py</a:t>
+                      </a:r>
+                    </a:p>
+                  </a:txBody>
+                  <a:tcPr marL="54864" marR="54864" marT="27432" marB="27432" anchor="ctr">
+                    <a:solidFill>
+                      <a:srgbClr val="F4F6F7"/>
+                    </a:solidFill>
+                  </a:tcPr>
+                </a:tc>
+                <a:tc>
+                  <a:txBody>
+                    <a:bodyPr/>
+                    <a:lstStyle/>
+                    <a:p>
+                      <a:r>
+                        <a:rPr sz="1000" b="1">
+                          <a:solidFill>
+                            <a:srgbClr val="E66A00"/>
+                          </a:solidFill>
+                          <a:latin typeface="Calibri"/>
+                        </a:rPr>
+                        <a:t>To write</a:t>
+                      </a:r>
+                    </a:p>
+                  </a:txBody>
+                  <a:tcPr marL="54864" marR="54864" marT="27432" marB="27432" anchor="ctr">
+                    <a:solidFill>
+                      <a:srgbClr val="F4F6F7"/>
+                    </a:solidFill>
+                  </a:tcPr>
+                </a:tc>
+                <a:tc>
+                  <a:txBody>
+                    <a:bodyPr/>
+                    <a:lstStyle/>
+                    <a:p>
+                      <a:r>
+                        <a:rPr sz="1000" b="0">
+                          <a:solidFill>
+                            <a:srgbClr val="1B5EA8"/>
+                          </a:solidFill>
+                          <a:latin typeface="Calibri"/>
+                        </a:rPr>
+                        <a:t>draw(position), flash(color), win_animation(player), idle()</a:t>
+                      </a:r>
+                    </a:p>
+                  </a:txBody>
+                  <a:tcPr marL="54864" marR="54864" marT="27432" marB="27432" anchor="ctr">
+                    <a:solidFill>
+                      <a:srgbClr val="F4F6F7"/>
+                    </a:solidFill>
+                  </a:tcPr>
+                </a:tc>
+                <a:tc>
+                  <a:txBody>
+                    <a:bodyPr/>
+                    <a:lstStyle/>
+                    <a:p>
+                      <a:r>
+                        <a:rPr sz="1000" b="0">
+                          <a:solidFill>
+                            <a:srgbClr val="263238"/>
+                          </a:solidFill>
+                          <a:latin typeface="Calibri"/>
+                        </a:rPr>
+                        <a:t>Turns rope position into LED patterns</a:t>
+                      </a:r>
+                    </a:p>
+                  </a:txBody>
+                  <a:tcPr marL="54864" marR="54864" marT="27432" marB="27432" anchor="ctr">
+                    <a:solidFill>
+                      <a:srgbClr val="F4F6F7"/>
+                    </a:solidFill>
+                  </a:tcPr>
+                </a:tc>
+                <a:extLst>
+                  <a:ext uri="{0D108BD9-81ED-4DB2-BD59-A6C34878D82A}">
+                    <a16:rowId xmlns:a16="http://schemas.microsoft.com/office/drawing/2014/main" val="10007"/>
+                  </a:ext>
+                </a:extLst>
+              </a:tr>
+              <a:tr h="402336">
+                <a:tc>
+                  <a:txBody>
+                    <a:bodyPr/>
+                    <a:lstStyle/>
+                    <a:p>
+                      <a:r>
+                        <a:rPr sz="1000" b="1">
+                          <a:solidFill>
+                            <a:srgbClr val="263238"/>
+                          </a:solidFill>
+                          <a:latin typeface="Calibri"/>
+                        </a:rPr>
+                        <a:t>Buzzer</a:t>
+                      </a:r>
+                    </a:p>
+                  </a:txBody>
+                  <a:tcPr marL="54864" marR="54864" marT="27432" marB="27432" anchor="ctr">
+                    <a:solidFill>
+                      <a:srgbClr val="FFFFFF"/>
+                    </a:solidFill>
+                  </a:tcPr>
+                </a:tc>
+                <a:tc>
+                  <a:txBody>
+                    <a:bodyPr/>
+                    <a:lstStyle/>
+                    <a:p>
+                      <a:r>
+                        <a:rPr sz="1000" b="0">
+                          <a:solidFill>
+                            <a:srgbClr val="263238"/>
+                          </a:solidFill>
+                          <a:latin typeface="Calibri"/>
+                        </a:rPr>
+                        <a:t>buzzer.py</a:t>
+                      </a:r>
+                    </a:p>
+                  </a:txBody>
+                  <a:tcPr marL="54864" marR="54864" marT="27432" marB="27432" anchor="ctr">
+                    <a:solidFill>
+                      <a:srgbClr val="FFFFFF"/>
+                    </a:solidFill>
+                  </a:tcPr>
+                </a:tc>
+                <a:tc>
+                  <a:txBody>
+                    <a:bodyPr/>
+                    <a:lstStyle/>
+                    <a:p>
+                      <a:r>
+                        <a:rPr sz="1000" b="1">
+                          <a:solidFill>
+                            <a:srgbClr val="E66A00"/>
+                          </a:solidFill>
+                          <a:latin typeface="Calibri"/>
+                        </a:rPr>
+                        <a:t>To write</a:t>
+                      </a:r>
+                    </a:p>
+                  </a:txBody>
+                  <a:tcPr marL="54864" marR="54864" marT="27432" marB="27432" anchor="ctr">
+                    <a:solidFill>
+                      <a:srgbClr val="FFFFFF"/>
+                    </a:solidFill>
+                  </a:tcPr>
+                </a:tc>
+                <a:tc>
+                  <a:txBody>
+                    <a:bodyPr/>
+                    <a:lstStyle/>
+                    <a:p>
+                      <a:r>
+                        <a:rPr sz="1000" b="0">
+                          <a:solidFill>
+                            <a:srgbClr val="1B5EA8"/>
+                          </a:solidFill>
+                          <a:latin typeface="Calibri"/>
+                        </a:rPr>
+                        <a:t>play(freq, length), stop()</a:t>
+                      </a:r>
+                    </a:p>
+                  </a:txBody>
+                  <a:tcPr marL="54864" marR="54864" marT="27432" marB="27432" anchor="ctr">
+                    <a:solidFill>
+                      <a:srgbClr val="FFFFFF"/>
+                    </a:solidFill>
+                  </a:tcPr>
+                </a:tc>
+                <a:tc>
+                  <a:txBody>
+                    <a:bodyPr/>
+                    <a:lstStyle/>
+                    <a:p>
+                      <a:r>
+                        <a:rPr sz="1000" b="0">
+                          <a:solidFill>
+                            <a:srgbClr val="263238"/>
+                          </a:solidFill>
+                          <a:latin typeface="Calibri"/>
+                        </a:rPr>
+                        <a:t>GO beep, false-start buzz, victory tune</a:t>
+                      </a:r>
+                    </a:p>
+                  </a:txBody>
+                  <a:tcPr marL="54864" marR="54864" marT="27432" marB="27432" anchor="ctr">
+                    <a:solidFill>
+                      <a:srgbClr val="FFFFFF"/>
+                    </a:solidFill>
+                  </a:tcPr>
+                </a:tc>
+                <a:extLst>
+                  <a:ext uri="{0D108BD9-81ED-4DB2-BD59-A6C34878D82A}">
+                    <a16:rowId xmlns:a16="http://schemas.microsoft.com/office/drawing/2014/main" val="10008"/>
+                  </a:ext>
+                </a:extLst>
+              </a:tr>
+              <a:tr h="402336">
+                <a:tc>
+                  <a:txBody>
+                    <a:bodyPr/>
+                    <a:lstStyle/>
+                    <a:p>
+                      <a:r>
+                        <a:rPr sz="1000" b="1">
+                          <a:solidFill>
+                            <a:srgbClr val="263238"/>
+                          </a:solidFill>
+                          <a:latin typeface="Calibri"/>
+                        </a:rPr>
+                        <a:t>StatsStore</a:t>
+                      </a:r>
+                    </a:p>
+                  </a:txBody>
+                  <a:tcPr marL="54864" marR="54864" marT="27432" marB="27432" anchor="ctr">
+                    <a:solidFill>
+                      <a:srgbClr val="F4F6F7"/>
+                    </a:solidFill>
+                  </a:tcPr>
+                </a:tc>
+                <a:tc>
+                  <a:txBody>
+                    <a:bodyPr/>
+                    <a:lstStyle/>
+                    <a:p>
+                      <a:r>
+                        <a:rPr sz="1000" b="0">
+                          <a:solidFill>
+                            <a:srgbClr val="263238"/>
+                          </a:solidFill>
+                          <a:latin typeface="Calibri"/>
+                        </a:rPr>
+                        <a:t>stats.py</a:t>
+                      </a:r>
+                    </a:p>
+                  </a:txBody>
+                  <a:tcPr marL="54864" marR="54864" marT="27432" marB="27432" anchor="ctr">
+                    <a:solidFill>
+                      <a:srgbClr val="F4F6F7"/>
+                    </a:solidFill>
+                  </a:tcPr>
+                </a:tc>
+                <a:tc>
+                  <a:txBody>
+                    <a:bodyPr/>
+                    <a:lstStyle/>
+                    <a:p>
+                      <a:r>
+                        <a:rPr sz="1000" b="1">
+                          <a:solidFill>
+                            <a:srgbClr val="E66A00"/>
+                          </a:solidFill>
+                          <a:latin typeface="Calibri"/>
+                        </a:rPr>
+                        <a:t>To write</a:t>
+                      </a:r>
+                    </a:p>
+                  </a:txBody>
+                  <a:tcPr marL="54864" marR="54864" marT="27432" marB="27432" anchor="ctr">
+                    <a:solidFill>
+                      <a:srgbClr val="F4F6F7"/>
+                    </a:solidFill>
+                  </a:tcPr>
+                </a:tc>
+                <a:tc>
+                  <a:txBody>
+                    <a:bodyPr/>
+                    <a:lstStyle/>
+                    <a:p>
+                      <a:r>
+                        <a:rPr sz="1000" b="0">
+                          <a:solidFill>
+                            <a:srgbClr val="1B5EA8"/>
+                          </a:solidFill>
+                          <a:latin typeface="Calibri"/>
+                        </a:rPr>
+                        <a:t>load(), save(), record(player, ms), get_best()</a:t>
+                      </a:r>
+                    </a:p>
+                  </a:txBody>
+                  <a:tcPr marL="54864" marR="54864" marT="27432" marB="27432" anchor="ctr">
+                    <a:solidFill>
+                      <a:srgbClr val="F4F6F7"/>
+                    </a:solidFill>
+                  </a:tcPr>
+                </a:tc>
+                <a:tc>
+                  <a:txBody>
+                    <a:bodyPr/>
+                    <a:lstStyle/>
+                    <a:p>
+                      <a:r>
+                        <a:rPr sz="1000" b="0" dirty="0">
+                          <a:solidFill>
+                            <a:srgbClr val="263238"/>
+                          </a:solidFill>
+                          <a:latin typeface="Calibri"/>
+                        </a:rPr>
+                        <a:t>Best reaction times / wins saved across reboots</a:t>
+                      </a:r>
+                    </a:p>
+                  </a:txBody>
+                  <a:tcPr marL="54864" marR="54864" marT="27432" marB="27432" anchor="ctr">
+                    <a:solidFill>
+                      <a:srgbClr val="F4F6F7"/>
+                    </a:solidFill>
+                  </a:tcPr>
+                </a:tc>
+                <a:extLst>
+                  <a:ext uri="{0D108BD9-81ED-4DB2-BD59-A6C34878D82A}">
+                    <a16:rowId xmlns:a16="http://schemas.microsoft.com/office/drawing/2014/main" val="10009"/>
+                  </a:ext>
+                </a:extLst>
+              </a:tr>
+            </a:tbl>
+          </a:graphicData>
+        </a:graphic>
+      </p:graphicFrame>
+    </p:spTree>
+  </p:cSld>
+  <p:clrMapOvr>
+    <a:masterClrMapping/>
+  </p:clrMapOvr>
+</p:sld>
+</file>
+
+<file path=ppt/slides/slide8.xml><?xml version="1.0" encoding="utf-8"?>
+<p:sld xmlns:a="http://schemas.openxmlformats.org/drawingml/2006/main" xmlns:r="http://schemas.openxmlformats.org/officeDocument/2006/relationships" xmlns:p="http://schemas.openxmlformats.org/presentationml/2006/main">
+  <p:cSld>
+    <p:spTree>
+      <p:nvGrpSpPr>
+        <p:cNvPr id="1" name=""/>
+        <p:cNvGrpSpPr/>
+        <p:nvPr/>
+      </p:nvGrpSpPr>
+      <p:grpSpPr>
+        <a:xfrm>
+          <a:off x="0" y="0"/>
+          <a:ext cx="0" cy="0"/>
+          <a:chOff x="0" y="0"/>
+          <a:chExt cx="0" cy="0"/>
+        </a:xfrm>
+      </p:grpSpPr>
+      <p:sp>
+        <p:nvSpPr>
+          <p:cNvPr id="2" name="Title 1"/>
+          <p:cNvSpPr>
+            <a:spLocks noGrp="1"/>
+          </p:cNvSpPr>
+          <p:nvPr>
+            <p:ph type="title"/>
+          </p:nvPr>
+        </p:nvSpPr>
+        <p:spPr/>
+        <p:txBody>
+          <a:bodyPr/>
+          <a:lstStyle/>
+          <a:p>
+            <a:r>
+              <a:t>SW Flow Diagram</a:t>
+            </a:r>
+          </a:p>
+        </p:txBody>
+      </p:sp>
+      <p:sp>
+        <p:nvSpPr>
+          <p:cNvPr id="3" name="Rounded Rectangle 2"/>
+          <p:cNvSpPr/>
+          <p:nvPr/>
+        </p:nvSpPr>
+        <p:spPr>
+          <a:xfrm>
+            <a:off x="5989320" y="1188720"/>
+            <a:ext cx="5596128" cy="4754880"/>
+          </a:xfrm>
+          <a:prstGeom prst="roundRect">
+            <a:avLst>
+              <a:gd name="adj" fmla="val 8000"/>
+            </a:avLst>
+          </a:prstGeom>
+          <a:noFill/>
+          <a:ln w="25400">
+            <a:solidFill>
+              <a:srgbClr val="000000"/>
+            </a:solidFill>
+            <a:prstDash val="lgDash"/>
+          </a:ln>
+          <a:effectLst/>
+        </p:spPr>
+        <p:style>
+          <a:lnRef idx="1">
+            <a:schemeClr val="accent1"/>
+          </a:lnRef>
+          <a:fillRef idx="3">
+            <a:schemeClr val="accent1"/>
+          </a:fillRef>
+          <a:effectRef idx="2">
+            <a:schemeClr val="accent1"/>
+          </a:effectRef>
+          <a:fontRef idx="minor">
+            <a:schemeClr val="lt1"/>
+          </a:fontRef>
+        </p:style>
+        <p:txBody>
+          <a:bodyPr rtlCol="0" anchor="ctr"/>
+          <a:lstStyle/>
+          <a:p>
+            <a:pPr algn="ctr"/>
+            <a:endParaRPr/>
+          </a:p>
+        </p:txBody>
+      </p:sp>
+      <p:sp>
+        <p:nvSpPr>
+          <p:cNvPr id="4" name="TextBox 3"/>
+          <p:cNvSpPr txBox="1"/>
+          <p:nvPr/>
+        </p:nvSpPr>
+        <p:spPr>
+          <a:xfrm>
+            <a:off x="9756648" y="1280160"/>
+            <a:ext cx="1691640" cy="228600"/>
+          </a:xfrm>
+          <a:prstGeom prst="rect">
+            <a:avLst/>
+          </a:prstGeom>
+          <a:noFill/>
+        </p:spPr>
+        <p:txBody>
+          <a:bodyPr wrap="square" lIns="0" tIns="0" rIns="0" bIns="0" anchor="t">
+            <a:spAutoFit/>
+          </a:bodyPr>
+          <a:lstStyle/>
+          <a:p>
+            <a:pPr algn="r"/>
+            <a:r>
+              <a:rPr sz="1300" b="1" i="0">
+                <a:solidFill>
+                  <a:srgbClr val="000000"/>
+                </a:solidFill>
+                <a:latin typeface="Calibri"/>
+              </a:rPr>
+              <a:t>Main Program</a:t>
+            </a:r>
+          </a:p>
+        </p:txBody>
+      </p:sp>
+      <p:sp>
+        <p:nvSpPr>
+          <p:cNvPr id="5" name="Rounded Rectangle 4"/>
+          <p:cNvSpPr/>
+          <p:nvPr/>
+        </p:nvSpPr>
+        <p:spPr>
+          <a:xfrm>
+            <a:off x="7818120" y="1371600"/>
+            <a:ext cx="2331720" cy="457200"/>
+          </a:xfrm>
+          <a:prstGeom prst="roundRect">
+            <a:avLst>
+              <a:gd name="adj" fmla="val 10000"/>
+            </a:avLst>
+          </a:prstGeom>
+          <a:solidFill>
+            <a:srgbClr val="4A8FBF"/>
+          </a:solidFill>
+          <a:ln w="12700">
+            <a:solidFill>
+              <a:srgbClr val="357098"/>
+            </a:solidFill>
+          </a:ln>
+          <a:effectLst/>
+        </p:spPr>
+        <p:style>
+          <a:lnRef idx="1">
+            <a:schemeClr val="accent1"/>
+          </a:lnRef>
+          <a:fillRef idx="3">
+            <a:schemeClr val="accent1"/>
+          </a:fillRef>
+          <a:effectRef idx="2">
+            <a:schemeClr val="accent1"/>
+          </a:effectRef>
+          <a:fontRef idx="minor">
+            <a:schemeClr val="lt1"/>
+          </a:fontRef>
+        </p:style>
+        <p:txBody>
+          <a:bodyPr wrap="square" lIns="36576" tIns="27432" rIns="36576" bIns="27432" rtlCol="0" anchor="ctr"/>
+          <a:lstStyle/>
+          <a:p>
+            <a:pPr algn="ctr"/>
+            <a:r>
+              <a:rPr sz="1200" b="0" i="0">
+                <a:solidFill>
+                  <a:srgbClr val="FFFFFF"/>
+                </a:solidFill>
+                <a:latin typeface="Calibri"/>
+              </a:rPr>
+              <a:t>Setup</a:t>
+            </a:r>
+          </a:p>
+          <a:p>
+            <a:pPr algn="ctr"/>
+            <a:r>
+              <a:rPr sz="800" b="0" i="1">
+                <a:solidFill>
+                  <a:srgbClr val="E3F0F8"/>
+                </a:solidFill>
+                <a:latin typeface="Calibri"/>
+              </a:rPr>
+              <a:t>display.clear()  stats.load()</a:t>
+            </a:r>
+          </a:p>
+        </p:txBody>
+      </p:sp>
+      <p:sp>
+        <p:nvSpPr>
+          <p:cNvPr id="6" name="Rounded Rectangle 5"/>
+          <p:cNvSpPr/>
+          <p:nvPr/>
+        </p:nvSpPr>
+        <p:spPr>
+          <a:xfrm>
+            <a:off x="7818120" y="2011680"/>
+            <a:ext cx="2331720" cy="457200"/>
+          </a:xfrm>
+          <a:prstGeom prst="roundRect">
+            <a:avLst>
+              <a:gd name="adj" fmla="val 10000"/>
+            </a:avLst>
+          </a:prstGeom>
+          <a:solidFill>
+            <a:srgbClr val="4A8FBF"/>
+          </a:solidFill>
+          <a:ln w="12700">
+            <a:solidFill>
+              <a:srgbClr val="357098"/>
+            </a:solidFill>
+          </a:ln>
+          <a:effectLst/>
+        </p:spPr>
+        <p:style>
+          <a:lnRef idx="1">
+            <a:schemeClr val="accent1"/>
+          </a:lnRef>
+          <a:fillRef idx="3">
+            <a:schemeClr val="accent1"/>
+          </a:fillRef>
+          <a:effectRef idx="2">
+            <a:schemeClr val="accent1"/>
+          </a:effectRef>
+          <a:fontRef idx="minor">
+            <a:schemeClr val="lt1"/>
+          </a:fontRef>
+        </p:style>
+        <p:txBody>
+          <a:bodyPr wrap="square" lIns="36576" tIns="27432" rIns="36576" bIns="27432" rtlCol="0" anchor="ctr"/>
+          <a:lstStyle/>
+          <a:p>
+            <a:pPr algn="ctr"/>
+            <a:r>
+              <a:rPr sz="1200" b="0" i="0">
+                <a:solidFill>
+                  <a:srgbClr val="FFFFFF"/>
+                </a:solidFill>
+                <a:latin typeface="Calibri"/>
+              </a:rPr>
+              <a:t>Wait for Start</a:t>
+            </a:r>
+          </a:p>
+          <a:p>
+            <a:pPr algn="ctr"/>
+            <a:r>
+              <a:rPr sz="800" b="0" i="1">
+                <a:solidFill>
+                  <a:srgbClr val="E3F0F8"/>
+                </a:solidFill>
+                <a:latin typeface="Calibri"/>
+              </a:rPr>
+              <a:t>start.wait_for_press()</a:t>
+            </a:r>
+          </a:p>
+        </p:txBody>
+      </p:sp>
+      <p:sp>
+        <p:nvSpPr>
+          <p:cNvPr id="7" name="Rounded Rectangle 6"/>
+          <p:cNvSpPr/>
+          <p:nvPr/>
+        </p:nvSpPr>
+        <p:spPr>
+          <a:xfrm>
+            <a:off x="7818120" y="2697480"/>
+            <a:ext cx="2331720" cy="457200"/>
+          </a:xfrm>
+          <a:prstGeom prst="roundRect">
+            <a:avLst>
+              <a:gd name="adj" fmla="val 10000"/>
+            </a:avLst>
+          </a:prstGeom>
+          <a:solidFill>
+            <a:srgbClr val="4A8FBF"/>
+          </a:solidFill>
+          <a:ln w="12700">
+            <a:solidFill>
+              <a:srgbClr val="357098"/>
+            </a:solidFill>
+          </a:ln>
+          <a:effectLst/>
+        </p:spPr>
+        <p:style>
+          <a:lnRef idx="1">
+            <a:schemeClr val="accent1"/>
+          </a:lnRef>
+          <a:fillRef idx="3">
+            <a:schemeClr val="accent1"/>
+          </a:fillRef>
+          <a:effectRef idx="2">
+            <a:schemeClr val="accent1"/>
+          </a:effectRef>
+          <a:fontRef idx="minor">
+            <a:schemeClr val="lt1"/>
+          </a:fontRef>
+        </p:style>
+        <p:txBody>
+          <a:bodyPr wrap="square" lIns="36576" tIns="27432" rIns="36576" bIns="27432" rtlCol="0" anchor="ctr"/>
+          <a:lstStyle/>
+          <a:p>
+            <a:pPr algn="ctr"/>
+            <a:r>
+              <a:rPr sz="1200" b="0" i="0">
+                <a:solidFill>
+                  <a:srgbClr val="FFFFFF"/>
+                </a:solidFill>
+                <a:latin typeface="Calibri"/>
+              </a:rPr>
+              <a:t>New Game</a:t>
+            </a:r>
+          </a:p>
+          <a:p>
+            <a:pPr algn="ctr"/>
+            <a:r>
+              <a:rPr sz="800" b="0" i="1">
+                <a:solidFill>
+                  <a:srgbClr val="E3F0F8"/>
+                </a:solidFill>
+                <a:latin typeface="Calibri"/>
+              </a:rPr>
+              <a:t>get_last_press_duration()  pot.get_value()</a:t>
+            </a:r>
+          </a:p>
+        </p:txBody>
+      </p:sp>
+      <p:sp>
+        <p:nvSpPr>
+          <p:cNvPr id="8" name="Rounded Rectangle 7"/>
+          <p:cNvSpPr/>
+          <p:nvPr/>
+        </p:nvSpPr>
+        <p:spPr>
+          <a:xfrm>
+            <a:off x="7818120" y="3337560"/>
+            <a:ext cx="2331720" cy="457200"/>
+          </a:xfrm>
+          <a:prstGeom prst="roundRect">
+            <a:avLst>
+              <a:gd name="adj" fmla="val 10000"/>
+            </a:avLst>
+          </a:prstGeom>
+          <a:solidFill>
+            <a:srgbClr val="4A8FBF"/>
+          </a:solidFill>
+          <a:ln w="12700">
+            <a:solidFill>
+              <a:srgbClr val="357098"/>
+            </a:solidFill>
+          </a:ln>
+          <a:effectLst/>
+        </p:spPr>
+        <p:style>
+          <a:lnRef idx="1">
+            <a:schemeClr val="accent1"/>
+          </a:lnRef>
+          <a:fillRef idx="3">
+            <a:schemeClr val="accent1"/>
+          </a:fillRef>
+          <a:effectRef idx="2">
+            <a:schemeClr val="accent1"/>
+          </a:effectRef>
+          <a:fontRef idx="minor">
+            <a:schemeClr val="lt1"/>
+          </a:fontRef>
+        </p:style>
+        <p:txBody>
+          <a:bodyPr wrap="square" lIns="36576" tIns="27432" rIns="36576" bIns="27432" rtlCol="0" anchor="ctr"/>
+          <a:lstStyle/>
+          <a:p>
+            <a:pPr algn="ctr"/>
+            <a:r>
+              <a:rPr sz="1200" b="0" i="0">
+                <a:solidFill>
+                  <a:srgbClr val="FFFFFF"/>
+                </a:solidFill>
+                <a:latin typeface="Calibri"/>
+              </a:rPr>
+              <a:t>Play Round</a:t>
+            </a:r>
+          </a:p>
+        </p:txBody>
+      </p:sp>
+      <p:sp>
+        <p:nvSpPr>
+          <p:cNvPr id="9" name="Rounded Rectangle 8"/>
+          <p:cNvSpPr/>
+          <p:nvPr/>
+        </p:nvSpPr>
+        <p:spPr>
+          <a:xfrm>
+            <a:off x="7818120" y="3977639"/>
+            <a:ext cx="2331720" cy="457200"/>
+          </a:xfrm>
+          <a:prstGeom prst="roundRect">
+            <a:avLst>
+              <a:gd name="adj" fmla="val 10000"/>
+            </a:avLst>
+          </a:prstGeom>
+          <a:solidFill>
+            <a:srgbClr val="4A8FBF"/>
+          </a:solidFill>
+          <a:ln w="12700">
+            <a:solidFill>
+              <a:srgbClr val="357098"/>
+            </a:solidFill>
+          </a:ln>
+          <a:effectLst/>
+        </p:spPr>
+        <p:style>
+          <a:lnRef idx="1">
+            <a:schemeClr val="accent1"/>
+          </a:lnRef>
+          <a:fillRef idx="3">
+            <a:schemeClr val="accent1"/>
+          </a:fillRef>
+          <a:effectRef idx="2">
+            <a:schemeClr val="accent1"/>
+          </a:effectRef>
+          <a:fontRef idx="minor">
+            <a:schemeClr val="lt1"/>
+          </a:fontRef>
+        </p:style>
+        <p:txBody>
+          <a:bodyPr wrap="square" lIns="36576" tIns="27432" rIns="36576" bIns="27432" rtlCol="0" anchor="ctr"/>
+          <a:lstStyle/>
+          <a:p>
+            <a:pPr algn="ctr"/>
+            <a:r>
+              <a:rPr sz="1200" b="0" i="0">
+                <a:solidFill>
+                  <a:srgbClr val="FFFFFF"/>
+                </a:solidFill>
+                <a:latin typeface="Calibri"/>
+              </a:rPr>
+              <a:t>Move Rope</a:t>
+            </a:r>
+          </a:p>
+          <a:p>
+            <a:pPr algn="ctr"/>
+            <a:r>
+              <a:rPr sz="800" b="0" i="1">
+                <a:solidFill>
+                  <a:srgbClr val="E3F0F8"/>
+                </a:solidFill>
+                <a:latin typeface="Calibri"/>
+              </a:rPr>
+              <a:t>rope.draw(pos)  display.update(ms)</a:t>
+            </a:r>
+          </a:p>
+        </p:txBody>
+      </p:sp>
+      <p:sp>
+        <p:nvSpPr>
+          <p:cNvPr id="10" name="Rounded Rectangle 9"/>
+          <p:cNvSpPr/>
+          <p:nvPr/>
+        </p:nvSpPr>
+        <p:spPr>
+          <a:xfrm>
+            <a:off x="7818120" y="4617720"/>
+            <a:ext cx="2331720" cy="457200"/>
+          </a:xfrm>
+          <a:prstGeom prst="roundRect">
+            <a:avLst>
+              <a:gd name="adj" fmla="val 10000"/>
+            </a:avLst>
+          </a:prstGeom>
+          <a:solidFill>
+            <a:srgbClr val="4A8FBF"/>
+          </a:solidFill>
+          <a:ln w="12700">
+            <a:solidFill>
+              <a:srgbClr val="357098"/>
+            </a:solidFill>
+          </a:ln>
+          <a:effectLst/>
+        </p:spPr>
+        <p:style>
+          <a:lnRef idx="1">
+            <a:schemeClr val="accent1"/>
+          </a:lnRef>
+          <a:fillRef idx="3">
+            <a:schemeClr val="accent1"/>
+          </a:fillRef>
+          <a:effectRef idx="2">
+            <a:schemeClr val="accent1"/>
+          </a:effectRef>
+          <a:fontRef idx="minor">
+            <a:schemeClr val="lt1"/>
+          </a:fontRef>
+        </p:style>
+        <p:txBody>
+          <a:bodyPr wrap="square" lIns="36576" tIns="27432" rIns="36576" bIns="27432" rtlCol="0" anchor="ctr"/>
+          <a:lstStyle/>
+          <a:p>
+            <a:pPr algn="ctr"/>
+            <a:r>
+              <a:rPr sz="1200" b="0" i="0">
+                <a:solidFill>
+                  <a:srgbClr val="FFFFFF"/>
+                </a:solidFill>
+                <a:latin typeface="Calibri"/>
+              </a:rPr>
+              <a:t>Check Rope</a:t>
+            </a:r>
+          </a:p>
+        </p:txBody>
+      </p:sp>
+      <p:sp>
+        <p:nvSpPr>
+          <p:cNvPr id="11" name="Rounded Rectangle 10"/>
+          <p:cNvSpPr/>
+          <p:nvPr/>
+        </p:nvSpPr>
+        <p:spPr>
+          <a:xfrm>
+            <a:off x="7818120" y="5257800"/>
+            <a:ext cx="2331720" cy="457200"/>
+          </a:xfrm>
+          <a:prstGeom prst="roundRect">
+            <a:avLst>
+              <a:gd name="adj" fmla="val 10000"/>
+            </a:avLst>
+          </a:prstGeom>
+          <a:solidFill>
+            <a:srgbClr val="4A8FBF"/>
+          </a:solidFill>
+          <a:ln w="12700">
+            <a:solidFill>
+              <a:srgbClr val="357098"/>
+            </a:solidFill>
+          </a:ln>
+          <a:effectLst/>
+        </p:spPr>
+        <p:style>
+          <a:lnRef idx="1">
+            <a:schemeClr val="accent1"/>
+          </a:lnRef>
+          <a:fillRef idx="3">
+            <a:schemeClr val="accent1"/>
+          </a:fillRef>
+          <a:effectRef idx="2">
+            <a:schemeClr val="accent1"/>
+          </a:effectRef>
+          <a:fontRef idx="minor">
+            <a:schemeClr val="lt1"/>
+          </a:fontRef>
+        </p:style>
+        <p:txBody>
+          <a:bodyPr wrap="square" lIns="36576" tIns="27432" rIns="36576" bIns="27432" rtlCol="0" anchor="ctr"/>
+          <a:lstStyle/>
+          <a:p>
+            <a:pPr algn="ctr"/>
+            <a:r>
+              <a:rPr sz="1200" b="0" i="0">
+                <a:solidFill>
+                  <a:srgbClr val="FFFFFF"/>
+                </a:solidFill>
+                <a:latin typeface="Calibri"/>
+              </a:rPr>
+              <a:t>Victory</a:t>
+            </a:r>
+          </a:p>
+          <a:p>
+            <a:pPr algn="ctr"/>
+            <a:r>
+              <a:rPr sz="800" b="0" i="1">
+                <a:solidFill>
+                  <a:srgbClr val="E3F0F8"/>
+                </a:solidFill>
+                <a:latin typeface="Calibri"/>
+              </a:rPr>
+              <a:t>rope.win_animation()  stats.save()</a:t>
+            </a:r>
+          </a:p>
+        </p:txBody>
+      </p:sp>
+      <p:cxnSp>
+        <p:nvCxnSpPr>
+          <p:cNvPr id="12" name="Connector 11"/>
+          <p:cNvCxnSpPr/>
+          <p:nvPr/>
+        </p:nvCxnSpPr>
+        <p:spPr>
+          <a:xfrm>
+            <a:off x="8983980" y="1828800"/>
+            <a:ext cx="0" cy="182880"/>
+          </a:xfrm>
+          <a:prstGeom prst="line">
+            <a:avLst/>
+          </a:prstGeom>
+          <a:ln w="28575">
+            <a:solidFill>
+              <a:srgbClr val="000000"/>
+            </a:solidFill>
+            <a:tailEnd type="triangle"/>
+          </a:ln>
+        </p:spPr>
+        <p:style>
+          <a:lnRef idx="2">
+            <a:schemeClr val="accent1"/>
+          </a:lnRef>
+          <a:fillRef idx="0">
+            <a:schemeClr val="accent1"/>
+          </a:fillRef>
+          <a:effectRef idx="1">
+            <a:schemeClr val="accent1"/>
+          </a:effectRef>
+          <a:fontRef idx="minor">
+            <a:schemeClr val="tx1"/>
+          </a:fontRef>
+        </p:style>
+      </p:cxnSp>
+      <p:cxnSp>
+        <p:nvCxnSpPr>
+          <p:cNvPr id="13" name="Connector 12"/>
+          <p:cNvCxnSpPr/>
+          <p:nvPr/>
+        </p:nvCxnSpPr>
+        <p:spPr>
+          <a:xfrm>
+            <a:off x="8983980" y="2468880"/>
+            <a:ext cx="0" cy="228600"/>
+          </a:xfrm>
+          <a:prstGeom prst="line">
+            <a:avLst/>
+          </a:prstGeom>
+          <a:ln w="28575">
+            <a:solidFill>
+              <a:srgbClr val="000000"/>
+            </a:solidFill>
+            <a:tailEnd type="triangle"/>
+          </a:ln>
+        </p:spPr>
+        <p:style>
+          <a:lnRef idx="2">
+            <a:schemeClr val="accent1"/>
+          </a:lnRef>
+          <a:fillRef idx="0">
+            <a:schemeClr val="accent1"/>
+          </a:fillRef>
+          <a:effectRef idx="1">
+            <a:schemeClr val="accent1"/>
+          </a:effectRef>
+          <a:fontRef idx="minor">
+            <a:schemeClr val="tx1"/>
+          </a:fontRef>
+        </p:style>
+      </p:cxnSp>
+      <p:cxnSp>
+        <p:nvCxnSpPr>
+          <p:cNvPr id="14" name="Connector 13"/>
+          <p:cNvCxnSpPr/>
+          <p:nvPr/>
+        </p:nvCxnSpPr>
+        <p:spPr>
+          <a:xfrm>
+            <a:off x="8983980" y="3154680"/>
+            <a:ext cx="0" cy="182880"/>
+          </a:xfrm>
+          <a:prstGeom prst="line">
+            <a:avLst/>
+          </a:prstGeom>
+          <a:ln w="28575">
+            <a:solidFill>
+              <a:srgbClr val="000000"/>
+            </a:solidFill>
+            <a:tailEnd type="triangle"/>
+          </a:ln>
+        </p:spPr>
+        <p:style>
+          <a:lnRef idx="2">
+            <a:schemeClr val="accent1"/>
+          </a:lnRef>
+          <a:fillRef idx="0">
+            <a:schemeClr val="accent1"/>
+          </a:fillRef>
+          <a:effectRef idx="1">
+            <a:schemeClr val="accent1"/>
+          </a:effectRef>
+          <a:fontRef idx="minor">
+            <a:schemeClr val="tx1"/>
+          </a:fontRef>
+        </p:style>
+      </p:cxnSp>
+      <p:cxnSp>
+        <p:nvCxnSpPr>
+          <p:cNvPr id="15" name="Connector 14"/>
+          <p:cNvCxnSpPr/>
+          <p:nvPr/>
+        </p:nvCxnSpPr>
+        <p:spPr>
+          <a:xfrm>
+            <a:off x="8983980" y="3794760"/>
+            <a:ext cx="0" cy="182879"/>
+          </a:xfrm>
+          <a:prstGeom prst="line">
+            <a:avLst/>
+          </a:prstGeom>
+          <a:ln w="28575">
+            <a:solidFill>
+              <a:srgbClr val="000000"/>
+            </a:solidFill>
+            <a:tailEnd type="triangle"/>
+          </a:ln>
+        </p:spPr>
+        <p:style>
+          <a:lnRef idx="2">
+            <a:schemeClr val="accent1"/>
+          </a:lnRef>
+          <a:fillRef idx="0">
+            <a:schemeClr val="accent1"/>
+          </a:fillRef>
+          <a:effectRef idx="1">
+            <a:schemeClr val="accent1"/>
+          </a:effectRef>
+          <a:fontRef idx="minor">
+            <a:schemeClr val="tx1"/>
+          </a:fontRef>
+        </p:style>
+      </p:cxnSp>
+      <p:cxnSp>
+        <p:nvCxnSpPr>
+          <p:cNvPr id="16" name="Connector 15"/>
+          <p:cNvCxnSpPr/>
+          <p:nvPr/>
+        </p:nvCxnSpPr>
+        <p:spPr>
+          <a:xfrm>
+            <a:off x="8983980" y="4434840"/>
+            <a:ext cx="0" cy="182880"/>
+          </a:xfrm>
+          <a:prstGeom prst="line">
+            <a:avLst/>
+          </a:prstGeom>
+          <a:ln w="28575">
+            <a:solidFill>
+              <a:srgbClr val="000000"/>
+            </a:solidFill>
+            <a:tailEnd type="triangle"/>
+          </a:ln>
+        </p:spPr>
+        <p:style>
+          <a:lnRef idx="2">
+            <a:schemeClr val="accent1"/>
+          </a:lnRef>
+          <a:fillRef idx="0">
+            <a:schemeClr val="accent1"/>
+          </a:fillRef>
+          <a:effectRef idx="1">
+            <a:schemeClr val="accent1"/>
+          </a:effectRef>
+          <a:fontRef idx="minor">
+            <a:schemeClr val="tx1"/>
+          </a:fontRef>
+        </p:style>
+      </p:cxnSp>
+      <p:cxnSp>
+        <p:nvCxnSpPr>
+          <p:cNvPr id="17" name="Connector 16"/>
+          <p:cNvCxnSpPr/>
+          <p:nvPr/>
+        </p:nvCxnSpPr>
+        <p:spPr>
+          <a:xfrm>
+            <a:off x="8983980" y="5074920"/>
+            <a:ext cx="0" cy="182880"/>
+          </a:xfrm>
+          <a:prstGeom prst="line">
+            <a:avLst/>
+          </a:prstGeom>
+          <a:ln w="28575">
+            <a:solidFill>
+              <a:srgbClr val="000000"/>
+            </a:solidFill>
+            <a:tailEnd type="triangle"/>
+          </a:ln>
+        </p:spPr>
+        <p:style>
+          <a:lnRef idx="2">
+            <a:schemeClr val="accent1"/>
+          </a:lnRef>
+          <a:fillRef idx="0">
+            <a:schemeClr val="accent1"/>
+          </a:fillRef>
+          <a:effectRef idx="1">
+            <a:schemeClr val="accent1"/>
+          </a:effectRef>
+          <a:fontRef idx="minor">
+            <a:schemeClr val="tx1"/>
+          </a:fontRef>
+        </p:style>
+      </p:cxnSp>
+      <p:cxnSp>
+        <p:nvCxnSpPr>
+          <p:cNvPr id="18" name="Connector 17"/>
+          <p:cNvCxnSpPr/>
+          <p:nvPr/>
+        </p:nvCxnSpPr>
+        <p:spPr>
+          <a:xfrm>
+            <a:off x="6720840" y="1600200"/>
+            <a:ext cx="1097280" cy="0"/>
+          </a:xfrm>
+          <a:prstGeom prst="line">
+            <a:avLst/>
+          </a:prstGeom>
+          <a:ln w="28575">
+            <a:solidFill>
+              <a:srgbClr val="000000"/>
+            </a:solidFill>
+            <a:tailEnd type="triangle"/>
+          </a:ln>
+        </p:spPr>
+        <p:style>
+          <a:lnRef idx="2">
+            <a:schemeClr val="accent1"/>
+          </a:lnRef>
+          <a:fillRef idx="0">
+            <a:schemeClr val="accent1"/>
+          </a:fillRef>
+          <a:effectRef idx="1">
+            <a:schemeClr val="accent1"/>
+          </a:effectRef>
+          <a:fontRef idx="minor">
+            <a:schemeClr val="tx1"/>
+          </a:fontRef>
+        </p:style>
+      </p:cxnSp>
+      <p:sp>
+        <p:nvSpPr>
+          <p:cNvPr id="19" name="TextBox 18"/>
+          <p:cNvSpPr txBox="1"/>
+          <p:nvPr/>
+        </p:nvSpPr>
+        <p:spPr>
+          <a:xfrm>
+            <a:off x="6172200" y="1645920"/>
+            <a:ext cx="914400" cy="228600"/>
+          </a:xfrm>
+          <a:prstGeom prst="rect">
+            <a:avLst/>
+          </a:prstGeom>
+          <a:noFill/>
+        </p:spPr>
+        <p:txBody>
+          <a:bodyPr wrap="square" lIns="0" tIns="0" rIns="0" bIns="0" anchor="t">
+            <a:spAutoFit/>
+          </a:bodyPr>
+          <a:lstStyle/>
+          <a:p>
+            <a:pPr algn="l"/>
+            <a:r>
+              <a:rPr sz="1100" b="0" i="0">
+                <a:solidFill>
+                  <a:srgbClr val="000000"/>
+                </a:solidFill>
+                <a:latin typeface="Calibri"/>
+              </a:rPr>
+              <a:t>Power up</a:t>
+            </a:r>
+          </a:p>
+        </p:txBody>
+      </p:sp>
+      <p:cxnSp>
+        <p:nvCxnSpPr>
+          <p:cNvPr id="20" name="Connector 19"/>
+          <p:cNvCxnSpPr/>
+          <p:nvPr/>
+        </p:nvCxnSpPr>
+        <p:spPr>
+          <a:xfrm>
+            <a:off x="10149840" y="2359152"/>
+            <a:ext cx="228600" cy="0"/>
+          </a:xfrm>
+          <a:prstGeom prst="line">
+            <a:avLst/>
+          </a:prstGeom>
+          <a:ln w="28575">
+            <a:solidFill>
+              <a:srgbClr val="000000"/>
+            </a:solidFill>
+          </a:ln>
+        </p:spPr>
+        <p:style>
+          <a:lnRef idx="2">
+            <a:schemeClr val="accent1"/>
+          </a:lnRef>
+          <a:fillRef idx="0">
+            <a:schemeClr val="accent1"/>
+          </a:fillRef>
+          <a:effectRef idx="1">
+            <a:schemeClr val="accent1"/>
+          </a:effectRef>
+          <a:fontRef idx="minor">
+            <a:schemeClr val="tx1"/>
+          </a:fontRef>
+        </p:style>
+      </p:cxnSp>
+      <p:cxnSp>
+        <p:nvCxnSpPr>
+          <p:cNvPr id="21" name="Connector 20"/>
+          <p:cNvCxnSpPr/>
+          <p:nvPr/>
+        </p:nvCxnSpPr>
+        <p:spPr>
+          <a:xfrm flipV="1">
+            <a:off x="10378440" y="2121408"/>
+            <a:ext cx="0" cy="237744"/>
+          </a:xfrm>
+          <a:prstGeom prst="line">
+            <a:avLst/>
+          </a:prstGeom>
+          <a:ln w="28575">
+            <a:solidFill>
+              <a:srgbClr val="000000"/>
+            </a:solidFill>
+          </a:ln>
+        </p:spPr>
+        <p:style>
+          <a:lnRef idx="2">
+            <a:schemeClr val="accent1"/>
+          </a:lnRef>
+          <a:fillRef idx="0">
+            <a:schemeClr val="accent1"/>
+          </a:fillRef>
+          <a:effectRef idx="1">
+            <a:schemeClr val="accent1"/>
+          </a:effectRef>
+          <a:fontRef idx="minor">
+            <a:schemeClr val="tx1"/>
+          </a:fontRef>
+        </p:style>
+      </p:cxnSp>
+      <p:cxnSp>
+        <p:nvCxnSpPr>
+          <p:cNvPr id="22" name="Connector 21"/>
+          <p:cNvCxnSpPr/>
+          <p:nvPr/>
+        </p:nvCxnSpPr>
+        <p:spPr>
+          <a:xfrm flipH="1">
+            <a:off x="10149840" y="2121408"/>
+            <a:ext cx="228600" cy="0"/>
+          </a:xfrm>
+          <a:prstGeom prst="line">
+            <a:avLst/>
+          </a:prstGeom>
+          <a:ln w="28575">
+            <a:solidFill>
+              <a:srgbClr val="000000"/>
+            </a:solidFill>
+            <a:tailEnd type="triangle"/>
+          </a:ln>
+        </p:spPr>
+        <p:style>
+          <a:lnRef idx="2">
+            <a:schemeClr val="accent1"/>
+          </a:lnRef>
+          <a:fillRef idx="0">
+            <a:schemeClr val="accent1"/>
+          </a:fillRef>
+          <a:effectRef idx="1">
+            <a:schemeClr val="accent1"/>
+          </a:effectRef>
+          <a:fontRef idx="minor">
+            <a:schemeClr val="tx1"/>
+          </a:fontRef>
+        </p:style>
+      </p:cxnSp>
+      <p:sp>
+        <p:nvSpPr>
+          <p:cNvPr id="23" name="TextBox 22"/>
+          <p:cNvSpPr txBox="1"/>
+          <p:nvPr/>
+        </p:nvSpPr>
+        <p:spPr>
+          <a:xfrm>
+            <a:off x="10442448" y="2130552"/>
+            <a:ext cx="914400" cy="228600"/>
+          </a:xfrm>
+          <a:prstGeom prst="rect">
+            <a:avLst/>
+          </a:prstGeom>
+          <a:noFill/>
+        </p:spPr>
+        <p:txBody>
+          <a:bodyPr wrap="square" lIns="0" tIns="0" rIns="0" bIns="0" anchor="t">
+            <a:spAutoFit/>
+          </a:bodyPr>
+          <a:lstStyle/>
+          <a:p>
+            <a:pPr algn="l"/>
+            <a:r>
+              <a:rPr sz="1000" b="0" i="0">
+                <a:solidFill>
+                  <a:srgbClr val="000000"/>
+                </a:solidFill>
+                <a:latin typeface="Calibri"/>
+              </a:rPr>
+              <a:t>No press</a:t>
+            </a:r>
+          </a:p>
+        </p:txBody>
+      </p:sp>
+      <p:sp>
+        <p:nvSpPr>
+          <p:cNvPr id="24" name="TextBox 23"/>
+          <p:cNvSpPr txBox="1"/>
+          <p:nvPr/>
+        </p:nvSpPr>
+        <p:spPr>
+          <a:xfrm>
+            <a:off x="9075420" y="2468880"/>
+            <a:ext cx="2468880" cy="228600"/>
+          </a:xfrm>
+          <a:prstGeom prst="rect">
+            <a:avLst/>
+          </a:prstGeom>
+          <a:noFill/>
+        </p:spPr>
+        <p:txBody>
+          <a:bodyPr wrap="square" lIns="0" tIns="0" rIns="0" bIns="0" anchor="t">
+            <a:spAutoFit/>
+          </a:bodyPr>
+          <a:lstStyle/>
+          <a:p>
+            <a:pPr algn="l"/>
+            <a:r>
+              <a:rPr sz="900" b="0" i="0">
+                <a:solidFill>
+                  <a:srgbClr val="000000"/>
+                </a:solidFill>
+                <a:latin typeface="Calibri"/>
+              </a:rPr>
+              <a:t>Time &lt; 2s → 2P   Time &gt; 2s → 1P</a:t>
+            </a:r>
+          </a:p>
+        </p:txBody>
+      </p:sp>
+      <p:sp>
+        <p:nvSpPr>
+          <p:cNvPr id="25" name="TextBox 24"/>
+          <p:cNvSpPr txBox="1"/>
+          <p:nvPr/>
+        </p:nvSpPr>
+        <p:spPr>
+          <a:xfrm>
+            <a:off x="9075420" y="5074920"/>
+            <a:ext cx="914400" cy="228600"/>
+          </a:xfrm>
+          <a:prstGeom prst="rect">
+            <a:avLst/>
+          </a:prstGeom>
+          <a:noFill/>
+        </p:spPr>
+        <p:txBody>
+          <a:bodyPr wrap="square" lIns="0" tIns="0" rIns="0" bIns="0" anchor="t">
+            <a:spAutoFit/>
+          </a:bodyPr>
+          <a:lstStyle/>
+          <a:p>
+            <a:pPr algn="l"/>
+            <a:r>
+              <a:rPr sz="1000" b="0" i="0">
+                <a:solidFill>
+                  <a:srgbClr val="000000"/>
+                </a:solidFill>
+                <a:latin typeface="Calibri"/>
+              </a:rPr>
+              <a:t>At end</a:t>
+            </a:r>
+          </a:p>
+        </p:txBody>
+      </p:sp>
+      <p:cxnSp>
+        <p:nvCxnSpPr>
+          <p:cNvPr id="26" name="Connector 25"/>
+          <p:cNvCxnSpPr/>
+          <p:nvPr/>
+        </p:nvCxnSpPr>
+        <p:spPr>
+          <a:xfrm>
+            <a:off x="10149840" y="4846320"/>
+            <a:ext cx="411480" cy="0"/>
+          </a:xfrm>
+          <a:prstGeom prst="line">
+            <a:avLst/>
+          </a:prstGeom>
+          <a:ln w="28575">
+            <a:solidFill>
+              <a:srgbClr val="000000"/>
+            </a:solidFill>
+          </a:ln>
+        </p:spPr>
+        <p:style>
+          <a:lnRef idx="2">
+            <a:schemeClr val="accent1"/>
+          </a:lnRef>
+          <a:fillRef idx="0">
+            <a:schemeClr val="accent1"/>
+          </a:fillRef>
+          <a:effectRef idx="1">
+            <a:schemeClr val="accent1"/>
+          </a:effectRef>
+          <a:fontRef idx="minor">
+            <a:schemeClr val="tx1"/>
+          </a:fontRef>
+        </p:style>
+      </p:cxnSp>
+      <p:cxnSp>
+        <p:nvCxnSpPr>
+          <p:cNvPr id="27" name="Connector 26"/>
+          <p:cNvCxnSpPr/>
+          <p:nvPr/>
+        </p:nvCxnSpPr>
+        <p:spPr>
+          <a:xfrm flipV="1">
+            <a:off x="10561320" y="3566160"/>
+            <a:ext cx="0" cy="1280160"/>
+          </a:xfrm>
+          <a:prstGeom prst="line">
+            <a:avLst/>
+          </a:prstGeom>
+          <a:ln w="28575">
+            <a:solidFill>
+              <a:srgbClr val="000000"/>
+            </a:solidFill>
+          </a:ln>
+        </p:spPr>
+        <p:style>
+          <a:lnRef idx="2">
+            <a:schemeClr val="accent1"/>
+          </a:lnRef>
+          <a:fillRef idx="0">
+            <a:schemeClr val="accent1"/>
+          </a:fillRef>
+          <a:effectRef idx="1">
+            <a:schemeClr val="accent1"/>
+          </a:effectRef>
+          <a:fontRef idx="minor">
+            <a:schemeClr val="tx1"/>
+          </a:fontRef>
+        </p:style>
+      </p:cxnSp>
+      <p:cxnSp>
+        <p:nvCxnSpPr>
+          <p:cNvPr id="28" name="Connector 27"/>
+          <p:cNvCxnSpPr/>
+          <p:nvPr/>
+        </p:nvCxnSpPr>
+        <p:spPr>
+          <a:xfrm flipH="1">
+            <a:off x="10149840" y="3566160"/>
+            <a:ext cx="411480" cy="0"/>
+          </a:xfrm>
+          <a:prstGeom prst="line">
+            <a:avLst/>
+          </a:prstGeom>
+          <a:ln w="28575">
+            <a:solidFill>
+              <a:srgbClr val="000000"/>
+            </a:solidFill>
+            <a:tailEnd type="triangle"/>
+          </a:ln>
+        </p:spPr>
+        <p:style>
+          <a:lnRef idx="2">
+            <a:schemeClr val="accent1"/>
+          </a:lnRef>
+          <a:fillRef idx="0">
+            <a:schemeClr val="accent1"/>
+          </a:fillRef>
+          <a:effectRef idx="1">
+            <a:schemeClr val="accent1"/>
+          </a:effectRef>
+          <a:fontRef idx="minor">
+            <a:schemeClr val="tx1"/>
+          </a:fontRef>
+        </p:style>
+      </p:cxnSp>
+      <p:sp>
+        <p:nvSpPr>
+          <p:cNvPr id="29" name="TextBox 28"/>
+          <p:cNvSpPr txBox="1"/>
+          <p:nvPr/>
+        </p:nvSpPr>
+        <p:spPr>
+          <a:xfrm>
+            <a:off x="10625328" y="3977639"/>
+            <a:ext cx="822960" cy="457200"/>
+          </a:xfrm>
+          <a:prstGeom prst="rect">
+            <a:avLst/>
+          </a:prstGeom>
+          <a:noFill/>
+        </p:spPr>
+        <p:txBody>
+          <a:bodyPr wrap="square" lIns="0" tIns="0" rIns="0" bIns="0" anchor="t">
+            <a:spAutoFit/>
+          </a:bodyPr>
+          <a:lstStyle/>
+          <a:p>
+            <a:pPr algn="l"/>
+            <a:r>
+              <a:rPr sz="1000" b="0" i="0">
+                <a:solidFill>
+                  <a:srgbClr val="000000"/>
+                </a:solidFill>
+                <a:latin typeface="Calibri"/>
+              </a:rPr>
+              <a:t>Not at</a:t>
+            </a:r>
+          </a:p>
+          <a:p>
+            <a:pPr algn="l"/>
+            <a:r>
+              <a:rPr sz="1000" b="0" i="0">
+                <a:solidFill>
+                  <a:srgbClr val="000000"/>
+                </a:solidFill>
+                <a:latin typeface="Calibri"/>
+              </a:rPr>
+              <a:t>end</a:t>
+            </a:r>
+          </a:p>
+        </p:txBody>
+      </p:sp>
+      <p:cxnSp>
+        <p:nvCxnSpPr>
+          <p:cNvPr id="30" name="Connector 29"/>
+          <p:cNvCxnSpPr/>
+          <p:nvPr/>
+        </p:nvCxnSpPr>
+        <p:spPr>
+          <a:xfrm flipH="1">
+            <a:off x="7452360" y="5486400"/>
+            <a:ext cx="365760" cy="0"/>
+          </a:xfrm>
+          <a:prstGeom prst="line">
+            <a:avLst/>
+          </a:prstGeom>
+          <a:ln w="28575">
+            <a:solidFill>
+              <a:srgbClr val="000000"/>
+            </a:solidFill>
+          </a:ln>
+        </p:spPr>
+        <p:style>
+          <a:lnRef idx="2">
+            <a:schemeClr val="accent1"/>
+          </a:lnRef>
+          <a:fillRef idx="0">
+            <a:schemeClr val="accent1"/>
+          </a:fillRef>
+          <a:effectRef idx="1">
+            <a:schemeClr val="accent1"/>
+          </a:effectRef>
+          <a:fontRef idx="minor">
+            <a:schemeClr val="tx1"/>
+          </a:fontRef>
+        </p:style>
+      </p:cxnSp>
+      <p:cxnSp>
+        <p:nvCxnSpPr>
+          <p:cNvPr id="31" name="Connector 30"/>
+          <p:cNvCxnSpPr/>
+          <p:nvPr/>
+        </p:nvCxnSpPr>
+        <p:spPr>
+          <a:xfrm flipV="1">
+            <a:off x="7452360" y="2240280"/>
+            <a:ext cx="0" cy="3246120"/>
+          </a:xfrm>
+          <a:prstGeom prst="line">
+            <a:avLst/>
+          </a:prstGeom>
+          <a:ln w="28575">
+            <a:solidFill>
+              <a:srgbClr val="000000"/>
+            </a:solidFill>
+          </a:ln>
+        </p:spPr>
+        <p:style>
+          <a:lnRef idx="2">
+            <a:schemeClr val="accent1"/>
+          </a:lnRef>
+          <a:fillRef idx="0">
+            <a:schemeClr val="accent1"/>
+          </a:fillRef>
+          <a:effectRef idx="1">
+            <a:schemeClr val="accent1"/>
+          </a:effectRef>
+          <a:fontRef idx="minor">
+            <a:schemeClr val="tx1"/>
+          </a:fontRef>
+        </p:style>
+      </p:cxnSp>
+      <p:cxnSp>
+        <p:nvCxnSpPr>
+          <p:cNvPr id="32" name="Connector 31"/>
+          <p:cNvCxnSpPr/>
+          <p:nvPr/>
+        </p:nvCxnSpPr>
+        <p:spPr>
+          <a:xfrm>
+            <a:off x="7452360" y="2240280"/>
+            <a:ext cx="365760" cy="0"/>
+          </a:xfrm>
+          <a:prstGeom prst="line">
+            <a:avLst/>
+          </a:prstGeom>
+          <a:ln w="28575">
+            <a:solidFill>
+              <a:srgbClr val="000000"/>
+            </a:solidFill>
+            <a:tailEnd type="triangle"/>
+          </a:ln>
+        </p:spPr>
+        <p:style>
+          <a:lnRef idx="2">
+            <a:schemeClr val="accent1"/>
+          </a:lnRef>
+          <a:fillRef idx="0">
+            <a:schemeClr val="accent1"/>
+          </a:fillRef>
+          <a:effectRef idx="1">
+            <a:schemeClr val="accent1"/>
+          </a:effectRef>
+          <a:fontRef idx="minor">
+            <a:schemeClr val="tx1"/>
+          </a:fontRef>
+        </p:style>
+      </p:cxnSp>
+      <p:sp>
+        <p:nvSpPr>
+          <p:cNvPr id="33" name="TextBox 32"/>
+          <p:cNvSpPr txBox="1"/>
+          <p:nvPr/>
+        </p:nvSpPr>
+        <p:spPr>
+          <a:xfrm>
+            <a:off x="6172200" y="5349240"/>
+            <a:ext cx="1234440" cy="411480"/>
+          </a:xfrm>
+          <a:prstGeom prst="rect">
+            <a:avLst/>
+          </a:prstGeom>
+          <a:noFill/>
+        </p:spPr>
+        <p:txBody>
+          <a:bodyPr wrap="square" lIns="0" tIns="0" rIns="0" bIns="0" anchor="t">
+            <a:spAutoFit/>
+          </a:bodyPr>
+          <a:lstStyle/>
+          <a:p>
+            <a:pPr algn="l"/>
+            <a:r>
+              <a:rPr sz="900" b="0" i="0">
+                <a:solidFill>
+                  <a:srgbClr val="000000"/>
+                </a:solidFill>
+                <a:latin typeface="Calibri"/>
+              </a:rPr>
+              <a:t>Ctrl-C (any state)</a:t>
+            </a:r>
+          </a:p>
+          <a:p>
+            <a:pPr algn="l"/>
+            <a:r>
+              <a:rPr sz="900" b="0" i="0">
+                <a:solidFill>
+                  <a:srgbClr val="000000"/>
+                </a:solidFill>
+                <a:latin typeface="Calibri"/>
+              </a:rPr>
+              <a:t>→ cleanup()</a:t>
+            </a:r>
+          </a:p>
+        </p:txBody>
+      </p:sp>
+      <p:sp>
+        <p:nvSpPr>
+          <p:cNvPr id="34" name="Rounded Rectangle 33"/>
+          <p:cNvSpPr/>
+          <p:nvPr/>
+        </p:nvSpPr>
+        <p:spPr>
+          <a:xfrm>
+            <a:off x="548640" y="1188720"/>
+            <a:ext cx="5120640" cy="3291840"/>
+          </a:xfrm>
+          <a:prstGeom prst="roundRect">
+            <a:avLst>
+              <a:gd name="adj" fmla="val 8000"/>
+            </a:avLst>
+          </a:prstGeom>
+          <a:noFill/>
+          <a:ln w="25400">
+            <a:solidFill>
+              <a:srgbClr val="000000"/>
+            </a:solidFill>
+            <a:prstDash val="lgDash"/>
+          </a:ln>
+          <a:effectLst/>
+        </p:spPr>
+        <p:style>
+          <a:lnRef idx="1">
+            <a:schemeClr val="accent1"/>
+          </a:lnRef>
+          <a:fillRef idx="3">
+            <a:schemeClr val="accent1"/>
+          </a:fillRef>
+          <a:effectRef idx="2">
+            <a:schemeClr val="accent1"/>
+          </a:effectRef>
+          <a:fontRef idx="minor">
+            <a:schemeClr val="lt1"/>
+          </a:fontRef>
+        </p:style>
+        <p:txBody>
+          <a:bodyPr rtlCol="0" anchor="ctr"/>
+          <a:lstStyle/>
+          <a:p>
+            <a:pPr algn="ctr"/>
+            <a:endParaRPr/>
+          </a:p>
+        </p:txBody>
+      </p:sp>
+      <p:sp>
+        <p:nvSpPr>
+          <p:cNvPr id="35" name="TextBox 34"/>
+          <p:cNvSpPr txBox="1"/>
+          <p:nvPr/>
+        </p:nvSpPr>
+        <p:spPr>
+          <a:xfrm>
+            <a:off x="777240" y="1261872"/>
+            <a:ext cx="3657600" cy="228600"/>
+          </a:xfrm>
+          <a:prstGeom prst="rect">
+            <a:avLst/>
+          </a:prstGeom>
+          <a:noFill/>
+        </p:spPr>
+        <p:txBody>
+          <a:bodyPr wrap="square" lIns="0" tIns="0" rIns="0" bIns="0" anchor="t">
+            <a:spAutoFit/>
+          </a:bodyPr>
+          <a:lstStyle/>
+          <a:p>
+            <a:pPr algn="l"/>
+            <a:r>
+              <a:rPr sz="1300" b="1" i="0">
+                <a:solidFill>
+                  <a:srgbClr val="000000"/>
+                </a:solidFill>
+                <a:latin typeface="Calibri"/>
+              </a:rPr>
+              <a:t>Play Round</a:t>
+            </a:r>
+          </a:p>
+        </p:txBody>
+      </p:sp>
+      <p:sp>
+        <p:nvSpPr>
+          <p:cNvPr id="36" name="Rounded Rectangle 35"/>
+          <p:cNvSpPr/>
+          <p:nvPr/>
+        </p:nvSpPr>
+        <p:spPr>
+          <a:xfrm>
+            <a:off x="914400" y="1645920"/>
+            <a:ext cx="2331720" cy="457200"/>
+          </a:xfrm>
+          <a:prstGeom prst="roundRect">
+            <a:avLst>
+              <a:gd name="adj" fmla="val 10000"/>
+            </a:avLst>
+          </a:prstGeom>
+          <a:solidFill>
+            <a:srgbClr val="4A8FBF"/>
+          </a:solidFill>
+          <a:ln w="12700">
+            <a:solidFill>
+              <a:srgbClr val="357098"/>
+            </a:solidFill>
+          </a:ln>
+          <a:effectLst/>
+        </p:spPr>
+        <p:style>
+          <a:lnRef idx="1">
+            <a:schemeClr val="accent1"/>
+          </a:lnRef>
+          <a:fillRef idx="3">
+            <a:schemeClr val="accent1"/>
+          </a:fillRef>
+          <a:effectRef idx="2">
+            <a:schemeClr val="accent1"/>
+          </a:effectRef>
+          <a:fontRef idx="minor">
+            <a:schemeClr val="lt1"/>
+          </a:fontRef>
+        </p:style>
+        <p:txBody>
+          <a:bodyPr wrap="square" lIns="36576" tIns="27432" rIns="36576" bIns="27432" rtlCol="0" anchor="ctr"/>
+          <a:lstStyle/>
+          <a:p>
+            <a:pPr algn="ctr"/>
+            <a:r>
+              <a:rPr sz="1200" b="0" i="0">
+                <a:solidFill>
+                  <a:srgbClr val="FFFFFF"/>
+                </a:solidFill>
+                <a:latin typeface="Calibri"/>
+              </a:rPr>
+              <a:t>Ready</a:t>
+            </a:r>
+          </a:p>
+          <a:p>
+            <a:pPr algn="ctr"/>
+            <a:r>
+              <a:rPr sz="800" b="0" i="1">
+                <a:solidFill>
+                  <a:srgbClr val="E3F0F8"/>
+                </a:solidFill>
+                <a:latin typeface="Calibri"/>
+              </a:rPr>
+              <a:t>random 1–4 s wait   p1/p2.arm()</a:t>
+            </a:r>
+          </a:p>
+        </p:txBody>
+      </p:sp>
+      <p:sp>
+        <p:nvSpPr>
+          <p:cNvPr id="37" name="Rounded Rectangle 36"/>
+          <p:cNvSpPr/>
+          <p:nvPr/>
+        </p:nvSpPr>
+        <p:spPr>
+          <a:xfrm>
+            <a:off x="914400" y="2395728"/>
+            <a:ext cx="2331720" cy="457200"/>
+          </a:xfrm>
+          <a:prstGeom prst="roundRect">
+            <a:avLst>
+              <a:gd name="adj" fmla="val 10000"/>
+            </a:avLst>
+          </a:prstGeom>
+          <a:solidFill>
+            <a:srgbClr val="4A8FBF"/>
+          </a:solidFill>
+          <a:ln w="12700">
+            <a:solidFill>
+              <a:srgbClr val="357098"/>
+            </a:solidFill>
+          </a:ln>
+          <a:effectLst/>
+        </p:spPr>
+        <p:style>
+          <a:lnRef idx="1">
+            <a:schemeClr val="accent1"/>
+          </a:lnRef>
+          <a:fillRef idx="3">
+            <a:schemeClr val="accent1"/>
+          </a:fillRef>
+          <a:effectRef idx="2">
+            <a:schemeClr val="accent1"/>
+          </a:effectRef>
+          <a:fontRef idx="minor">
+            <a:schemeClr val="lt1"/>
+          </a:fontRef>
+        </p:style>
+        <p:txBody>
+          <a:bodyPr wrap="square" lIns="36576" tIns="27432" rIns="36576" bIns="27432" rtlCol="0" anchor="ctr"/>
+          <a:lstStyle/>
+          <a:p>
+            <a:pPr algn="ctr"/>
+            <a:r>
+              <a:rPr sz="1200" b="0" i="0">
+                <a:solidFill>
+                  <a:srgbClr val="FFFFFF"/>
+                </a:solidFill>
+                <a:latin typeface="Calibri"/>
+              </a:rPr>
+              <a:t>GO!</a:t>
+            </a:r>
+          </a:p>
+          <a:p>
+            <a:pPr algn="ctr"/>
+            <a:r>
+              <a:rPr sz="800" b="0" i="1">
+                <a:solidFill>
+                  <a:srgbClr val="E3F0F8"/>
+                </a:solidFill>
+                <a:latin typeface="Calibri"/>
+              </a:rPr>
+              <a:t>buzzer.play()  rope.flash()</a:t>
+            </a:r>
+          </a:p>
+        </p:txBody>
+      </p:sp>
+      <p:sp>
+        <p:nvSpPr>
+          <p:cNvPr id="38" name="Rounded Rectangle 37"/>
+          <p:cNvSpPr/>
+          <p:nvPr/>
+        </p:nvSpPr>
+        <p:spPr>
+          <a:xfrm>
+            <a:off x="914400" y="3127248"/>
+            <a:ext cx="2331720" cy="457200"/>
+          </a:xfrm>
+          <a:prstGeom prst="roundRect">
+            <a:avLst>
+              <a:gd name="adj" fmla="val 10000"/>
+            </a:avLst>
+          </a:prstGeom>
+          <a:solidFill>
+            <a:srgbClr val="4A8FBF"/>
+          </a:solidFill>
+          <a:ln w="12700">
+            <a:solidFill>
+              <a:srgbClr val="357098"/>
+            </a:solidFill>
+          </a:ln>
+          <a:effectLst/>
+        </p:spPr>
+        <p:style>
+          <a:lnRef idx="1">
+            <a:schemeClr val="accent1"/>
+          </a:lnRef>
+          <a:fillRef idx="3">
+            <a:schemeClr val="accent1"/>
+          </a:fillRef>
+          <a:effectRef idx="2">
+            <a:schemeClr val="accent1"/>
+          </a:effectRef>
+          <a:fontRef idx="minor">
+            <a:schemeClr val="lt1"/>
+          </a:fontRef>
+        </p:style>
+        <p:txBody>
+          <a:bodyPr wrap="square" lIns="36576" tIns="27432" rIns="36576" bIns="27432" rtlCol="0" anchor="ctr"/>
+          <a:lstStyle/>
+          <a:p>
+            <a:pPr algn="ctr"/>
+            <a:r>
+              <a:rPr sz="1200" b="0" i="0">
+                <a:solidFill>
+                  <a:srgbClr val="FFFFFF"/>
+                </a:solidFill>
+                <a:latin typeface="Calibri"/>
+              </a:rPr>
+              <a:t>Wait for Press</a:t>
+            </a:r>
+          </a:p>
+          <a:p>
+            <a:pPr algn="ctr"/>
+            <a:r>
+              <a:rPr sz="800" b="0" i="1">
+                <a:solidFill>
+                  <a:srgbClr val="E3F0F8"/>
+                </a:solidFill>
+                <a:latin typeface="Calibri"/>
+              </a:rPr>
+              <a:t>p1/p2.was_pressed()</a:t>
+            </a:r>
+          </a:p>
+        </p:txBody>
+      </p:sp>
+      <p:sp>
+        <p:nvSpPr>
+          <p:cNvPr id="39" name="Rounded Rectangle 38"/>
+          <p:cNvSpPr/>
+          <p:nvPr/>
+        </p:nvSpPr>
+        <p:spPr>
+          <a:xfrm>
+            <a:off x="914400" y="3840480"/>
+            <a:ext cx="2331720" cy="457200"/>
+          </a:xfrm>
+          <a:prstGeom prst="roundRect">
+            <a:avLst>
+              <a:gd name="adj" fmla="val 10000"/>
+            </a:avLst>
+          </a:prstGeom>
+          <a:solidFill>
+            <a:srgbClr val="4A8FBF"/>
+          </a:solidFill>
+          <a:ln w="12700">
+            <a:solidFill>
+              <a:srgbClr val="357098"/>
+            </a:solidFill>
+          </a:ln>
+          <a:effectLst/>
+        </p:spPr>
+        <p:style>
+          <a:lnRef idx="1">
+            <a:schemeClr val="accent1"/>
+          </a:lnRef>
+          <a:fillRef idx="3">
+            <a:schemeClr val="accent1"/>
+          </a:fillRef>
+          <a:effectRef idx="2">
+            <a:schemeClr val="accent1"/>
+          </a:effectRef>
+          <a:fontRef idx="minor">
+            <a:schemeClr val="lt1"/>
+          </a:fontRef>
+        </p:style>
+        <p:txBody>
+          <a:bodyPr wrap="square" lIns="36576" tIns="27432" rIns="36576" bIns="27432" rtlCol="0" anchor="ctr"/>
+          <a:lstStyle/>
+          <a:p>
+            <a:pPr algn="ctr"/>
+            <a:r>
+              <a:rPr sz="1200" b="0" i="0">
+                <a:solidFill>
+                  <a:srgbClr val="FFFFFF"/>
+                </a:solidFill>
+                <a:latin typeface="Calibri"/>
+              </a:rPr>
+              <a:t>Pick Winner</a:t>
+            </a:r>
+          </a:p>
+          <a:p>
+            <a:pPr algn="ctr"/>
+            <a:r>
+              <a:rPr sz="800" b="0" i="1">
+                <a:solidFill>
+                  <a:srgbClr val="E3F0F8"/>
+                </a:solidFill>
+                <a:latin typeface="Calibri"/>
+              </a:rPr>
+              <a:t>get_press_time()  cpu_reaction_ms()</a:t>
+            </a:r>
+          </a:p>
+        </p:txBody>
+      </p:sp>
+      <p:cxnSp>
+        <p:nvCxnSpPr>
+          <p:cNvPr id="40" name="Connector 39"/>
+          <p:cNvCxnSpPr/>
+          <p:nvPr/>
+        </p:nvCxnSpPr>
+        <p:spPr>
+          <a:xfrm>
+            <a:off x="2080260" y="2103120"/>
+            <a:ext cx="0" cy="292608"/>
+          </a:xfrm>
+          <a:prstGeom prst="line">
+            <a:avLst/>
+          </a:prstGeom>
+          <a:ln w="28575">
+            <a:solidFill>
+              <a:srgbClr val="000000"/>
+            </a:solidFill>
+            <a:tailEnd type="triangle"/>
+          </a:ln>
+        </p:spPr>
+        <p:style>
+          <a:lnRef idx="2">
+            <a:schemeClr val="accent1"/>
+          </a:lnRef>
+          <a:fillRef idx="0">
+            <a:schemeClr val="accent1"/>
+          </a:fillRef>
+          <a:effectRef idx="1">
+            <a:schemeClr val="accent1"/>
+          </a:effectRef>
+          <a:fontRef idx="minor">
+            <a:schemeClr val="tx1"/>
+          </a:fontRef>
+        </p:style>
+      </p:cxnSp>
+      <p:sp>
+        <p:nvSpPr>
+          <p:cNvPr id="41" name="TextBox 40"/>
+          <p:cNvSpPr txBox="1"/>
+          <p:nvPr/>
+        </p:nvSpPr>
+        <p:spPr>
+          <a:xfrm>
+            <a:off x="2171700" y="2121408"/>
+            <a:ext cx="1097280" cy="228600"/>
+          </a:xfrm>
+          <a:prstGeom prst="rect">
+            <a:avLst/>
+          </a:prstGeom>
+          <a:noFill/>
+        </p:spPr>
+        <p:txBody>
+          <a:bodyPr wrap="square" lIns="0" tIns="0" rIns="0" bIns="0" anchor="t">
+            <a:spAutoFit/>
+          </a:bodyPr>
+          <a:lstStyle/>
+          <a:p>
+            <a:pPr algn="l"/>
+            <a:r>
+              <a:rPr sz="1000" b="0" i="0">
+                <a:solidFill>
+                  <a:srgbClr val="000000"/>
+                </a:solidFill>
+                <a:latin typeface="Calibri"/>
+              </a:rPr>
+              <a:t>Wait over</a:t>
+            </a:r>
+          </a:p>
+        </p:txBody>
+      </p:sp>
+      <p:cxnSp>
+        <p:nvCxnSpPr>
+          <p:cNvPr id="42" name="Connector 41"/>
+          <p:cNvCxnSpPr/>
+          <p:nvPr/>
+        </p:nvCxnSpPr>
+        <p:spPr>
+          <a:xfrm>
+            <a:off x="2080260" y="2852928"/>
+            <a:ext cx="0" cy="274320"/>
+          </a:xfrm>
+          <a:prstGeom prst="line">
+            <a:avLst/>
+          </a:prstGeom>
+          <a:ln w="28575">
+            <a:solidFill>
+              <a:srgbClr val="000000"/>
+            </a:solidFill>
+            <a:tailEnd type="triangle"/>
+          </a:ln>
+        </p:spPr>
+        <p:style>
+          <a:lnRef idx="2">
+            <a:schemeClr val="accent1"/>
+          </a:lnRef>
+          <a:fillRef idx="0">
+            <a:schemeClr val="accent1"/>
+          </a:fillRef>
+          <a:effectRef idx="1">
+            <a:schemeClr val="accent1"/>
+          </a:effectRef>
+          <a:fontRef idx="minor">
+            <a:schemeClr val="tx1"/>
+          </a:fontRef>
+        </p:style>
+      </p:cxnSp>
+      <p:cxnSp>
+        <p:nvCxnSpPr>
+          <p:cNvPr id="43" name="Connector 42"/>
+          <p:cNvCxnSpPr/>
+          <p:nvPr/>
+        </p:nvCxnSpPr>
+        <p:spPr>
+          <a:xfrm>
+            <a:off x="2080260" y="3584448"/>
+            <a:ext cx="0" cy="256032"/>
+          </a:xfrm>
+          <a:prstGeom prst="line">
+            <a:avLst/>
+          </a:prstGeom>
+          <a:ln w="28575">
+            <a:solidFill>
+              <a:srgbClr val="000000"/>
+            </a:solidFill>
+            <a:tailEnd type="triangle"/>
+          </a:ln>
+        </p:spPr>
+        <p:style>
+          <a:lnRef idx="2">
+            <a:schemeClr val="accent1"/>
+          </a:lnRef>
+          <a:fillRef idx="0">
+            <a:schemeClr val="accent1"/>
+          </a:fillRef>
+          <a:effectRef idx="1">
+            <a:schemeClr val="accent1"/>
+          </a:effectRef>
+          <a:fontRef idx="minor">
+            <a:schemeClr val="tx1"/>
+          </a:fontRef>
+        </p:style>
+      </p:cxnSp>
+      <p:sp>
+        <p:nvSpPr>
+          <p:cNvPr id="44" name="TextBox 43"/>
+          <p:cNvSpPr txBox="1"/>
+          <p:nvPr/>
+        </p:nvSpPr>
+        <p:spPr>
+          <a:xfrm>
+            <a:off x="2171700" y="3602736"/>
+            <a:ext cx="1280160" cy="228600"/>
+          </a:xfrm>
+          <a:prstGeom prst="rect">
+            <a:avLst/>
+          </a:prstGeom>
+          <a:noFill/>
+        </p:spPr>
+        <p:txBody>
+          <a:bodyPr wrap="square" lIns="0" tIns="0" rIns="0" bIns="0" anchor="t">
+            <a:spAutoFit/>
+          </a:bodyPr>
+          <a:lstStyle/>
+          <a:p>
+            <a:pPr algn="l"/>
+            <a:r>
+              <a:rPr sz="1000" b="0" i="0">
+                <a:solidFill>
+                  <a:srgbClr val="000000"/>
+                </a:solidFill>
+                <a:latin typeface="Calibri"/>
+              </a:rPr>
+              <a:t>Press (or CPU)</a:t>
+            </a:r>
+          </a:p>
+        </p:txBody>
+      </p:sp>
+      <p:cxnSp>
+        <p:nvCxnSpPr>
+          <p:cNvPr id="45" name="Connector 44"/>
+          <p:cNvCxnSpPr/>
+          <p:nvPr/>
+        </p:nvCxnSpPr>
+        <p:spPr>
+          <a:xfrm>
+            <a:off x="3246120" y="3474720"/>
+            <a:ext cx="228600" cy="0"/>
+          </a:xfrm>
+          <a:prstGeom prst="line">
+            <a:avLst/>
+          </a:prstGeom>
+          <a:ln w="28575">
+            <a:solidFill>
+              <a:srgbClr val="000000"/>
+            </a:solidFill>
+          </a:ln>
+        </p:spPr>
+        <p:style>
+          <a:lnRef idx="2">
+            <a:schemeClr val="accent1"/>
+          </a:lnRef>
+          <a:fillRef idx="0">
+            <a:schemeClr val="accent1"/>
+          </a:fillRef>
+          <a:effectRef idx="1">
+            <a:schemeClr val="accent1"/>
+          </a:effectRef>
+          <a:fontRef idx="minor">
+            <a:schemeClr val="tx1"/>
+          </a:fontRef>
+        </p:style>
+      </p:cxnSp>
+      <p:cxnSp>
+        <p:nvCxnSpPr>
+          <p:cNvPr id="46" name="Connector 45"/>
+          <p:cNvCxnSpPr/>
+          <p:nvPr/>
+        </p:nvCxnSpPr>
+        <p:spPr>
+          <a:xfrm flipV="1">
+            <a:off x="3474720" y="3236976"/>
+            <a:ext cx="0" cy="237744"/>
+          </a:xfrm>
+          <a:prstGeom prst="line">
+            <a:avLst/>
+          </a:prstGeom>
+          <a:ln w="28575">
+            <a:solidFill>
+              <a:srgbClr val="000000"/>
+            </a:solidFill>
+          </a:ln>
+        </p:spPr>
+        <p:style>
+          <a:lnRef idx="2">
+            <a:schemeClr val="accent1"/>
+          </a:lnRef>
+          <a:fillRef idx="0">
+            <a:schemeClr val="accent1"/>
+          </a:fillRef>
+          <a:effectRef idx="1">
+            <a:schemeClr val="accent1"/>
+          </a:effectRef>
+          <a:fontRef idx="minor">
+            <a:schemeClr val="tx1"/>
+          </a:fontRef>
+        </p:style>
+      </p:cxnSp>
+      <p:cxnSp>
+        <p:nvCxnSpPr>
+          <p:cNvPr id="47" name="Connector 46"/>
+          <p:cNvCxnSpPr/>
+          <p:nvPr/>
+        </p:nvCxnSpPr>
+        <p:spPr>
+          <a:xfrm flipH="1">
+            <a:off x="3246120" y="3236976"/>
+            <a:ext cx="228600" cy="0"/>
+          </a:xfrm>
+          <a:prstGeom prst="line">
+            <a:avLst/>
+          </a:prstGeom>
+          <a:ln w="28575">
+            <a:solidFill>
+              <a:srgbClr val="000000"/>
+            </a:solidFill>
+            <a:tailEnd type="triangle"/>
+          </a:ln>
+        </p:spPr>
+        <p:style>
+          <a:lnRef idx="2">
+            <a:schemeClr val="accent1"/>
+          </a:lnRef>
+          <a:fillRef idx="0">
+            <a:schemeClr val="accent1"/>
+          </a:fillRef>
+          <a:effectRef idx="1">
+            <a:schemeClr val="accent1"/>
+          </a:effectRef>
+          <a:fontRef idx="minor">
+            <a:schemeClr val="tx1"/>
+          </a:fontRef>
+        </p:style>
+      </p:cxnSp>
+      <p:sp>
+        <p:nvSpPr>
+          <p:cNvPr id="48" name="TextBox 47"/>
+          <p:cNvSpPr txBox="1"/>
+          <p:nvPr/>
+        </p:nvSpPr>
+        <p:spPr>
+          <a:xfrm>
+            <a:off x="3538727" y="3246120"/>
+            <a:ext cx="914400" cy="228600"/>
+          </a:xfrm>
+          <a:prstGeom prst="rect">
+            <a:avLst/>
+          </a:prstGeom>
+          <a:noFill/>
+        </p:spPr>
+        <p:txBody>
+          <a:bodyPr wrap="square" lIns="0" tIns="0" rIns="0" bIns="0" anchor="t">
+            <a:spAutoFit/>
+          </a:bodyPr>
+          <a:lstStyle/>
+          <a:p>
+            <a:pPr algn="l"/>
+            <a:r>
+              <a:rPr sz="1000" b="0" i="0">
+                <a:solidFill>
+                  <a:srgbClr val="000000"/>
+                </a:solidFill>
+                <a:latin typeface="Calibri"/>
+              </a:rPr>
+              <a:t>No press</a:t>
+            </a:r>
+          </a:p>
+        </p:txBody>
+      </p:sp>
+      <p:sp>
+        <p:nvSpPr>
+          <p:cNvPr id="49" name="Rounded Rectangle 48"/>
+          <p:cNvSpPr/>
+          <p:nvPr/>
+        </p:nvSpPr>
+        <p:spPr>
+          <a:xfrm>
+            <a:off x="3886200" y="1645920"/>
+            <a:ext cx="1600200" cy="566928"/>
+          </a:xfrm>
+          <a:prstGeom prst="roundRect">
+            <a:avLst>
+              <a:gd name="adj" fmla="val 10000"/>
+            </a:avLst>
+          </a:prstGeom>
+          <a:solidFill>
+            <a:srgbClr val="4A8FBF"/>
+          </a:solidFill>
+          <a:ln w="12700">
+            <a:solidFill>
+              <a:srgbClr val="357098"/>
+            </a:solidFill>
+          </a:ln>
+          <a:effectLst/>
+        </p:spPr>
+        <p:style>
+          <a:lnRef idx="1">
+            <a:schemeClr val="accent1"/>
+          </a:lnRef>
+          <a:fillRef idx="3">
+            <a:schemeClr val="accent1"/>
+          </a:fillRef>
+          <a:effectRef idx="2">
+            <a:schemeClr val="accent1"/>
+          </a:effectRef>
+          <a:fontRef idx="minor">
+            <a:schemeClr val="lt1"/>
+          </a:fontRef>
+        </p:style>
+        <p:txBody>
+          <a:bodyPr wrap="square" lIns="36576" tIns="27432" rIns="36576" bIns="27432" rtlCol="0" anchor="ctr"/>
+          <a:lstStyle/>
+          <a:p>
+            <a:pPr algn="ctr"/>
+            <a:r>
+              <a:rPr sz="1200" b="0" i="0">
+                <a:solidFill>
+                  <a:srgbClr val="FFFFFF"/>
+                </a:solidFill>
+                <a:latin typeface="Calibri"/>
+              </a:rPr>
+              <a:t>False Start</a:t>
+            </a:r>
+          </a:p>
+          <a:p>
+            <a:pPr algn="ctr"/>
+            <a:r>
+              <a:rPr sz="800" b="0" i="1">
+                <a:solidFill>
+                  <a:srgbClr val="E3F0F8"/>
+                </a:solidFill>
+                <a:latin typeface="Calibri"/>
+              </a:rPr>
+              <a:t>rope moves toward</a:t>
+            </a:r>
+          </a:p>
+          <a:p>
+            <a:pPr algn="ctr"/>
+            <a:r>
+              <a:rPr sz="800" b="0" i="1">
+                <a:solidFill>
+                  <a:srgbClr val="E3F0F8"/>
+                </a:solidFill>
+                <a:latin typeface="Calibri"/>
+              </a:rPr>
+              <a:t>other player</a:t>
+            </a:r>
+          </a:p>
+        </p:txBody>
+      </p:sp>
+      <p:cxnSp>
+        <p:nvCxnSpPr>
+          <p:cNvPr id="50" name="Connector 49"/>
+          <p:cNvCxnSpPr/>
+          <p:nvPr/>
+        </p:nvCxnSpPr>
+        <p:spPr>
+          <a:xfrm>
+            <a:off x="3246120" y="1783080"/>
+            <a:ext cx="640080" cy="0"/>
+          </a:xfrm>
+          <a:prstGeom prst="line">
+            <a:avLst/>
+          </a:prstGeom>
+          <a:ln w="28575">
+            <a:solidFill>
+              <a:srgbClr val="000000"/>
+            </a:solidFill>
+            <a:tailEnd type="triangle"/>
+          </a:ln>
+        </p:spPr>
+        <p:style>
+          <a:lnRef idx="2">
+            <a:schemeClr val="accent1"/>
+          </a:lnRef>
+          <a:fillRef idx="0">
+            <a:schemeClr val="accent1"/>
+          </a:fillRef>
+          <a:effectRef idx="1">
+            <a:schemeClr val="accent1"/>
+          </a:effectRef>
+          <a:fontRef idx="minor">
+            <a:schemeClr val="tx1"/>
+          </a:fontRef>
+        </p:style>
+      </p:cxnSp>
+      <p:sp>
+        <p:nvSpPr>
+          <p:cNvPr id="51" name="TextBox 50"/>
+          <p:cNvSpPr txBox="1"/>
+          <p:nvPr/>
+        </p:nvSpPr>
+        <p:spPr>
+          <a:xfrm>
+            <a:off x="3337560" y="1536192"/>
+            <a:ext cx="1097280" cy="228600"/>
+          </a:xfrm>
+          <a:prstGeom prst="rect">
+            <a:avLst/>
+          </a:prstGeom>
+          <a:noFill/>
+        </p:spPr>
+        <p:txBody>
+          <a:bodyPr wrap="square" lIns="0" tIns="0" rIns="0" bIns="0" anchor="t">
+            <a:spAutoFit/>
+          </a:bodyPr>
+          <a:lstStyle/>
+          <a:p>
+            <a:pPr algn="l"/>
+            <a:r>
+              <a:rPr sz="900" b="0" i="0">
+                <a:solidFill>
+                  <a:srgbClr val="000000"/>
+                </a:solidFill>
+                <a:latin typeface="Calibri"/>
+              </a:rPr>
+              <a:t>Pressed early</a:t>
+            </a:r>
+          </a:p>
+        </p:txBody>
+      </p:sp>
+      <p:cxnSp>
+        <p:nvCxnSpPr>
+          <p:cNvPr id="52" name="Connector 51"/>
+          <p:cNvCxnSpPr/>
+          <p:nvPr/>
+        </p:nvCxnSpPr>
+        <p:spPr>
+          <a:xfrm flipH="1">
+            <a:off x="3246120" y="2029968"/>
+            <a:ext cx="640080" cy="0"/>
+          </a:xfrm>
+          <a:prstGeom prst="line">
+            <a:avLst/>
+          </a:prstGeom>
+          <a:ln w="28575">
+            <a:solidFill>
+              <a:srgbClr val="000000"/>
+            </a:solidFill>
+            <a:tailEnd type="triangle"/>
+          </a:ln>
+        </p:spPr>
+        <p:style>
+          <a:lnRef idx="2">
+            <a:schemeClr val="accent1"/>
+          </a:lnRef>
+          <a:fillRef idx="0">
+            <a:schemeClr val="accent1"/>
+          </a:fillRef>
+          <a:effectRef idx="1">
+            <a:schemeClr val="accent1"/>
+          </a:effectRef>
+          <a:fontRef idx="minor">
+            <a:schemeClr val="tx1"/>
+          </a:fontRef>
+        </p:style>
+      </p:cxnSp>
+      <p:sp>
+        <p:nvSpPr>
+          <p:cNvPr id="53" name="TextBox 52"/>
+          <p:cNvSpPr txBox="1"/>
+          <p:nvPr/>
+        </p:nvSpPr>
+        <p:spPr>
+          <a:xfrm>
+            <a:off x="3337560" y="2057400"/>
+            <a:ext cx="914400" cy="228600"/>
+          </a:xfrm>
+          <a:prstGeom prst="rect">
+            <a:avLst/>
+          </a:prstGeom>
+          <a:noFill/>
+        </p:spPr>
+        <p:txBody>
+          <a:bodyPr wrap="square" lIns="0" tIns="0" rIns="0" bIns="0" anchor="t">
+            <a:spAutoFit/>
+          </a:bodyPr>
+          <a:lstStyle/>
+          <a:p>
+            <a:pPr algn="l"/>
+            <a:r>
+              <a:rPr sz="900" b="0" i="0">
+                <a:solidFill>
+                  <a:srgbClr val="000000"/>
+                </a:solidFill>
+                <a:latin typeface="Calibri"/>
+              </a:rPr>
+              <a:t>Retry</a:t>
+            </a:r>
+          </a:p>
+        </p:txBody>
+      </p:sp>
+      <p:sp>
+        <p:nvSpPr>
+          <p:cNvPr id="54" name="Rounded Rectangle 53"/>
+          <p:cNvSpPr/>
+          <p:nvPr/>
+        </p:nvSpPr>
+        <p:spPr>
+          <a:xfrm>
+            <a:off x="548640" y="4663440"/>
+            <a:ext cx="5120640" cy="1280160"/>
+          </a:xfrm>
+          <a:prstGeom prst="roundRect">
+            <a:avLst>
+              <a:gd name="adj" fmla="val 8000"/>
+            </a:avLst>
+          </a:prstGeom>
+          <a:noFill/>
+          <a:ln w="25400">
+            <a:solidFill>
+              <a:srgbClr val="000000"/>
+            </a:solidFill>
+            <a:prstDash val="lgDash"/>
+          </a:ln>
+          <a:effectLst/>
+        </p:spPr>
+        <p:style>
+          <a:lnRef idx="1">
+            <a:schemeClr val="accent1"/>
+          </a:lnRef>
+          <a:fillRef idx="3">
+            <a:schemeClr val="accent1"/>
+          </a:fillRef>
+          <a:effectRef idx="2">
+            <a:schemeClr val="accent1"/>
+          </a:effectRef>
+          <a:fontRef idx="minor">
+            <a:schemeClr val="lt1"/>
+          </a:fontRef>
+        </p:style>
+        <p:txBody>
+          <a:bodyPr rtlCol="0" anchor="ctr"/>
+          <a:lstStyle/>
+          <a:p>
+            <a:pPr algn="ctr"/>
+            <a:endParaRPr/>
+          </a:p>
+        </p:txBody>
+      </p:sp>
+      <p:sp>
+        <p:nvSpPr>
+          <p:cNvPr id="55" name="TextBox 54"/>
+          <p:cNvSpPr txBox="1"/>
+          <p:nvPr/>
+        </p:nvSpPr>
+        <p:spPr>
+          <a:xfrm>
+            <a:off x="777240" y="4736592"/>
+            <a:ext cx="3657600" cy="228600"/>
+          </a:xfrm>
+          <a:prstGeom prst="rect">
+            <a:avLst/>
+          </a:prstGeom>
+          <a:noFill/>
+        </p:spPr>
+        <p:txBody>
+          <a:bodyPr wrap="square" lIns="0" tIns="0" rIns="0" bIns="0" anchor="t">
+            <a:spAutoFit/>
+          </a:bodyPr>
+          <a:lstStyle/>
+          <a:p>
+            <a:pPr algn="l"/>
+            <a:r>
+              <a:rPr sz="1300" b="1" i="0">
+                <a:solidFill>
+                  <a:srgbClr val="000000"/>
+                </a:solidFill>
+                <a:latin typeface="Calibri"/>
+              </a:rPr>
+              <a:t>Cleanup</a:t>
+            </a:r>
+          </a:p>
+        </p:txBody>
+      </p:sp>
+      <p:sp>
+        <p:nvSpPr>
+          <p:cNvPr id="56" name="Rounded Rectangle 55"/>
+          <p:cNvSpPr/>
+          <p:nvPr/>
+        </p:nvSpPr>
+        <p:spPr>
+          <a:xfrm>
+            <a:off x="868680" y="5120640"/>
+            <a:ext cx="1737360" cy="548640"/>
+          </a:xfrm>
+          <a:prstGeom prst="roundRect">
+            <a:avLst>
+              <a:gd name="adj" fmla="val 10000"/>
+            </a:avLst>
+          </a:prstGeom>
+          <a:solidFill>
+            <a:srgbClr val="4A8FBF"/>
+          </a:solidFill>
+          <a:ln w="12700">
+            <a:solidFill>
+              <a:srgbClr val="357098"/>
+            </a:solidFill>
+          </a:ln>
+          <a:effectLst/>
+        </p:spPr>
+        <p:style>
+          <a:lnRef idx="1">
+            <a:schemeClr val="accent1"/>
+          </a:lnRef>
+          <a:fillRef idx="3">
+            <a:schemeClr val="accent1"/>
+          </a:fillRef>
+          <a:effectRef idx="2">
+            <a:schemeClr val="accent1"/>
+          </a:effectRef>
+          <a:fontRef idx="minor">
+            <a:schemeClr val="lt1"/>
+          </a:fontRef>
+        </p:style>
+        <p:txBody>
+          <a:bodyPr wrap="square" lIns="36576" tIns="27432" rIns="36576" bIns="27432" rtlCol="0" anchor="ctr"/>
+          <a:lstStyle/>
+          <a:p>
+            <a:pPr algn="ctr"/>
+            <a:r>
+              <a:rPr sz="1200" b="0" i="0">
+                <a:solidFill>
+                  <a:srgbClr val="FFFFFF"/>
+                </a:solidFill>
+                <a:latin typeface="Calibri"/>
+              </a:rPr>
+              <a:t>Execute Task</a:t>
+            </a:r>
+          </a:p>
+          <a:p>
+            <a:pPr algn="ctr"/>
+            <a:r>
+              <a:rPr sz="800" b="0" i="1">
+                <a:solidFill>
+                  <a:srgbClr val="E3F0F8"/>
+                </a:solidFill>
+                <a:latin typeface="Calibri"/>
+              </a:rPr>
+              <a:t>run()</a:t>
+            </a:r>
+          </a:p>
+        </p:txBody>
+      </p:sp>
+      <p:sp>
+        <p:nvSpPr>
+          <p:cNvPr id="57" name="Rounded Rectangle 56"/>
+          <p:cNvSpPr/>
+          <p:nvPr/>
+        </p:nvSpPr>
+        <p:spPr>
+          <a:xfrm>
+            <a:off x="3520440" y="5120640"/>
+            <a:ext cx="1920240" cy="548640"/>
+          </a:xfrm>
+          <a:prstGeom prst="roundRect">
+            <a:avLst>
+              <a:gd name="adj" fmla="val 10000"/>
+            </a:avLst>
+          </a:prstGeom>
+          <a:solidFill>
+            <a:srgbClr val="4A8FBF"/>
+          </a:solidFill>
+          <a:ln w="12700">
+            <a:solidFill>
+              <a:srgbClr val="357098"/>
+            </a:solidFill>
+          </a:ln>
+          <a:effectLst/>
+        </p:spPr>
+        <p:style>
+          <a:lnRef idx="1">
+            <a:schemeClr val="accent1"/>
+          </a:lnRef>
+          <a:fillRef idx="3">
+            <a:schemeClr val="accent1"/>
+          </a:fillRef>
+          <a:effectRef idx="2">
+            <a:schemeClr val="accent1"/>
+          </a:effectRef>
+          <a:fontRef idx="minor">
+            <a:schemeClr val="lt1"/>
+          </a:fontRef>
+        </p:style>
+        <p:txBody>
+          <a:bodyPr wrap="square" lIns="36576" tIns="27432" rIns="36576" bIns="27432" rtlCol="0" anchor="ctr"/>
+          <a:lstStyle/>
+          <a:p>
+            <a:pPr algn="ctr"/>
+            <a:r>
+              <a:rPr sz="1200" b="0" i="0">
+                <a:solidFill>
+                  <a:srgbClr val="FFFFFF"/>
+                </a:solidFill>
+                <a:latin typeface="Calibri"/>
+              </a:rPr>
+              <a:t>Cleanup</a:t>
+            </a:r>
+          </a:p>
+          <a:p>
+            <a:pPr algn="ctr"/>
+            <a:r>
+              <a:rPr sz="800" b="0" i="1">
+                <a:solidFill>
+                  <a:srgbClr val="E3F0F8"/>
+                </a:solidFill>
+                <a:latin typeface="Calibri"/>
+              </a:rPr>
+              <a:t>display.text('----')</a:t>
+            </a:r>
+          </a:p>
+          <a:p>
+            <a:pPr algn="ctr"/>
+            <a:r>
+              <a:rPr sz="800" b="0" i="1">
+                <a:solidFill>
+                  <a:srgbClr val="E3F0F8"/>
+                </a:solidFill>
+                <a:latin typeface="Calibri"/>
+              </a:rPr>
+              <a:t>strip.clear()  stats.save()</a:t>
+            </a:r>
+          </a:p>
+        </p:txBody>
+      </p:sp>
+      <p:cxnSp>
+        <p:nvCxnSpPr>
+          <p:cNvPr id="58" name="Connector 57"/>
+          <p:cNvCxnSpPr/>
+          <p:nvPr/>
+        </p:nvCxnSpPr>
+        <p:spPr>
+          <a:xfrm>
+            <a:off x="2606040" y="5394960"/>
+            <a:ext cx="914400" cy="0"/>
+          </a:xfrm>
+          <a:prstGeom prst="line">
+            <a:avLst/>
+          </a:prstGeom>
+          <a:ln w="28575">
+            <a:solidFill>
+              <a:srgbClr val="000000"/>
+            </a:solidFill>
+            <a:tailEnd type="triangle"/>
+          </a:ln>
+        </p:spPr>
+        <p:style>
+          <a:lnRef idx="2">
+            <a:schemeClr val="accent1"/>
+          </a:lnRef>
+          <a:fillRef idx="0">
+            <a:schemeClr val="accent1"/>
+          </a:fillRef>
+          <a:effectRef idx="1">
+            <a:schemeClr val="accent1"/>
+          </a:effectRef>
+          <a:fontRef idx="minor">
+            <a:schemeClr val="tx1"/>
+          </a:fontRef>
+        </p:style>
+      </p:cxnSp>
+      <p:sp>
+        <p:nvSpPr>
+          <p:cNvPr id="59" name="TextBox 58"/>
+          <p:cNvSpPr txBox="1"/>
+          <p:nvPr/>
+        </p:nvSpPr>
+        <p:spPr>
+          <a:xfrm>
+            <a:off x="2651760" y="5138928"/>
+            <a:ext cx="822960" cy="228600"/>
+          </a:xfrm>
+          <a:prstGeom prst="rect">
+            <a:avLst/>
+          </a:prstGeom>
+          <a:noFill/>
+        </p:spPr>
+        <p:txBody>
+          <a:bodyPr wrap="square" lIns="0" tIns="0" rIns="0" bIns="0" anchor="t">
+            <a:spAutoFit/>
+          </a:bodyPr>
+          <a:lstStyle/>
+          <a:p>
+            <a:pPr algn="ctr"/>
+            <a:r>
+              <a:rPr sz="1000" b="0" i="0">
+                <a:solidFill>
+                  <a:srgbClr val="000000"/>
+                </a:solidFill>
+                <a:latin typeface="Calibri"/>
+              </a:rPr>
+              <a:t>Ctrl-C</a:t>
+            </a:r>
+          </a:p>
+        </p:txBody>
+      </p:sp>
+      <p:cxnSp>
+        <p:nvCxnSpPr>
+          <p:cNvPr id="60" name="Connector 59"/>
+          <p:cNvCxnSpPr/>
+          <p:nvPr/>
+        </p:nvCxnSpPr>
+        <p:spPr>
+          <a:xfrm flipH="1" flipV="1">
+            <a:off x="5687568" y="2834640"/>
+            <a:ext cx="2130552" cy="731520"/>
+          </a:xfrm>
+          <a:prstGeom prst="line">
+            <a:avLst/>
+          </a:prstGeom>
+          <a:ln w="38100">
+            <a:solidFill>
+              <a:srgbClr val="4CAF50"/>
+            </a:solidFill>
+            <a:tailEnd type="triangle"/>
+          </a:ln>
+        </p:spPr>
+        <p:style>
+          <a:lnRef idx="2">
+            <a:schemeClr val="accent1"/>
+          </a:lnRef>
+          <a:fillRef idx="0">
+            <a:schemeClr val="accent1"/>
+          </a:fillRef>
+          <a:effectRef idx="1">
+            <a:schemeClr val="accent1"/>
+          </a:effectRef>
+          <a:fontRef idx="minor">
+            <a:schemeClr val="tx1"/>
+          </a:fontRef>
+        </p:style>
+      </p:cxnSp>
+      <p:cxnSp>
+        <p:nvCxnSpPr>
+          <p:cNvPr id="61" name="Connector 60"/>
+          <p:cNvCxnSpPr/>
+          <p:nvPr/>
+        </p:nvCxnSpPr>
+        <p:spPr>
+          <a:xfrm flipH="1" flipV="1">
+            <a:off x="5687568" y="5394960"/>
+            <a:ext cx="438912" cy="274320"/>
+          </a:xfrm>
+          <a:prstGeom prst="line">
+            <a:avLst/>
+          </a:prstGeom>
+          <a:ln w="38100">
+            <a:solidFill>
+              <a:srgbClr val="4CAF50"/>
+            </a:solidFill>
+            <a:tailEnd type="triangle"/>
+          </a:ln>
+        </p:spPr>
+        <p:style>
+          <a:lnRef idx="2">
+            <a:schemeClr val="accent1"/>
+          </a:lnRef>
+          <a:fillRef idx="0">
+            <a:schemeClr val="accent1"/>
+          </a:fillRef>
+          <a:effectRef idx="1">
+            <a:schemeClr val="accent1"/>
+          </a:effectRef>
+          <a:fontRef idx="minor">
+            <a:schemeClr val="tx1"/>
+          </a:fontRef>
+        </p:style>
+      </p:cxnSp>
+    </p:spTree>
+  </p:cSld>
+  <p:clrMapOvr>
+    <a:masterClrMapping/>
+  </p:clrMapOvr>
 </p:sld>
 </file>
 
